--- a/exports/pptx/lessons/middle-module-14-magic-squares/day-02-magic-constant.pptx
+++ b/exports/pptx/lessons/middle-module-14-magic-squares/day-02-magic-constant.pptx
@@ -6198,7 +6198,627 @@
         </p:nvSpPr>
         <p:spPr>
           <a:xfrm>
-            <a:off x="634901" y="5309741"/>
+            <a:off x="406301" y="3605510"/>
+            <a:ext cx="8498026" cy="213271"/>
+          </a:xfrm>
+          <a:prstGeom prst="rect">
+            <a:avLst/>
+          </a:prstGeom>
+          <a:noFill/>
+          <a:ln/>
+        </p:spPr>
+        <p:txBody>
+          <a:bodyPr wrap="square" lIns="0" tIns="0" rIns="0" bIns="0" rtlCol="0" anchor="t"/>
+          <a:lstStyle/>
+          <a:p>
+            <a:pPr algn="l" indent="0" marL="0">
+              <a:lnSpc>
+                <a:spcPts val="1680"/>
+              </a:lnSpc>
+              <a:spcBef>
+                <a:spcPts val="300"/>
+              </a:spcBef>
+              <a:spcAft>
+                <a:spcPts val="300"/>
+              </a:spcAft>
+              <a:buNone/>
+            </a:pPr>
+            <a:r>
+              <a:rPr lang="en-US" sz="1200" i="1" dirty="0">
+                <a:solidFill>
+                  <a:srgbClr val="1C2833"/>
+                </a:solidFill>
+                <a:latin typeface="Arial" pitchFamily="34" charset="0"/>
+                <a:ea typeface="Arial" pitchFamily="34" charset="-122"/>
+                <a:cs typeface="Arial" pitchFamily="34" charset="-120"/>
+              </a:rPr>
+              <a:t>Each row:</a:t>
+            </a:r>
+            <a:pPr algn="l" indent="0" marL="0">
+              <a:lnSpc>
+                <a:spcPts val="1680"/>
+              </a:lnSpc>
+              <a:spcBef>
+                <a:spcPts val="300"/>
+              </a:spcBef>
+              <a:spcAft>
+                <a:spcPts val="300"/>
+              </a:spcAft>
+              <a:buNone/>
+            </a:pPr>
+            <a:r>
+              <a:rPr lang="en-US" sz="1200" dirty="0">
+                <a:solidFill>
+                  <a:srgbClr val="1C2833"/>
+                </a:solidFill>
+                <a:latin typeface="Arial" pitchFamily="34" charset="0"/>
+                <a:ea typeface="Arial" pitchFamily="34" charset="-122"/>
+                <a:cs typeface="Arial" pitchFamily="34" charset="-120"/>
+              </a:rPr>
+              <a:t>n</a:t>
+            </a:r>
+            <a:pPr algn="l" indent="0" marL="0">
+              <a:lnSpc>
+                <a:spcPts val="1680"/>
+              </a:lnSpc>
+              <a:spcBef>
+                <a:spcPts val="300"/>
+              </a:spcBef>
+              <a:spcAft>
+                <a:spcPts val="300"/>
+              </a:spcAft>
+              <a:buNone/>
+            </a:pPr>
+            <a:r>
+              <a:rPr lang="en-US" sz="1200" i="1" dirty="0">
+                <a:solidFill>
+                  <a:srgbClr val="1C2833"/>
+                </a:solidFill>
+                <a:latin typeface="Arial" pitchFamily="34" charset="0"/>
+                <a:ea typeface="Arial" pitchFamily="34" charset="-122"/>
+                <a:cs typeface="Arial" pitchFamily="34" charset="-120"/>
+              </a:rPr>
+              <a:t> ·</a:t>
+            </a:r>
+            <a:pPr algn="l" indent="0" marL="0">
+              <a:lnSpc>
+                <a:spcPts val="1680"/>
+              </a:lnSpc>
+              <a:spcBef>
+                <a:spcPts val="300"/>
+              </a:spcBef>
+              <a:spcAft>
+                <a:spcPts val="300"/>
+              </a:spcAft>
+              <a:buNone/>
+            </a:pPr>
+            <a:r>
+              <a:rPr lang="en-US" sz="1200" dirty="0">
+                <a:solidFill>
+                  <a:srgbClr val="1C2833"/>
+                </a:solidFill>
+                <a:latin typeface="Arial" pitchFamily="34" charset="0"/>
+                <a:ea typeface="Arial" pitchFamily="34" charset="-122"/>
+                <a:cs typeface="Arial" pitchFamily="34" charset="-120"/>
+              </a:rPr>
+              <a:t>n</a:t>
+            </a:r>
+            <a:pPr algn="l" indent="0" marL="0">
+              <a:lnSpc>
+                <a:spcPts val="1680"/>
+              </a:lnSpc>
+              <a:spcBef>
+                <a:spcPts val="300"/>
+              </a:spcBef>
+              <a:spcAft>
+                <a:spcPts val="300"/>
+              </a:spcAft>
+              <a:buNone/>
+            </a:pPr>
+            <a:r>
+              <a:rPr lang="en-US" sz="1200" i="1" dirty="0">
+                <a:solidFill>
+                  <a:srgbClr val="1C2833"/>
+                </a:solidFill>
+                <a:latin typeface="Arial" pitchFamily="34" charset="0"/>
+                <a:ea typeface="Arial" pitchFamily="34" charset="-122"/>
+                <a:cs typeface="Arial" pitchFamily="34" charset="-120"/>
+              </a:rPr>
+              <a:t>² ·</a:t>
+            </a:r>
+            <a:pPr algn="l" indent="0" marL="0">
+              <a:lnSpc>
+                <a:spcPts val="1680"/>
+              </a:lnSpc>
+              <a:spcBef>
+                <a:spcPts val="300"/>
+              </a:spcBef>
+              <a:spcAft>
+                <a:spcPts val="300"/>
+              </a:spcAft>
+              <a:buNone/>
+            </a:pPr>
+            <a:r>
+              <a:rPr lang="en-US" sz="1200" dirty="0">
+                <a:solidFill>
+                  <a:srgbClr val="1C2833"/>
+                </a:solidFill>
+                <a:latin typeface="Arial" pitchFamily="34" charset="0"/>
+                <a:ea typeface="Arial" pitchFamily="34" charset="-122"/>
+                <a:cs typeface="Arial" pitchFamily="34" charset="-120"/>
+              </a:rPr>
+              <a:t>n</a:t>
+            </a:r>
+            <a:pPr algn="l" indent="0" marL="0">
+              <a:lnSpc>
+                <a:spcPts val="1680"/>
+              </a:lnSpc>
+              <a:spcBef>
+                <a:spcPts val="300"/>
+              </a:spcBef>
+              <a:spcAft>
+                <a:spcPts val="300"/>
+              </a:spcAft>
+              <a:buNone/>
+            </a:pPr>
+            <a:r>
+              <a:rPr lang="en-US" sz="1200" i="1" dirty="0">
+                <a:solidFill>
+                  <a:srgbClr val="1C2833"/>
+                </a:solidFill>
+                <a:latin typeface="Arial" pitchFamily="34" charset="0"/>
+                <a:ea typeface="Arial" pitchFamily="34" charset="-122"/>
+                <a:cs typeface="Arial" pitchFamily="34" charset="-120"/>
+              </a:rPr>
+              <a:t>²+1 ·</a:t>
+            </a:r>
+            <a:pPr algn="l" indent="0" marL="0">
+              <a:lnSpc>
+                <a:spcPts val="1680"/>
+              </a:lnSpc>
+              <a:spcBef>
+                <a:spcPts val="300"/>
+              </a:spcBef>
+              <a:spcAft>
+                <a:spcPts val="300"/>
+              </a:spcAft>
+              <a:buNone/>
+            </a:pPr>
+            <a:r>
+              <a:rPr lang="en-US" sz="1200" dirty="0">
+                <a:solidFill>
+                  <a:srgbClr val="1C2833"/>
+                </a:solidFill>
+                <a:latin typeface="Arial" pitchFamily="34" charset="0"/>
+                <a:ea typeface="Arial" pitchFamily="34" charset="-122"/>
+                <a:cs typeface="Arial" pitchFamily="34" charset="-120"/>
+              </a:rPr>
+              <a:t>n</a:t>
+            </a:r>
+            <a:pPr algn="l" indent="0" marL="0">
+              <a:lnSpc>
+                <a:spcPts val="1680"/>
+              </a:lnSpc>
+              <a:spcBef>
+                <a:spcPts val="300"/>
+              </a:spcBef>
+              <a:spcAft>
+                <a:spcPts val="300"/>
+              </a:spcAft>
+              <a:buNone/>
+            </a:pPr>
+            <a:r>
+              <a:rPr lang="en-US" sz="1200" i="1" dirty="0">
+                <a:solidFill>
+                  <a:srgbClr val="1C2833"/>
+                </a:solidFill>
+                <a:latin typeface="Arial" pitchFamily="34" charset="0"/>
+                <a:ea typeface="Arial" pitchFamily="34" charset="-122"/>
+                <a:cs typeface="Arial" pitchFamily="34" charset="-120"/>
+              </a:rPr>
+              <a:t>(</a:t>
+            </a:r>
+            <a:pPr algn="l" indent="0" marL="0">
+              <a:lnSpc>
+                <a:spcPts val="1680"/>
+              </a:lnSpc>
+              <a:spcBef>
+                <a:spcPts val="300"/>
+              </a:spcBef>
+              <a:spcAft>
+                <a:spcPts val="300"/>
+              </a:spcAft>
+              <a:buNone/>
+            </a:pPr>
+            <a:r>
+              <a:rPr lang="en-US" sz="1200" dirty="0">
+                <a:solidFill>
+                  <a:srgbClr val="1C2833"/>
+                </a:solidFill>
+                <a:latin typeface="Arial" pitchFamily="34" charset="0"/>
+                <a:ea typeface="Arial" pitchFamily="34" charset="-122"/>
+                <a:cs typeface="Arial" pitchFamily="34" charset="-120"/>
+              </a:rPr>
+              <a:t>n</a:t>
+            </a:r>
+            <a:pPr algn="l" indent="0" marL="0">
+              <a:lnSpc>
+                <a:spcPts val="1680"/>
+              </a:lnSpc>
+              <a:spcBef>
+                <a:spcPts val="300"/>
+              </a:spcBef>
+              <a:spcAft>
+                <a:spcPts val="300"/>
+              </a:spcAft>
+              <a:buNone/>
+            </a:pPr>
+            <a:r>
+              <a:rPr lang="en-US" sz="1200" i="1" dirty="0">
+                <a:solidFill>
+                  <a:srgbClr val="1C2833"/>
+                </a:solidFill>
+                <a:latin typeface="Arial" pitchFamily="34" charset="0"/>
+                <a:ea typeface="Arial" pitchFamily="34" charset="-122"/>
+                <a:cs typeface="Arial" pitchFamily="34" charset="-120"/>
+              </a:rPr>
+              <a:t>²+1)/2.</a:t>
+            </a:r>
+            <a:endParaRPr lang="en-US" sz="1200" dirty="0"/>
+          </a:p>
+        </p:txBody>
+      </p:sp>
+      <p:sp>
+        <p:nvSpPr>
+          <p:cNvPr id="12" name="Text 10"/>
+          <p:cNvSpPr/>
+          <p:nvPr/>
+        </p:nvSpPr>
+        <p:spPr>
+          <a:xfrm>
+            <a:off x="634901" y="3907631"/>
+            <a:ext cx="8102798" cy="1257002"/>
+          </a:xfrm>
+          <a:prstGeom prst="rect">
+            <a:avLst/>
+          </a:prstGeom>
+          <a:noFill/>
+          <a:ln/>
+        </p:spPr>
+        <p:txBody>
+          <a:bodyPr wrap="square" lIns="0" tIns="0" rIns="0" bIns="0" rtlCol="0" anchor="t"/>
+          <a:lstStyle/>
+          <a:p>
+            <a:pPr algn="l" marL="342900" indent="-342900">
+              <a:lnSpc>
+                <a:spcPts val="1620"/>
+              </a:lnSpc>
+              <a:spcAft>
+                <a:spcPts val="300"/>
+              </a:spcAft>
+              <a:buSzPct val="100000"/>
+              <a:buChar char="•"/>
+            </a:pPr>
+            <a:r>
+              <a:rPr lang="en-US" sz="1200" b="1" dirty="0">
+                <a:solidFill>
+                  <a:srgbClr val="1C2833"/>
+                </a:solidFill>
+                <a:latin typeface="Arial" pitchFamily="34" charset="0"/>
+                <a:ea typeface="Arial" pitchFamily="34" charset="-122"/>
+                <a:cs typeface="Arial" pitchFamily="34" charset="-120"/>
+              </a:rPr>
+              <a:t>3</a:t>
+            </a:r>
+            <a:pPr algn="l" indent="0" marL="0">
+              <a:lnSpc>
+                <a:spcPts val="1620"/>
+              </a:lnSpc>
+              <a:spcAft>
+                <a:spcPts val="300"/>
+              </a:spcAft>
+              <a:buNone/>
+            </a:pPr>
+            <a:r>
+              <a:rPr lang="en-US" sz="1200" dirty="0">
+                <a:solidFill>
+                  <a:srgbClr val="1C2833"/>
+                </a:solidFill>
+                <a:latin typeface="Arial" pitchFamily="34" charset="0"/>
+                <a:ea typeface="Arial" pitchFamily="34" charset="-122"/>
+                <a:cs typeface="Arial" pitchFamily="34" charset="-120"/>
+              </a:rPr>
+              <a:t> — 9 · 10 · 3 × 10 / 2 = </a:t>
+            </a:r>
+            <a:pPr algn="l" indent="0" marL="0">
+              <a:lnSpc>
+                <a:spcPts val="1620"/>
+              </a:lnSpc>
+              <a:spcAft>
+                <a:spcPts val="300"/>
+              </a:spcAft>
+              <a:buNone/>
+            </a:pPr>
+            <a:r>
+              <a:rPr lang="en-US" sz="1200" b="1" dirty="0">
+                <a:solidFill>
+                  <a:srgbClr val="1C2833"/>
+                </a:solidFill>
+                <a:latin typeface="Arial" pitchFamily="34" charset="0"/>
+                <a:ea typeface="Arial" pitchFamily="34" charset="-122"/>
+                <a:cs typeface="Arial" pitchFamily="34" charset="-120"/>
+              </a:rPr>
+              <a:t>15</a:t>
+            </a:r>
+            <a:endParaRPr lang="en-US" sz="1200" dirty="0"/>
+          </a:p>
+          <a:p>
+            <a:pPr algn="l" marL="342900" indent="-342900">
+              <a:lnSpc>
+                <a:spcPts val="1620"/>
+              </a:lnSpc>
+              <a:spcAft>
+                <a:spcPts val="300"/>
+              </a:spcAft>
+              <a:buSzPct val="100000"/>
+              <a:buChar char="•"/>
+            </a:pPr>
+            <a:r>
+              <a:rPr lang="en-US" sz="1200" b="1" dirty="0">
+                <a:solidFill>
+                  <a:srgbClr val="1C2833"/>
+                </a:solidFill>
+                <a:latin typeface="Arial" pitchFamily="34" charset="0"/>
+                <a:ea typeface="Arial" pitchFamily="34" charset="-122"/>
+                <a:cs typeface="Arial" pitchFamily="34" charset="-120"/>
+              </a:rPr>
+              <a:t>4</a:t>
+            </a:r>
+            <a:pPr algn="l" indent="0" marL="0">
+              <a:lnSpc>
+                <a:spcPts val="1620"/>
+              </a:lnSpc>
+              <a:spcAft>
+                <a:spcPts val="300"/>
+              </a:spcAft>
+              <a:buNone/>
+            </a:pPr>
+            <a:r>
+              <a:rPr lang="en-US" sz="1200" dirty="0">
+                <a:solidFill>
+                  <a:srgbClr val="1C2833"/>
+                </a:solidFill>
+                <a:latin typeface="Arial" pitchFamily="34" charset="0"/>
+                <a:ea typeface="Arial" pitchFamily="34" charset="-122"/>
+                <a:cs typeface="Arial" pitchFamily="34" charset="-120"/>
+              </a:rPr>
+              <a:t> — 16 · 17 · 4 × 17 / 2 = </a:t>
+            </a:r>
+            <a:pPr algn="l" indent="0" marL="0">
+              <a:lnSpc>
+                <a:spcPts val="1620"/>
+              </a:lnSpc>
+              <a:spcAft>
+                <a:spcPts val="300"/>
+              </a:spcAft>
+              <a:buNone/>
+            </a:pPr>
+            <a:r>
+              <a:rPr lang="en-US" sz="1200" b="1" dirty="0">
+                <a:solidFill>
+                  <a:srgbClr val="1C2833"/>
+                </a:solidFill>
+                <a:latin typeface="Arial" pitchFamily="34" charset="0"/>
+                <a:ea typeface="Arial" pitchFamily="34" charset="-122"/>
+                <a:cs typeface="Arial" pitchFamily="34" charset="-120"/>
+              </a:rPr>
+              <a:t>34</a:t>
+            </a:r>
+            <a:endParaRPr lang="en-US" sz="1200" dirty="0"/>
+          </a:p>
+          <a:p>
+            <a:pPr algn="l" marL="342900" indent="-342900">
+              <a:lnSpc>
+                <a:spcPts val="1620"/>
+              </a:lnSpc>
+              <a:spcAft>
+                <a:spcPts val="300"/>
+              </a:spcAft>
+              <a:buSzPct val="100000"/>
+              <a:buChar char="•"/>
+            </a:pPr>
+            <a:r>
+              <a:rPr lang="en-US" sz="1200" b="1" dirty="0">
+                <a:solidFill>
+                  <a:srgbClr val="1C2833"/>
+                </a:solidFill>
+                <a:latin typeface="Arial" pitchFamily="34" charset="0"/>
+                <a:ea typeface="Arial" pitchFamily="34" charset="-122"/>
+                <a:cs typeface="Arial" pitchFamily="34" charset="-120"/>
+              </a:rPr>
+              <a:t>5</a:t>
+            </a:r>
+            <a:pPr algn="l" indent="0" marL="0">
+              <a:lnSpc>
+                <a:spcPts val="1620"/>
+              </a:lnSpc>
+              <a:spcAft>
+                <a:spcPts val="300"/>
+              </a:spcAft>
+              <a:buNone/>
+            </a:pPr>
+            <a:r>
+              <a:rPr lang="en-US" sz="1200" dirty="0">
+                <a:solidFill>
+                  <a:srgbClr val="1C2833"/>
+                </a:solidFill>
+                <a:latin typeface="Arial" pitchFamily="34" charset="0"/>
+                <a:ea typeface="Arial" pitchFamily="34" charset="-122"/>
+                <a:cs typeface="Arial" pitchFamily="34" charset="-120"/>
+              </a:rPr>
+              <a:t> — 25 · 26 · 5 × 26 / 2 = </a:t>
+            </a:r>
+            <a:pPr algn="l" indent="0" marL="0">
+              <a:lnSpc>
+                <a:spcPts val="1620"/>
+              </a:lnSpc>
+              <a:spcAft>
+                <a:spcPts val="300"/>
+              </a:spcAft>
+              <a:buNone/>
+            </a:pPr>
+            <a:r>
+              <a:rPr lang="en-US" sz="1200" b="1" dirty="0">
+                <a:solidFill>
+                  <a:srgbClr val="1C2833"/>
+                </a:solidFill>
+                <a:latin typeface="Arial" pitchFamily="34" charset="0"/>
+                <a:ea typeface="Arial" pitchFamily="34" charset="-122"/>
+                <a:cs typeface="Arial" pitchFamily="34" charset="-120"/>
+              </a:rPr>
+              <a:t>65</a:t>
+            </a:r>
+            <a:endParaRPr lang="en-US" sz="1200" dirty="0"/>
+          </a:p>
+          <a:p>
+            <a:pPr algn="l" marL="342900" indent="-342900">
+              <a:lnSpc>
+                <a:spcPts val="1620"/>
+              </a:lnSpc>
+              <a:spcAft>
+                <a:spcPts val="300"/>
+              </a:spcAft>
+              <a:buSzPct val="100000"/>
+              <a:buChar char="•"/>
+            </a:pPr>
+            <a:r>
+              <a:rPr lang="en-US" sz="1200" b="1" dirty="0">
+                <a:solidFill>
+                  <a:srgbClr val="1C2833"/>
+                </a:solidFill>
+                <a:latin typeface="Arial" pitchFamily="34" charset="0"/>
+                <a:ea typeface="Arial" pitchFamily="34" charset="-122"/>
+                <a:cs typeface="Arial" pitchFamily="34" charset="-120"/>
+              </a:rPr>
+              <a:t>6</a:t>
+            </a:r>
+            <a:pPr algn="l" indent="0" marL="0">
+              <a:lnSpc>
+                <a:spcPts val="1620"/>
+              </a:lnSpc>
+              <a:spcAft>
+                <a:spcPts val="300"/>
+              </a:spcAft>
+              <a:buNone/>
+            </a:pPr>
+            <a:r>
+              <a:rPr lang="en-US" sz="1200" dirty="0">
+                <a:solidFill>
+                  <a:srgbClr val="1C2833"/>
+                </a:solidFill>
+                <a:latin typeface="Arial" pitchFamily="34" charset="0"/>
+                <a:ea typeface="Arial" pitchFamily="34" charset="-122"/>
+                <a:cs typeface="Arial" pitchFamily="34" charset="-120"/>
+              </a:rPr>
+              <a:t> — 36 · 37 · 6 × 37 / 2 = </a:t>
+            </a:r>
+            <a:pPr algn="l" indent="0" marL="0">
+              <a:lnSpc>
+                <a:spcPts val="1620"/>
+              </a:lnSpc>
+              <a:spcAft>
+                <a:spcPts val="300"/>
+              </a:spcAft>
+              <a:buNone/>
+            </a:pPr>
+            <a:r>
+              <a:rPr lang="en-US" sz="1200" b="1" dirty="0">
+                <a:solidFill>
+                  <a:srgbClr val="1C2833"/>
+                </a:solidFill>
+                <a:latin typeface="Arial" pitchFamily="34" charset="0"/>
+                <a:ea typeface="Arial" pitchFamily="34" charset="-122"/>
+                <a:cs typeface="Arial" pitchFamily="34" charset="-120"/>
+              </a:rPr>
+              <a:t>111</a:t>
+            </a:r>
+            <a:endParaRPr lang="en-US" sz="1200" dirty="0"/>
+          </a:p>
+          <a:p>
+            <a:pPr algn="l" marL="342900" indent="-342900">
+              <a:lnSpc>
+                <a:spcPts val="1620"/>
+              </a:lnSpc>
+              <a:spcAft>
+                <a:spcPts val="300"/>
+              </a:spcAft>
+              <a:buSzPct val="100000"/>
+              <a:buChar char="•"/>
+            </a:pPr>
+            <a:r>
+              <a:rPr lang="en-US" sz="1200" b="1" dirty="0">
+                <a:solidFill>
+                  <a:srgbClr val="1C2833"/>
+                </a:solidFill>
+                <a:latin typeface="Arial" pitchFamily="34" charset="0"/>
+                <a:ea typeface="Arial" pitchFamily="34" charset="-122"/>
+                <a:cs typeface="Arial" pitchFamily="34" charset="-120"/>
+              </a:rPr>
+              <a:t>7</a:t>
+            </a:r>
+            <a:pPr algn="l" indent="0" marL="0">
+              <a:lnSpc>
+                <a:spcPts val="1620"/>
+              </a:lnSpc>
+              <a:spcAft>
+                <a:spcPts val="300"/>
+              </a:spcAft>
+              <a:buNone/>
+            </a:pPr>
+            <a:r>
+              <a:rPr lang="en-US" sz="1200" dirty="0">
+                <a:solidFill>
+                  <a:srgbClr val="1C2833"/>
+                </a:solidFill>
+                <a:latin typeface="Arial" pitchFamily="34" charset="0"/>
+                <a:ea typeface="Arial" pitchFamily="34" charset="-122"/>
+                <a:cs typeface="Arial" pitchFamily="34" charset="-120"/>
+              </a:rPr>
+              <a:t> — 49 · 50 · 7 × 50 / 2 = </a:t>
+            </a:r>
+            <a:pPr algn="l" indent="0" marL="0">
+              <a:lnSpc>
+                <a:spcPts val="1620"/>
+              </a:lnSpc>
+              <a:spcAft>
+                <a:spcPts val="300"/>
+              </a:spcAft>
+              <a:buNone/>
+            </a:pPr>
+            <a:r>
+              <a:rPr lang="en-US" sz="1200" b="1" dirty="0">
+                <a:solidFill>
+                  <a:srgbClr val="1C2833"/>
+                </a:solidFill>
+                <a:latin typeface="Arial" pitchFamily="34" charset="0"/>
+                <a:ea typeface="Arial" pitchFamily="34" charset="-122"/>
+                <a:cs typeface="Arial" pitchFamily="34" charset="-120"/>
+              </a:rPr>
+              <a:t>175</a:t>
+            </a:r>
+            <a:endParaRPr lang="en-US" sz="1200" dirty="0"/>
+          </a:p>
+        </p:txBody>
+      </p:sp>
+      <p:sp>
+        <p:nvSpPr>
+          <p:cNvPr id="13" name="Text 11"/>
+          <p:cNvSpPr/>
+          <p:nvPr/>
+        </p:nvSpPr>
+        <p:spPr>
+          <a:xfrm>
+            <a:off x="634901" y="5266134"/>
             <a:ext cx="8102798" cy="712291"/>
           </a:xfrm>
           <a:prstGeom prst="rect">
@@ -6438,13 +7058,13 @@
       </p:sp>
       <p:sp>
         <p:nvSpPr>
-          <p:cNvPr id="12" name="Text 10"/>
+          <p:cNvPr id="14" name="Text 12"/>
           <p:cNvSpPr/>
           <p:nvPr/>
         </p:nvSpPr>
         <p:spPr>
           <a:xfrm>
-            <a:off x="406301" y="6187083"/>
+            <a:off x="406301" y="6143476"/>
             <a:ext cx="8498026" cy="213271"/>
           </a:xfrm>
           <a:prstGeom prst="rect">

--- a/exports/pptx/lessons/middle-module-14-magic-squares/day-02-magic-constant.pptx
+++ b/exports/pptx/lessons/middle-module-14-magic-squares/day-02-magic-constant.pptx
@@ -18,9 +18,14 @@
     <p:sldId id="266" r:id="rId12"/>
     <p:sldId id="267" r:id="rId13"/>
     <p:sldId id="268" r:id="rId14"/>
+    <p:sldId id="269" r:id="rId15"/>
+    <p:sldId id="270" r:id="rId16"/>
+    <p:sldId id="271" r:id="rId17"/>
+    <p:sldId id="272" r:id="rId18"/>
+    <p:sldId id="273" r:id="rId19"/>
   </p:sldIdLst>
   <p:notesMasterIdLst>
-    <p:notesMasterId r:id="rId15"/>
+    <p:notesMasterId r:id="rId20"/>
   </p:notesMasterIdLst>
   <p:sldSz cx="9144000" cy="5143500"/>
   <p:notesSz cx="5143500" cy="9144000"/>
@@ -890,6 +895,446 @@
             <a:fld id="{F7021451-1387-4CA6-816F-3879F97B5CBC}" type="slidenum">
               <a:rPr lang="en-US"/>
               <a:t>13</a:t>
+            </a:fld>
+            <a:endParaRPr lang="en-US"/>
+          </a:p>
+        </p:txBody>
+      </p:sp>
+    </p:spTree>
+    <p:extLst>
+      <p:ext uri="{BB962C8B-B14F-4D97-AF65-F5344CB8AC3E}">
+        <p14:creationId xmlns:p14="http://schemas.microsoft.com/office/powerpoint/2010/main" val="1024086991"/>
+      </p:ext>
+    </p:extLst>
+  </p:cSld>
+  <p:clrMapOvr>
+    <a:masterClrMapping/>
+  </p:clrMapOvr>
+</p:notes>
+</file>
+
+<file path=ppt/notesSlides/notesSlide14.xml><?xml version="1.0" encoding="utf-8"?>
+<p:notes xmlns:a="http://schemas.openxmlformats.org/drawingml/2006/main" xmlns:r="http://schemas.openxmlformats.org/officeDocument/2006/relationships" xmlns:p="http://schemas.openxmlformats.org/presentationml/2006/main">
+  <p:cSld>
+    <p:spTree>
+      <p:nvGrpSpPr>
+        <p:cNvPr id="1" name=""/>
+        <p:cNvGrpSpPr/>
+        <p:nvPr/>
+      </p:nvGrpSpPr>
+      <p:grpSpPr>
+        <a:xfrm>
+          <a:off x="0" y="0"/>
+          <a:ext cx="0" cy="0"/>
+          <a:chOff x="0" y="0"/>
+          <a:chExt cx="0" cy="0"/>
+        </a:xfrm>
+      </p:grpSpPr>
+      <p:sp>
+        <p:nvSpPr>
+          <p:cNvPr id="2" name="Slide Image Placeholder 1"/>
+          <p:cNvSpPr>
+            <a:spLocks noGrp="1" noRot="1" noChangeAspect="1"/>
+          </p:cNvSpPr>
+          <p:nvPr>
+            <p:ph type="sldImg"/>
+          </p:nvPr>
+        </p:nvSpPr>
+        <p:spPr/>
+      </p:sp>
+      <p:sp>
+        <p:nvSpPr>
+          <p:cNvPr id="3" name="Notes Placeholder 2"/>
+          <p:cNvSpPr>
+            <a:spLocks noGrp="1"/>
+          </p:cNvSpPr>
+          <p:nvPr>
+            <p:ph type="body" idx="1"/>
+          </p:nvPr>
+        </p:nvSpPr>
+        <p:spPr/>
+        <p:txBody>
+          <a:bodyPr/>
+          <a:lstStyle/>
+          <a:p>
+            <a:r>
+              <a:rPr lang="en-US" dirty="0"/>
+              <a:t/>
+            </a:r>
+            <a:endParaRPr lang="en-US" dirty="0"/>
+          </a:p>
+        </p:txBody>
+      </p:sp>
+      <p:sp>
+        <p:nvSpPr>
+          <p:cNvPr id="4" name="Slide Number Placeholder 3"/>
+          <p:cNvSpPr>
+            <a:spLocks noGrp="1"/>
+          </p:cNvSpPr>
+          <p:nvPr>
+            <p:ph type="sldNum" sz="quarter" idx="10"/>
+          </p:nvPr>
+        </p:nvSpPr>
+        <p:spPr/>
+        <p:txBody>
+          <a:bodyPr/>
+          <a:lstStyle/>
+          <a:p>
+            <a:fld id="{F7021451-1387-4CA6-816F-3879F97B5CBC}" type="slidenum">
+              <a:rPr lang="en-US"/>
+              <a:t>14</a:t>
+            </a:fld>
+            <a:endParaRPr lang="en-US"/>
+          </a:p>
+        </p:txBody>
+      </p:sp>
+    </p:spTree>
+    <p:extLst>
+      <p:ext uri="{BB962C8B-B14F-4D97-AF65-F5344CB8AC3E}">
+        <p14:creationId xmlns:p14="http://schemas.microsoft.com/office/powerpoint/2010/main" val="1024086991"/>
+      </p:ext>
+    </p:extLst>
+  </p:cSld>
+  <p:clrMapOvr>
+    <a:masterClrMapping/>
+  </p:clrMapOvr>
+</p:notes>
+</file>
+
+<file path=ppt/notesSlides/notesSlide15.xml><?xml version="1.0" encoding="utf-8"?>
+<p:notes xmlns:a="http://schemas.openxmlformats.org/drawingml/2006/main" xmlns:r="http://schemas.openxmlformats.org/officeDocument/2006/relationships" xmlns:p="http://schemas.openxmlformats.org/presentationml/2006/main">
+  <p:cSld>
+    <p:spTree>
+      <p:nvGrpSpPr>
+        <p:cNvPr id="1" name=""/>
+        <p:cNvGrpSpPr/>
+        <p:nvPr/>
+      </p:nvGrpSpPr>
+      <p:grpSpPr>
+        <a:xfrm>
+          <a:off x="0" y="0"/>
+          <a:ext cx="0" cy="0"/>
+          <a:chOff x="0" y="0"/>
+          <a:chExt cx="0" cy="0"/>
+        </a:xfrm>
+      </p:grpSpPr>
+      <p:sp>
+        <p:nvSpPr>
+          <p:cNvPr id="2" name="Slide Image Placeholder 1"/>
+          <p:cNvSpPr>
+            <a:spLocks noGrp="1" noRot="1" noChangeAspect="1"/>
+          </p:cNvSpPr>
+          <p:nvPr>
+            <p:ph type="sldImg"/>
+          </p:nvPr>
+        </p:nvSpPr>
+        <p:spPr/>
+      </p:sp>
+      <p:sp>
+        <p:nvSpPr>
+          <p:cNvPr id="3" name="Notes Placeholder 2"/>
+          <p:cNvSpPr>
+            <a:spLocks noGrp="1"/>
+          </p:cNvSpPr>
+          <p:nvPr>
+            <p:ph type="body" idx="1"/>
+          </p:nvPr>
+        </p:nvSpPr>
+        <p:spPr/>
+        <p:txBody>
+          <a:bodyPr/>
+          <a:lstStyle/>
+          <a:p>
+            <a:r>
+              <a:rPr lang="en-US" dirty="0"/>
+              <a:t/>
+            </a:r>
+            <a:endParaRPr lang="en-US" dirty="0"/>
+          </a:p>
+        </p:txBody>
+      </p:sp>
+      <p:sp>
+        <p:nvSpPr>
+          <p:cNvPr id="4" name="Slide Number Placeholder 3"/>
+          <p:cNvSpPr>
+            <a:spLocks noGrp="1"/>
+          </p:cNvSpPr>
+          <p:nvPr>
+            <p:ph type="sldNum" sz="quarter" idx="10"/>
+          </p:nvPr>
+        </p:nvSpPr>
+        <p:spPr/>
+        <p:txBody>
+          <a:bodyPr/>
+          <a:lstStyle/>
+          <a:p>
+            <a:fld id="{F7021451-1387-4CA6-816F-3879F97B5CBC}" type="slidenum">
+              <a:rPr lang="en-US"/>
+              <a:t>15</a:t>
+            </a:fld>
+            <a:endParaRPr lang="en-US"/>
+          </a:p>
+        </p:txBody>
+      </p:sp>
+    </p:spTree>
+    <p:extLst>
+      <p:ext uri="{BB962C8B-B14F-4D97-AF65-F5344CB8AC3E}">
+        <p14:creationId xmlns:p14="http://schemas.microsoft.com/office/powerpoint/2010/main" val="1024086991"/>
+      </p:ext>
+    </p:extLst>
+  </p:cSld>
+  <p:clrMapOvr>
+    <a:masterClrMapping/>
+  </p:clrMapOvr>
+</p:notes>
+</file>
+
+<file path=ppt/notesSlides/notesSlide16.xml><?xml version="1.0" encoding="utf-8"?>
+<p:notes xmlns:a="http://schemas.openxmlformats.org/drawingml/2006/main" xmlns:r="http://schemas.openxmlformats.org/officeDocument/2006/relationships" xmlns:p="http://schemas.openxmlformats.org/presentationml/2006/main">
+  <p:cSld>
+    <p:spTree>
+      <p:nvGrpSpPr>
+        <p:cNvPr id="1" name=""/>
+        <p:cNvGrpSpPr/>
+        <p:nvPr/>
+      </p:nvGrpSpPr>
+      <p:grpSpPr>
+        <a:xfrm>
+          <a:off x="0" y="0"/>
+          <a:ext cx="0" cy="0"/>
+          <a:chOff x="0" y="0"/>
+          <a:chExt cx="0" cy="0"/>
+        </a:xfrm>
+      </p:grpSpPr>
+      <p:sp>
+        <p:nvSpPr>
+          <p:cNvPr id="2" name="Slide Image Placeholder 1"/>
+          <p:cNvSpPr>
+            <a:spLocks noGrp="1" noRot="1" noChangeAspect="1"/>
+          </p:cNvSpPr>
+          <p:nvPr>
+            <p:ph type="sldImg"/>
+          </p:nvPr>
+        </p:nvSpPr>
+        <p:spPr/>
+      </p:sp>
+      <p:sp>
+        <p:nvSpPr>
+          <p:cNvPr id="3" name="Notes Placeholder 2"/>
+          <p:cNvSpPr>
+            <a:spLocks noGrp="1"/>
+          </p:cNvSpPr>
+          <p:nvPr>
+            <p:ph type="body" idx="1"/>
+          </p:nvPr>
+        </p:nvSpPr>
+        <p:spPr/>
+        <p:txBody>
+          <a:bodyPr/>
+          <a:lstStyle/>
+          <a:p>
+            <a:r>
+              <a:rPr lang="en-US" dirty="0"/>
+              <a:t/>
+            </a:r>
+            <a:endParaRPr lang="en-US" dirty="0"/>
+          </a:p>
+        </p:txBody>
+      </p:sp>
+      <p:sp>
+        <p:nvSpPr>
+          <p:cNvPr id="4" name="Slide Number Placeholder 3"/>
+          <p:cNvSpPr>
+            <a:spLocks noGrp="1"/>
+          </p:cNvSpPr>
+          <p:nvPr>
+            <p:ph type="sldNum" sz="quarter" idx="10"/>
+          </p:nvPr>
+        </p:nvSpPr>
+        <p:spPr/>
+        <p:txBody>
+          <a:bodyPr/>
+          <a:lstStyle/>
+          <a:p>
+            <a:fld id="{F7021451-1387-4CA6-816F-3879F97B5CBC}" type="slidenum">
+              <a:rPr lang="en-US"/>
+              <a:t>16</a:t>
+            </a:fld>
+            <a:endParaRPr lang="en-US"/>
+          </a:p>
+        </p:txBody>
+      </p:sp>
+    </p:spTree>
+    <p:extLst>
+      <p:ext uri="{BB962C8B-B14F-4D97-AF65-F5344CB8AC3E}">
+        <p14:creationId xmlns:p14="http://schemas.microsoft.com/office/powerpoint/2010/main" val="1024086991"/>
+      </p:ext>
+    </p:extLst>
+  </p:cSld>
+  <p:clrMapOvr>
+    <a:masterClrMapping/>
+  </p:clrMapOvr>
+</p:notes>
+</file>
+
+<file path=ppt/notesSlides/notesSlide17.xml><?xml version="1.0" encoding="utf-8"?>
+<p:notes xmlns:a="http://schemas.openxmlformats.org/drawingml/2006/main" xmlns:r="http://schemas.openxmlformats.org/officeDocument/2006/relationships" xmlns:p="http://schemas.openxmlformats.org/presentationml/2006/main">
+  <p:cSld>
+    <p:spTree>
+      <p:nvGrpSpPr>
+        <p:cNvPr id="1" name=""/>
+        <p:cNvGrpSpPr/>
+        <p:nvPr/>
+      </p:nvGrpSpPr>
+      <p:grpSpPr>
+        <a:xfrm>
+          <a:off x="0" y="0"/>
+          <a:ext cx="0" cy="0"/>
+          <a:chOff x="0" y="0"/>
+          <a:chExt cx="0" cy="0"/>
+        </a:xfrm>
+      </p:grpSpPr>
+      <p:sp>
+        <p:nvSpPr>
+          <p:cNvPr id="2" name="Slide Image Placeholder 1"/>
+          <p:cNvSpPr>
+            <a:spLocks noGrp="1" noRot="1" noChangeAspect="1"/>
+          </p:cNvSpPr>
+          <p:nvPr>
+            <p:ph type="sldImg"/>
+          </p:nvPr>
+        </p:nvSpPr>
+        <p:spPr/>
+      </p:sp>
+      <p:sp>
+        <p:nvSpPr>
+          <p:cNvPr id="3" name="Notes Placeholder 2"/>
+          <p:cNvSpPr>
+            <a:spLocks noGrp="1"/>
+          </p:cNvSpPr>
+          <p:nvPr>
+            <p:ph type="body" idx="1"/>
+          </p:nvPr>
+        </p:nvSpPr>
+        <p:spPr/>
+        <p:txBody>
+          <a:bodyPr/>
+          <a:lstStyle/>
+          <a:p>
+            <a:r>
+              <a:rPr lang="en-US" dirty="0"/>
+              <a:t/>
+            </a:r>
+            <a:endParaRPr lang="en-US" dirty="0"/>
+          </a:p>
+        </p:txBody>
+      </p:sp>
+      <p:sp>
+        <p:nvSpPr>
+          <p:cNvPr id="4" name="Slide Number Placeholder 3"/>
+          <p:cNvSpPr>
+            <a:spLocks noGrp="1"/>
+          </p:cNvSpPr>
+          <p:nvPr>
+            <p:ph type="sldNum" sz="quarter" idx="10"/>
+          </p:nvPr>
+        </p:nvSpPr>
+        <p:spPr/>
+        <p:txBody>
+          <a:bodyPr/>
+          <a:lstStyle/>
+          <a:p>
+            <a:fld id="{F7021451-1387-4CA6-816F-3879F97B5CBC}" type="slidenum">
+              <a:rPr lang="en-US"/>
+              <a:t>17</a:t>
+            </a:fld>
+            <a:endParaRPr lang="en-US"/>
+          </a:p>
+        </p:txBody>
+      </p:sp>
+    </p:spTree>
+    <p:extLst>
+      <p:ext uri="{BB962C8B-B14F-4D97-AF65-F5344CB8AC3E}">
+        <p14:creationId xmlns:p14="http://schemas.microsoft.com/office/powerpoint/2010/main" val="1024086991"/>
+      </p:ext>
+    </p:extLst>
+  </p:cSld>
+  <p:clrMapOvr>
+    <a:masterClrMapping/>
+  </p:clrMapOvr>
+</p:notes>
+</file>
+
+<file path=ppt/notesSlides/notesSlide18.xml><?xml version="1.0" encoding="utf-8"?>
+<p:notes xmlns:a="http://schemas.openxmlformats.org/drawingml/2006/main" xmlns:r="http://schemas.openxmlformats.org/officeDocument/2006/relationships" xmlns:p="http://schemas.openxmlformats.org/presentationml/2006/main">
+  <p:cSld>
+    <p:spTree>
+      <p:nvGrpSpPr>
+        <p:cNvPr id="1" name=""/>
+        <p:cNvGrpSpPr/>
+        <p:nvPr/>
+      </p:nvGrpSpPr>
+      <p:grpSpPr>
+        <a:xfrm>
+          <a:off x="0" y="0"/>
+          <a:ext cx="0" cy="0"/>
+          <a:chOff x="0" y="0"/>
+          <a:chExt cx="0" cy="0"/>
+        </a:xfrm>
+      </p:grpSpPr>
+      <p:sp>
+        <p:nvSpPr>
+          <p:cNvPr id="2" name="Slide Image Placeholder 1"/>
+          <p:cNvSpPr>
+            <a:spLocks noGrp="1" noRot="1" noChangeAspect="1"/>
+          </p:cNvSpPr>
+          <p:nvPr>
+            <p:ph type="sldImg"/>
+          </p:nvPr>
+        </p:nvSpPr>
+        <p:spPr/>
+      </p:sp>
+      <p:sp>
+        <p:nvSpPr>
+          <p:cNvPr id="3" name="Notes Placeholder 2"/>
+          <p:cNvSpPr>
+            <a:spLocks noGrp="1"/>
+          </p:cNvSpPr>
+          <p:nvPr>
+            <p:ph type="body" idx="1"/>
+          </p:nvPr>
+        </p:nvSpPr>
+        <p:spPr/>
+        <p:txBody>
+          <a:bodyPr/>
+          <a:lstStyle/>
+          <a:p>
+            <a:r>
+              <a:rPr lang="en-US" dirty="0"/>
+              <a:t/>
+            </a:r>
+            <a:endParaRPr lang="en-US" dirty="0"/>
+          </a:p>
+        </p:txBody>
+      </p:sp>
+      <p:sp>
+        <p:nvSpPr>
+          <p:cNvPr id="4" name="Slide Number Placeholder 3"/>
+          <p:cNvSpPr>
+            <a:spLocks noGrp="1"/>
+          </p:cNvSpPr>
+          <p:nvPr>
+            <p:ph type="sldNum" sz="quarter" idx="10"/>
+          </p:nvPr>
+        </p:nvSpPr>
+        <p:spPr/>
+        <p:txBody>
+          <a:bodyPr/>
+          <a:lstStyle/>
+          <a:p>
+            <a:fld id="{F7021451-1387-4CA6-816F-3879F97B5CBC}" type="slidenum">
+              <a:rPr lang="en-US"/>
+              <a:t>18</a:t>
             </a:fld>
             <a:endParaRPr lang="en-US"/>
           </a:p>
@@ -2235,194 +2680,6 @@
         </p:nvSpPr>
         <p:spPr>
           <a:xfrm>
-            <a:off x="406301" y="1223963"/>
-            <a:ext cx="8498026" cy="274290"/>
-          </a:xfrm>
-          <a:prstGeom prst="rect">
-            <a:avLst/>
-          </a:prstGeom>
-          <a:noFill/>
-          <a:ln/>
-        </p:spPr>
-        <p:txBody>
-          <a:bodyPr wrap="square" lIns="0" tIns="0" rIns="0" bIns="0" rtlCol="0" anchor="t"/>
-          <a:lstStyle/>
-          <a:p>
-            <a:pPr algn="l" indent="0" marL="0">
-              <a:lnSpc>
-                <a:spcPts val="2160"/>
-              </a:lnSpc>
-              <a:spcBef>
-                <a:spcPts val="600"/>
-              </a:spcBef>
-              <a:spcAft>
-                <a:spcPts val="800"/>
-              </a:spcAft>
-              <a:buNone/>
-            </a:pPr>
-            <a:r>
-              <a:rPr lang="en-US" sz="1800" b="1" dirty="0">
-                <a:solidFill>
-                  <a:srgbClr val="FE4447"/>
-                </a:solidFill>
-                <a:latin typeface="Georgia" pitchFamily="34" charset="0"/>
-                <a:ea typeface="Georgia" pitchFamily="34" charset="-122"/>
-                <a:cs typeface="Georgia" pitchFamily="34" charset="-120"/>
-              </a:rPr>
-              <a:t>Learning objective</a:t>
-            </a:r>
-            <a:endParaRPr lang="en-US" sz="1800" dirty="0"/>
-          </a:p>
-        </p:txBody>
-      </p:sp>
-      <p:sp>
-        <p:nvSpPr>
-          <p:cNvPr id="6" name="Text 4"/>
-          <p:cNvSpPr/>
-          <p:nvPr/>
-        </p:nvSpPr>
-        <p:spPr>
-          <a:xfrm>
-            <a:off x="406301" y="1637854"/>
-            <a:ext cx="8498026" cy="426541"/>
-          </a:xfrm>
-          <a:prstGeom prst="rect">
-            <a:avLst/>
-          </a:prstGeom>
-          <a:noFill/>
-          <a:ln/>
-        </p:spPr>
-        <p:txBody>
-          <a:bodyPr wrap="square" lIns="0" tIns="0" rIns="0" bIns="0" rtlCol="0" anchor="t"/>
-          <a:lstStyle/>
-          <a:p>
-            <a:pPr algn="l" indent="0" marL="0">
-              <a:lnSpc>
-                <a:spcPts val="1680"/>
-              </a:lnSpc>
-              <a:spcBef>
-                <a:spcPts val="300"/>
-              </a:spcBef>
-              <a:spcAft>
-                <a:spcPts val="300"/>
-              </a:spcAft>
-              <a:buNone/>
-            </a:pPr>
-            <a:r>
-              <a:rPr lang="en-US" sz="1200" dirty="0">
-                <a:solidFill>
-                  <a:srgbClr val="1C2833"/>
-                </a:solidFill>
-                <a:latin typeface="Arial" pitchFamily="34" charset="0"/>
-                <a:ea typeface="Arial" pitchFamily="34" charset="-122"/>
-                <a:cs typeface="Arial" pitchFamily="34" charset="-120"/>
-              </a:rPr>
-              <a:t>By the end of this lesson, students will (a) derive the magic constant </a:t>
-            </a:r>
-            <a:pPr algn="l" indent="0" marL="0">
-              <a:lnSpc>
-                <a:spcPts val="1680"/>
-              </a:lnSpc>
-              <a:spcBef>
-                <a:spcPts val="300"/>
-              </a:spcBef>
-              <a:spcAft>
-                <a:spcPts val="300"/>
-              </a:spcAft>
-              <a:buNone/>
-            </a:pPr>
-            <a:r>
-              <a:rPr lang="en-US" sz="1200" i="1" dirty="0">
-                <a:solidFill>
-                  <a:srgbClr val="1C2833"/>
-                </a:solidFill>
-                <a:latin typeface="Arial" pitchFamily="34" charset="0"/>
-                <a:ea typeface="Arial" pitchFamily="34" charset="-122"/>
-                <a:cs typeface="Arial" pitchFamily="34" charset="-120"/>
-              </a:rPr>
-              <a:t>S = n(n² + 1)/2</a:t>
-            </a:r>
-            <a:pPr algn="l" indent="0" marL="0">
-              <a:lnSpc>
-                <a:spcPts val="1680"/>
-              </a:lnSpc>
-              <a:spcBef>
-                <a:spcPts val="300"/>
-              </a:spcBef>
-              <a:spcAft>
-                <a:spcPts val="300"/>
-              </a:spcAft>
-              <a:buNone/>
-            </a:pPr>
-            <a:r>
-              <a:rPr lang="en-US" sz="1200" dirty="0">
-                <a:solidFill>
-                  <a:srgbClr val="1C2833"/>
-                </a:solidFill>
-                <a:latin typeface="Arial" pitchFamily="34" charset="0"/>
-                <a:ea typeface="Arial" pitchFamily="34" charset="-122"/>
-                <a:cs typeface="Arial" pitchFamily="34" charset="-120"/>
-              </a:rPr>
-              <a:t> for the 3×3 case by direct argument, and (b) apply the formula to predict the constant for </a:t>
-            </a:r>
-            <a:pPr algn="l" indent="0" marL="0">
-              <a:lnSpc>
-                <a:spcPts val="1680"/>
-              </a:lnSpc>
-              <a:spcBef>
-                <a:spcPts val="300"/>
-              </a:spcBef>
-              <a:spcAft>
-                <a:spcPts val="300"/>
-              </a:spcAft>
-              <a:buNone/>
-            </a:pPr>
-            <a:r>
-              <a:rPr lang="en-US" sz="1200" i="1" dirty="0">
-                <a:solidFill>
-                  <a:srgbClr val="1C2833"/>
-                </a:solidFill>
-                <a:latin typeface="Arial" pitchFamily="34" charset="0"/>
-                <a:ea typeface="Arial" pitchFamily="34" charset="-122"/>
-                <a:cs typeface="Arial" pitchFamily="34" charset="-120"/>
-              </a:rPr>
-              <a:t>n</a:t>
-            </a:r>
-            <a:pPr algn="l" indent="0" marL="0">
-              <a:lnSpc>
-                <a:spcPts val="1680"/>
-              </a:lnSpc>
-              <a:spcBef>
-                <a:spcPts val="300"/>
-              </a:spcBef>
-              <a:spcAft>
-                <a:spcPts val="300"/>
-              </a:spcAft>
-              <a:buNone/>
-            </a:pPr>
-            <a:r>
-              <a:rPr lang="en-US" sz="1200" dirty="0">
-                <a:solidFill>
-                  <a:srgbClr val="1C2833"/>
-                </a:solidFill>
-                <a:latin typeface="Arial" pitchFamily="34" charset="0"/>
-                <a:ea typeface="Arial" pitchFamily="34" charset="-122"/>
-                <a:cs typeface="Arial" pitchFamily="34" charset="-120"/>
-              </a:rPr>
-              <a:t> = 4, 5, 6, 7.</a:t>
-            </a:r>
-            <a:endParaRPr lang="en-US" sz="1200" dirty="0"/>
-          </a:p>
-        </p:txBody>
-      </p:sp>
-      <p:sp>
-        <p:nvSpPr>
-          <p:cNvPr id="7" name="Text 5"/>
-          <p:cNvSpPr/>
-          <p:nvPr/>
-        </p:nvSpPr>
-        <p:spPr>
-          <a:xfrm>
             <a:off x="406301" y="4434929"/>
             <a:ext cx="8498026" cy="213271"/>
           </a:xfrm>
@@ -2567,7 +2824,7 @@
                 <a:ea typeface="Georgia" pitchFamily="34" charset="-122"/>
                 <a:cs typeface="Georgia" pitchFamily="34" charset="-120"/>
               </a:rPr>
-              <a:t>Homework</a:t>
+              <a:t>Core (20 min) (cont.)</a:t>
             </a:r>
             <a:endParaRPr lang="en-US" sz="1800" dirty="0"/>
           </a:p>
@@ -2581,8 +2838,8 @@
         </p:nvSpPr>
         <p:spPr>
           <a:xfrm>
-            <a:off x="406301" y="870942"/>
-            <a:ext cx="8498026" cy="426541"/>
+            <a:off x="634901" y="883593"/>
+            <a:ext cx="8102798" cy="1257002"/>
           </a:xfrm>
           <a:prstGeom prst="rect">
             <a:avLst/>
@@ -2594,13 +2851,31 @@
           <a:bodyPr wrap="square" lIns="0" tIns="0" rIns="0" bIns="0" rtlCol="0" anchor="t"/>
           <a:lstStyle/>
           <a:p>
-            <a:pPr algn="l" indent="0" marL="0">
-              <a:lnSpc>
-                <a:spcPts val="1680"/>
-              </a:lnSpc>
-              <a:spcBef>
-                <a:spcPts val="300"/>
-              </a:spcBef>
+            <a:pPr algn="l" marL="342900" indent="-342900">
+              <a:lnSpc>
+                <a:spcPts val="1620"/>
+              </a:lnSpc>
+              <a:spcAft>
+                <a:spcPts val="300"/>
+              </a:spcAft>
+              <a:buSzPct val="100000"/>
+              <a:buChar char="•"/>
+            </a:pPr>
+            <a:r>
+              <a:rPr lang="en-US" sz="1200" b="1" dirty="0">
+                <a:solidFill>
+                  <a:srgbClr val="1C2833"/>
+                </a:solidFill>
+                <a:latin typeface="Arial" pitchFamily="34" charset="0"/>
+                <a:ea typeface="Arial" pitchFamily="34" charset="-122"/>
+                <a:cs typeface="Arial" pitchFamily="34" charset="-120"/>
+              </a:rPr>
+              <a:t>3</a:t>
+            </a:r>
+            <a:pPr algn="l" indent="0" marL="0">
+              <a:lnSpc>
+                <a:spcPts val="1620"/>
+              </a:lnSpc>
               <a:spcAft>
                 <a:spcPts val="300"/>
               </a:spcAft>
@@ -2615,38 +2890,56 @@
                 <a:ea typeface="Arial" pitchFamily="34" charset="-122"/>
                 <a:cs typeface="Arial" pitchFamily="34" charset="-120"/>
               </a:rPr>
-              <a:t>– Verify the formula for </a:t>
-            </a:r>
-            <a:pPr algn="l" indent="0" marL="0">
-              <a:lnSpc>
-                <a:spcPts val="1680"/>
-              </a:lnSpc>
-              <a:spcBef>
-                <a:spcPts val="300"/>
-              </a:spcBef>
-              <a:spcAft>
-                <a:spcPts val="300"/>
-              </a:spcAft>
-              <a:buNone/>
-            </a:pPr>
-            <a:r>
-              <a:rPr lang="en-US" sz="1200" i="1" dirty="0">
-                <a:solidFill>
-                  <a:srgbClr val="1C2833"/>
-                </a:solidFill>
-                <a:latin typeface="Arial" pitchFamily="34" charset="0"/>
-                <a:ea typeface="Arial" pitchFamily="34" charset="-122"/>
-                <a:cs typeface="Arial" pitchFamily="34" charset="-120"/>
-              </a:rPr>
-              <a:t>n</a:t>
-            </a:r>
-            <a:pPr algn="l" indent="0" marL="0">
-              <a:lnSpc>
-                <a:spcPts val="1680"/>
-              </a:lnSpc>
-              <a:spcBef>
-                <a:spcPts val="300"/>
-              </a:spcBef>
+              <a:t> — 9 · 10 · 3 × 10 / 2 = </a:t>
+            </a:r>
+            <a:pPr algn="l" indent="0" marL="0">
+              <a:lnSpc>
+                <a:spcPts val="1620"/>
+              </a:lnSpc>
+              <a:spcAft>
+                <a:spcPts val="300"/>
+              </a:spcAft>
+              <a:buNone/>
+            </a:pPr>
+            <a:r>
+              <a:rPr lang="en-US" sz="1200" b="1" dirty="0">
+                <a:solidFill>
+                  <a:srgbClr val="1C2833"/>
+                </a:solidFill>
+                <a:latin typeface="Arial" pitchFamily="34" charset="0"/>
+                <a:ea typeface="Arial" pitchFamily="34" charset="-122"/>
+                <a:cs typeface="Arial" pitchFamily="34" charset="-120"/>
+              </a:rPr>
+              <a:t>15</a:t>
+            </a:r>
+            <a:endParaRPr lang="en-US" sz="1200" dirty="0"/>
+          </a:p>
+          <a:p>
+            <a:pPr algn="l" marL="342900" indent="-342900">
+              <a:lnSpc>
+                <a:spcPts val="1620"/>
+              </a:lnSpc>
+              <a:spcAft>
+                <a:spcPts val="300"/>
+              </a:spcAft>
+              <a:buSzPct val="100000"/>
+              <a:buChar char="•"/>
+            </a:pPr>
+            <a:r>
+              <a:rPr lang="en-US" sz="1200" b="1" dirty="0">
+                <a:solidFill>
+                  <a:srgbClr val="1C2833"/>
+                </a:solidFill>
+                <a:latin typeface="Arial" pitchFamily="34" charset="0"/>
+                <a:ea typeface="Arial" pitchFamily="34" charset="-122"/>
+                <a:cs typeface="Arial" pitchFamily="34" charset="-120"/>
+              </a:rPr>
+              <a:t>4</a:t>
+            </a:r>
+            <a:pPr algn="l" indent="0" marL="0">
+              <a:lnSpc>
+                <a:spcPts val="1620"/>
+              </a:lnSpc>
               <a:spcAft>
                 <a:spcPts val="300"/>
               </a:spcAft>
@@ -2661,38 +2954,56 @@
                 <a:ea typeface="Arial" pitchFamily="34" charset="-122"/>
                 <a:cs typeface="Arial" pitchFamily="34" charset="-120"/>
               </a:rPr>
-              <a:t> = 8 and </a:t>
-            </a:r>
-            <a:pPr algn="l" indent="0" marL="0">
-              <a:lnSpc>
-                <a:spcPts val="1680"/>
-              </a:lnSpc>
-              <a:spcBef>
-                <a:spcPts val="300"/>
-              </a:spcBef>
-              <a:spcAft>
-                <a:spcPts val="300"/>
-              </a:spcAft>
-              <a:buNone/>
-            </a:pPr>
-            <a:r>
-              <a:rPr lang="en-US" sz="1200" i="1" dirty="0">
-                <a:solidFill>
-                  <a:srgbClr val="1C2833"/>
-                </a:solidFill>
-                <a:latin typeface="Arial" pitchFamily="34" charset="0"/>
-                <a:ea typeface="Arial" pitchFamily="34" charset="-122"/>
-                <a:cs typeface="Arial" pitchFamily="34" charset="-120"/>
-              </a:rPr>
-              <a:t>n</a:t>
-            </a:r>
-            <a:pPr algn="l" indent="0" marL="0">
-              <a:lnSpc>
-                <a:spcPts val="1680"/>
-              </a:lnSpc>
-              <a:spcBef>
-                <a:spcPts val="300"/>
-              </a:spcBef>
+              <a:t> — 16 · 17 · 4 × 17 / 2 = </a:t>
+            </a:r>
+            <a:pPr algn="l" indent="0" marL="0">
+              <a:lnSpc>
+                <a:spcPts val="1620"/>
+              </a:lnSpc>
+              <a:spcAft>
+                <a:spcPts val="300"/>
+              </a:spcAft>
+              <a:buNone/>
+            </a:pPr>
+            <a:r>
+              <a:rPr lang="en-US" sz="1200" b="1" dirty="0">
+                <a:solidFill>
+                  <a:srgbClr val="1C2833"/>
+                </a:solidFill>
+                <a:latin typeface="Arial" pitchFamily="34" charset="0"/>
+                <a:ea typeface="Arial" pitchFamily="34" charset="-122"/>
+                <a:cs typeface="Arial" pitchFamily="34" charset="-120"/>
+              </a:rPr>
+              <a:t>34</a:t>
+            </a:r>
+            <a:endParaRPr lang="en-US" sz="1200" dirty="0"/>
+          </a:p>
+          <a:p>
+            <a:pPr algn="l" marL="342900" indent="-342900">
+              <a:lnSpc>
+                <a:spcPts val="1620"/>
+              </a:lnSpc>
+              <a:spcAft>
+                <a:spcPts val="300"/>
+              </a:spcAft>
+              <a:buSzPct val="100000"/>
+              <a:buChar char="•"/>
+            </a:pPr>
+            <a:r>
+              <a:rPr lang="en-US" sz="1200" b="1" dirty="0">
+                <a:solidFill>
+                  <a:srgbClr val="1C2833"/>
+                </a:solidFill>
+                <a:latin typeface="Arial" pitchFamily="34" charset="0"/>
+                <a:ea typeface="Arial" pitchFamily="34" charset="-122"/>
+                <a:cs typeface="Arial" pitchFamily="34" charset="-120"/>
+              </a:rPr>
+              <a:t>5</a:t>
+            </a:r>
+            <a:pPr algn="l" indent="0" marL="0">
+              <a:lnSpc>
+                <a:spcPts val="1620"/>
+              </a:lnSpc>
               <a:spcAft>
                 <a:spcPts val="300"/>
               </a:spcAft>
@@ -2707,38 +3018,56 @@
                 <a:ea typeface="Arial" pitchFamily="34" charset="-122"/>
                 <a:cs typeface="Arial" pitchFamily="34" charset="-120"/>
               </a:rPr>
-              <a:t> = 9. (Answers: 260 and 369.) – For each, also compute the total sum </a:t>
-            </a:r>
-            <a:pPr algn="l" indent="0" marL="0">
-              <a:lnSpc>
-                <a:spcPts val="1680"/>
-              </a:lnSpc>
-              <a:spcBef>
-                <a:spcPts val="300"/>
-              </a:spcBef>
-              <a:spcAft>
-                <a:spcPts val="300"/>
-              </a:spcAft>
-              <a:buNone/>
-            </a:pPr>
-            <a:r>
-              <a:rPr lang="en-US" sz="1200" i="1" dirty="0">
-                <a:solidFill>
-                  <a:srgbClr val="1C2833"/>
-                </a:solidFill>
-                <a:latin typeface="Arial" pitchFamily="34" charset="0"/>
-                <a:ea typeface="Arial" pitchFamily="34" charset="-122"/>
-                <a:cs typeface="Arial" pitchFamily="34" charset="-120"/>
-              </a:rPr>
-              <a:t>n</a:t>
-            </a:r>
-            <a:pPr algn="l" indent="0" marL="0">
-              <a:lnSpc>
-                <a:spcPts val="1680"/>
-              </a:lnSpc>
-              <a:spcBef>
-                <a:spcPts val="300"/>
-              </a:spcBef>
+              <a:t> — 25 · 26 · 5 × 26 / 2 = </a:t>
+            </a:r>
+            <a:pPr algn="l" indent="0" marL="0">
+              <a:lnSpc>
+                <a:spcPts val="1620"/>
+              </a:lnSpc>
+              <a:spcAft>
+                <a:spcPts val="300"/>
+              </a:spcAft>
+              <a:buNone/>
+            </a:pPr>
+            <a:r>
+              <a:rPr lang="en-US" sz="1200" b="1" dirty="0">
+                <a:solidFill>
+                  <a:srgbClr val="1C2833"/>
+                </a:solidFill>
+                <a:latin typeface="Arial" pitchFamily="34" charset="0"/>
+                <a:ea typeface="Arial" pitchFamily="34" charset="-122"/>
+                <a:cs typeface="Arial" pitchFamily="34" charset="-120"/>
+              </a:rPr>
+              <a:t>65</a:t>
+            </a:r>
+            <a:endParaRPr lang="en-US" sz="1200" dirty="0"/>
+          </a:p>
+          <a:p>
+            <a:pPr algn="l" marL="342900" indent="-342900">
+              <a:lnSpc>
+                <a:spcPts val="1620"/>
+              </a:lnSpc>
+              <a:spcAft>
+                <a:spcPts val="300"/>
+              </a:spcAft>
+              <a:buSzPct val="100000"/>
+              <a:buChar char="•"/>
+            </a:pPr>
+            <a:r>
+              <a:rPr lang="en-US" sz="1200" b="1" dirty="0">
+                <a:solidFill>
+                  <a:srgbClr val="1C2833"/>
+                </a:solidFill>
+                <a:latin typeface="Arial" pitchFamily="34" charset="0"/>
+                <a:ea typeface="Arial" pitchFamily="34" charset="-122"/>
+                <a:cs typeface="Arial" pitchFamily="34" charset="-120"/>
+              </a:rPr>
+              <a:t>6</a:t>
+            </a:r>
+            <a:pPr algn="l" indent="0" marL="0">
+              <a:lnSpc>
+                <a:spcPts val="1620"/>
+              </a:lnSpc>
               <a:spcAft>
                 <a:spcPts val="300"/>
               </a:spcAft>
@@ -2753,38 +3082,56 @@
                 <a:ea typeface="Arial" pitchFamily="34" charset="-122"/>
                 <a:cs typeface="Arial" pitchFamily="34" charset="-120"/>
               </a:rPr>
-              <a:t>²(</a:t>
-            </a:r>
-            <a:pPr algn="l" indent="0" marL="0">
-              <a:lnSpc>
-                <a:spcPts val="1680"/>
-              </a:lnSpc>
-              <a:spcBef>
-                <a:spcPts val="300"/>
-              </a:spcBef>
-              <a:spcAft>
-                <a:spcPts val="300"/>
-              </a:spcAft>
-              <a:buNone/>
-            </a:pPr>
-            <a:r>
-              <a:rPr lang="en-US" sz="1200" i="1" dirty="0">
-                <a:solidFill>
-                  <a:srgbClr val="1C2833"/>
-                </a:solidFill>
-                <a:latin typeface="Arial" pitchFamily="34" charset="0"/>
-                <a:ea typeface="Arial" pitchFamily="34" charset="-122"/>
-                <a:cs typeface="Arial" pitchFamily="34" charset="-120"/>
-              </a:rPr>
-              <a:t>n</a:t>
-            </a:r>
-            <a:pPr algn="l" indent="0" marL="0">
-              <a:lnSpc>
-                <a:spcPts val="1680"/>
-              </a:lnSpc>
-              <a:spcBef>
-                <a:spcPts val="300"/>
-              </a:spcBef>
+              <a:t> — 36 · 37 · 6 × 37 / 2 = </a:t>
+            </a:r>
+            <a:pPr algn="l" indent="0" marL="0">
+              <a:lnSpc>
+                <a:spcPts val="1620"/>
+              </a:lnSpc>
+              <a:spcAft>
+                <a:spcPts val="300"/>
+              </a:spcAft>
+              <a:buNone/>
+            </a:pPr>
+            <a:r>
+              <a:rPr lang="en-US" sz="1200" b="1" dirty="0">
+                <a:solidFill>
+                  <a:srgbClr val="1C2833"/>
+                </a:solidFill>
+                <a:latin typeface="Arial" pitchFamily="34" charset="0"/>
+                <a:ea typeface="Arial" pitchFamily="34" charset="-122"/>
+                <a:cs typeface="Arial" pitchFamily="34" charset="-120"/>
+              </a:rPr>
+              <a:t>111</a:t>
+            </a:r>
+            <a:endParaRPr lang="en-US" sz="1200" dirty="0"/>
+          </a:p>
+          <a:p>
+            <a:pPr algn="l" marL="342900" indent="-342900">
+              <a:lnSpc>
+                <a:spcPts val="1620"/>
+              </a:lnSpc>
+              <a:spcAft>
+                <a:spcPts val="300"/>
+              </a:spcAft>
+              <a:buSzPct val="100000"/>
+              <a:buChar char="•"/>
+            </a:pPr>
+            <a:r>
+              <a:rPr lang="en-US" sz="1200" b="1" dirty="0">
+                <a:solidFill>
+                  <a:srgbClr val="1C2833"/>
+                </a:solidFill>
+                <a:latin typeface="Arial" pitchFamily="34" charset="0"/>
+                <a:ea typeface="Arial" pitchFamily="34" charset="-122"/>
+                <a:cs typeface="Arial" pitchFamily="34" charset="-120"/>
+              </a:rPr>
+              <a:t>7</a:t>
+            </a:r>
+            <a:pPr algn="l" indent="0" marL="0">
+              <a:lnSpc>
+                <a:spcPts val="1620"/>
+              </a:lnSpc>
               <a:spcAft>
                 <a:spcPts val="300"/>
               </a:spcAft>
@@ -2799,53 +3146,27 @@
                 <a:ea typeface="Arial" pitchFamily="34" charset="-122"/>
                 <a:cs typeface="Arial" pitchFamily="34" charset="-120"/>
               </a:rPr>
-              <a:t>² + 1)/2 directly and confirm it equals </a:t>
-            </a:r>
-            <a:pPr algn="l" indent="0" marL="0">
-              <a:lnSpc>
-                <a:spcPts val="1680"/>
-              </a:lnSpc>
-              <a:spcBef>
-                <a:spcPts val="300"/>
-              </a:spcBef>
-              <a:spcAft>
-                <a:spcPts val="300"/>
-              </a:spcAft>
-              <a:buNone/>
-            </a:pPr>
-            <a:r>
-              <a:rPr lang="en-US" sz="1200" i="1" dirty="0">
-                <a:solidFill>
-                  <a:srgbClr val="1C2833"/>
-                </a:solidFill>
-                <a:latin typeface="Arial" pitchFamily="34" charset="0"/>
-                <a:ea typeface="Arial" pitchFamily="34" charset="-122"/>
-                <a:cs typeface="Arial" pitchFamily="34" charset="-120"/>
-              </a:rPr>
-              <a:t>n × S</a:t>
-            </a:r>
-            <a:pPr algn="l" indent="0" marL="0">
-              <a:lnSpc>
-                <a:spcPts val="1680"/>
-              </a:lnSpc>
-              <a:spcBef>
-                <a:spcPts val="300"/>
-              </a:spcBef>
-              <a:spcAft>
-                <a:spcPts val="300"/>
-              </a:spcAft>
-              <a:buNone/>
-            </a:pPr>
-            <a:r>
-              <a:rPr lang="en-US" sz="1200" dirty="0">
-                <a:solidFill>
-                  <a:srgbClr val="1C2833"/>
-                </a:solidFill>
-                <a:latin typeface="Arial" pitchFamily="34" charset="0"/>
-                <a:ea typeface="Arial" pitchFamily="34" charset="-122"/>
-                <a:cs typeface="Arial" pitchFamily="34" charset="-120"/>
-              </a:rPr>
-              <a:t>.</a:t>
+              <a:t> — 49 · 50 · 7 × 50 / 2 = </a:t>
+            </a:r>
+            <a:pPr algn="l" indent="0" marL="0">
+              <a:lnSpc>
+                <a:spcPts val="1620"/>
+              </a:lnSpc>
+              <a:spcAft>
+                <a:spcPts val="300"/>
+              </a:spcAft>
+              <a:buNone/>
+            </a:pPr>
+            <a:r>
+              <a:rPr lang="en-US" sz="1200" b="1" dirty="0">
+                <a:solidFill>
+                  <a:srgbClr val="1C2833"/>
+                </a:solidFill>
+                <a:latin typeface="Arial" pitchFamily="34" charset="0"/>
+                <a:ea typeface="Arial" pitchFamily="34" charset="-122"/>
+                <a:cs typeface="Arial" pitchFamily="34" charset="-120"/>
+              </a:rPr>
+              <a:t>175</a:t>
             </a:r>
             <a:endParaRPr lang="en-US" sz="1200" dirty="0"/>
           </a:p>
@@ -3003,7 +3324,7 @@
                 <a:ea typeface="Georgia" pitchFamily="34" charset="-122"/>
                 <a:cs typeface="Georgia" pitchFamily="34" charset="-120"/>
               </a:rPr>
-              <a:t>Differentiation</a:t>
+              <a:t>Core (20 min) (cont.)</a:t>
             </a:r>
             <a:endParaRPr lang="en-US" sz="1800" dirty="0"/>
           </a:p>
@@ -3018,7 +3339,7 @@
         <p:spPr>
           <a:xfrm>
             <a:off x="634901" y="883593"/>
-            <a:ext cx="8102798" cy="937022"/>
+            <a:ext cx="8102798" cy="712291"/>
           </a:xfrm>
           <a:prstGeom prst="rect">
             <a:avLst/>
@@ -3049,7 +3370,7 @@
                 <a:ea typeface="Arial" pitchFamily="34" charset="-122"/>
                 <a:cs typeface="Arial" pitchFamily="34" charset="-120"/>
               </a:rPr>
-              <a:t>One tier up:</a:t>
+              <a:t>A paraphrase from the source.</a:t>
             </a:r>
             <a:pPr algn="l" indent="0" marL="0">
               <a:lnSpc>
@@ -3069,7 +3390,7 @@
                 <a:ea typeface="Arial" pitchFamily="34" charset="-122"/>
                 <a:cs typeface="Arial" pitchFamily="34" charset="-120"/>
               </a:rPr>
-              <a:t> What if the magic square contains </a:t>
+              <a:t> Nārāyaṇa Paṇḍita, in </a:t>
             </a:r>
             <a:pPr algn="l" indent="0" marL="0">
               <a:lnSpc>
@@ -3089,7 +3410,7 @@
                 <a:ea typeface="Arial" pitchFamily="34" charset="-122"/>
                 <a:cs typeface="Arial" pitchFamily="34" charset="-120"/>
               </a:rPr>
-              <a:t>consecutive</a:t>
+              <a:t>Bhadragaṇita</a:t>
             </a:r>
             <a:pPr algn="l" indent="0" marL="0">
               <a:lnSpc>
@@ -3109,7 +3430,7 @@
                 <a:ea typeface="Arial" pitchFamily="34" charset="-122"/>
                 <a:cs typeface="Arial" pitchFamily="34" charset="-120"/>
               </a:rPr>
-              <a:t> numbers but starting at </a:t>
+              <a:t> (Book 14 of </a:t>
             </a:r>
             <a:pPr algn="l" indent="0" marL="0">
               <a:lnSpc>
@@ -3129,7 +3450,7 @@
                 <a:ea typeface="Arial" pitchFamily="34" charset="-122"/>
                 <a:cs typeface="Arial" pitchFamily="34" charset="-120"/>
               </a:rPr>
-              <a:t>k</a:t>
+              <a:t>Gaṇita-kaumudī</a:t>
             </a:r>
             <a:pPr algn="l" indent="0" marL="0">
               <a:lnSpc>
@@ -3149,7 +3470,7 @@
                 <a:ea typeface="Arial" pitchFamily="34" charset="-122"/>
                 <a:cs typeface="Arial" pitchFamily="34" charset="-120"/>
               </a:rPr>
-              <a:t>, not at 1? (E.g. a 3×3 with 5, 6, 7, ..., 13.) Derive a formula for the new magic constant. (Answer: </a:t>
+              <a:t>, 1356 CE), gives the magic-constant rule explicitly: the common sum is one </a:t>
             </a:r>
             <a:pPr algn="l" indent="0" marL="0">
               <a:lnSpc>
@@ -3169,7 +3490,7 @@
                 <a:ea typeface="Arial" pitchFamily="34" charset="-122"/>
                 <a:cs typeface="Arial" pitchFamily="34" charset="-120"/>
               </a:rPr>
-              <a:t>S</a:t>
+              <a:t>n</a:t>
             </a:r>
             <a:pPr algn="l" indent="0" marL="0">
               <a:lnSpc>
@@ -3189,7 +3510,7 @@
                 <a:ea typeface="Arial" pitchFamily="34" charset="-122"/>
                 <a:cs typeface="Arial" pitchFamily="34" charset="-120"/>
               </a:rPr>
-              <a:t> = </a:t>
+              <a:t>-th of the sum of the numbers in the square. We've just re-derived his rule. </a:t>
             </a:r>
             <a:pPr algn="l" indent="0" marL="0">
               <a:lnSpc>
@@ -3209,27 +3530,7 @@
                 <a:ea typeface="Arial" pitchFamily="34" charset="-122"/>
                 <a:cs typeface="Arial" pitchFamily="34" charset="-120"/>
               </a:rPr>
-              <a:t>n × k</a:t>
-            </a:r>
-            <a:pPr algn="l" indent="0" marL="0">
-              <a:lnSpc>
-                <a:spcPts val="1620"/>
-              </a:lnSpc>
-              <a:spcAft>
-                <a:spcPts val="300"/>
-              </a:spcAft>
-              <a:buNone/>
-            </a:pPr>
-            <a:r>
-              <a:rPr lang="en-US" sz="1200" dirty="0">
-                <a:solidFill>
-                  <a:srgbClr val="1C2833"/>
-                </a:solidFill>
-                <a:latin typeface="Arial" pitchFamily="34" charset="0"/>
-                <a:ea typeface="Arial" pitchFamily="34" charset="-122"/>
-                <a:cs typeface="Arial" pitchFamily="34" charset="-120"/>
-              </a:rPr>
-              <a:t> + </a:t>
+              <a:t>(See </a:t>
             </a:r>
             <a:pPr algn="l" indent="0" marL="0">
               <a:lnSpc>
@@ -3249,27 +3550,7 @@
                 <a:ea typeface="Arial" pitchFamily="34" charset="-122"/>
                 <a:cs typeface="Arial" pitchFamily="34" charset="-120"/>
               </a:rPr>
-              <a:t>n</a:t>
-            </a:r>
-            <a:pPr algn="l" indent="0" marL="0">
-              <a:lnSpc>
-                <a:spcPts val="1620"/>
-              </a:lnSpc>
-              <a:spcAft>
-                <a:spcPts val="300"/>
-              </a:spcAft>
-              <a:buNone/>
-            </a:pPr>
-            <a:r>
-              <a:rPr lang="en-US" sz="1200" dirty="0">
-                <a:solidFill>
-                  <a:srgbClr val="1C2833"/>
-                </a:solidFill>
-                <a:latin typeface="Arial" pitchFamily="34" charset="0"/>
-                <a:ea typeface="Arial" pitchFamily="34" charset="-122"/>
-                <a:cs typeface="Arial" pitchFamily="34" charset="-120"/>
-              </a:rPr>
-              <a:t>(</a:t>
+              <a:t>sources.md</a:t>
             </a:r>
             <a:pPr algn="l" indent="0" marL="0">
               <a:lnSpc>
@@ -3289,71 +3570,7 @@
                 <a:ea typeface="Arial" pitchFamily="34" charset="-122"/>
                 <a:cs typeface="Arial" pitchFamily="34" charset="-120"/>
               </a:rPr>
-              <a:t>n</a:t>
-            </a:r>
-            <a:pPr algn="l" indent="0" marL="0">
-              <a:lnSpc>
-                <a:spcPts val="1620"/>
-              </a:lnSpc>
-              <a:spcAft>
-                <a:spcPts val="300"/>
-              </a:spcAft>
-              <a:buNone/>
-            </a:pPr>
-            <a:r>
-              <a:rPr lang="en-US" sz="1200" dirty="0">
-                <a:solidFill>
-                  <a:srgbClr val="1C2833"/>
-                </a:solidFill>
-                <a:latin typeface="Arial" pitchFamily="34" charset="0"/>
-                <a:ea typeface="Arial" pitchFamily="34" charset="-122"/>
-                <a:cs typeface="Arial" pitchFamily="34" charset="-120"/>
-              </a:rPr>
-              <a:t>²−1)/2.)</a:t>
-            </a:r>
-            <a:endParaRPr lang="en-US" sz="1200" dirty="0"/>
-          </a:p>
-          <a:p>
-            <a:pPr algn="l" marL="342900" indent="-342900">
-              <a:lnSpc>
-                <a:spcPts val="1620"/>
-              </a:lnSpc>
-              <a:spcAft>
-                <a:spcPts val="300"/>
-              </a:spcAft>
-              <a:buSzPct val="100000"/>
-              <a:buChar char="•"/>
-            </a:pPr>
-            <a:r>
-              <a:rPr lang="en-US" sz="1200" b="1" dirty="0">
-                <a:solidFill>
-                  <a:srgbClr val="1C2833"/>
-                </a:solidFill>
-                <a:latin typeface="Arial" pitchFamily="34" charset="0"/>
-                <a:ea typeface="Arial" pitchFamily="34" charset="-122"/>
-                <a:cs typeface="Arial" pitchFamily="34" charset="-120"/>
-              </a:rPr>
-              <a:t>One tier down:</a:t>
-            </a:r>
-            <a:pPr algn="l" indent="0" marL="0">
-              <a:lnSpc>
-                <a:spcPts val="1620"/>
-              </a:lnSpc>
-              <a:spcAft>
-                <a:spcPts val="300"/>
-              </a:spcAft>
-              <a:buNone/>
-            </a:pPr>
-            <a:r>
-              <a:rPr lang="en-US" sz="1200" dirty="0">
-                <a:solidFill>
-                  <a:srgbClr val="1C2833"/>
-                </a:solidFill>
-                <a:latin typeface="Arial" pitchFamily="34" charset="0"/>
-                <a:ea typeface="Arial" pitchFamily="34" charset="-122"/>
-                <a:cs typeface="Arial" pitchFamily="34" charset="-120"/>
-              </a:rPr>
-              <a:t> Focus on the 3×3 case alone. Verify the constant 15 by summing every row, column, and diagonal of the Day-1 square. Do it slowly.</a:t>
+              <a:t>.)</a:t>
             </a:r>
             <a:endParaRPr lang="en-US" sz="1200" dirty="0"/>
           </a:p>
@@ -3511,7 +3728,7 @@
                 <a:ea typeface="Georgia" pitchFamily="34" charset="-122"/>
                 <a:cs typeface="Georgia" pitchFamily="34" charset="-120"/>
               </a:rPr>
-              <a:t>Teacher notes</a:t>
+              <a:t>Activity (15 min) — Formative quiz Part A</a:t>
             </a:r>
             <a:endParaRPr lang="en-US" sz="1800" dirty="0"/>
           </a:p>
@@ -3525,8 +3742,8 @@
         </p:nvSpPr>
         <p:spPr>
           <a:xfrm>
-            <a:off x="406301" y="870942"/>
-            <a:ext cx="8498026" cy="853083"/>
+            <a:off x="634901" y="883593"/>
+            <a:ext cx="8102798" cy="788491"/>
           </a:xfrm>
           <a:prstGeom prst="rect">
             <a:avLst/>
@@ -3538,17 +3755,15 @@
           <a:bodyPr wrap="square" lIns="0" tIns="0" rIns="0" bIns="0" rtlCol="0" anchor="t"/>
           <a:lstStyle/>
           <a:p>
-            <a:pPr algn="l" indent="0" marL="0">
-              <a:lnSpc>
-                <a:spcPts val="1680"/>
-              </a:lnSpc>
-              <a:spcBef>
-                <a:spcPts val="300"/>
-              </a:spcBef>
-              <a:spcAft>
-                <a:spcPts val="300"/>
-              </a:spcAft>
-              <a:buNone/>
+            <a:pPr algn="l" marL="342900" indent="-342900">
+              <a:lnSpc>
+                <a:spcPts val="1620"/>
+              </a:lnSpc>
+              <a:spcAft>
+                <a:spcPts val="300"/>
+              </a:spcAft>
+              <a:buSzPct val="100000"/>
+              <a:buChar char="•"/>
             </a:pPr>
             <a:r>
               <a:rPr lang="en-US" sz="1200" dirty="0">
@@ -3559,38 +3774,12 @@
                 <a:ea typeface="Arial" pitchFamily="34" charset="-122"/>
                 <a:cs typeface="Arial" pitchFamily="34" charset="-120"/>
               </a:rPr>
-              <a:t>– A common stumble: students compute 1 + 2 + ... + 9 incorrectly. Remind them that 1+9, 2+8, 3+7, 4+6 each = 10, plus 5 = 45. This itself is a pretty argument worth pausing on. – For the generalisation, some students will struggle with the </a:t>
-            </a:r>
-            <a:pPr algn="l" indent="0" marL="0">
-              <a:lnSpc>
-                <a:spcPts val="1680"/>
-              </a:lnSpc>
-              <a:spcBef>
-                <a:spcPts val="300"/>
-              </a:spcBef>
-              <a:spcAft>
-                <a:spcPts val="300"/>
-              </a:spcAft>
-              <a:buNone/>
-            </a:pPr>
-            <a:r>
-              <a:rPr lang="en-US" sz="1200" i="1" dirty="0">
-                <a:solidFill>
-                  <a:srgbClr val="1C2833"/>
-                </a:solidFill>
-                <a:latin typeface="Arial" pitchFamily="34" charset="0"/>
-                <a:ea typeface="Arial" pitchFamily="34" charset="-122"/>
-                <a:cs typeface="Arial" pitchFamily="34" charset="-120"/>
-              </a:rPr>
-              <a:t>n</a:t>
-            </a:r>
-            <a:pPr algn="l" indent="0" marL="0">
-              <a:lnSpc>
-                <a:spcPts val="1680"/>
-              </a:lnSpc>
-              <a:spcBef>
-                <a:spcPts val="300"/>
-              </a:spcBef>
+              <a:t>Hand out </a:t>
+            </a:r>
+            <a:pPr algn="l" indent="0" marL="0">
+              <a:lnSpc>
+                <a:spcPts val="1620"/>
+              </a:lnSpc>
               <a:spcAft>
                 <a:spcPts val="300"/>
               </a:spcAft>
@@ -3605,38 +3794,12 @@
                 <a:ea typeface="Arial" pitchFamily="34" charset="-122"/>
                 <a:cs typeface="Arial" pitchFamily="34" charset="-120"/>
               </a:rPr>
-              <a:t>² notation. Walk them through the </a:t>
-            </a:r>
-            <a:pPr algn="l" indent="0" marL="0">
-              <a:lnSpc>
-                <a:spcPts val="1680"/>
-              </a:lnSpc>
-              <a:spcBef>
-                <a:spcPts val="300"/>
-              </a:spcBef>
-              <a:spcAft>
-                <a:spcPts val="300"/>
-              </a:spcAft>
-              <a:buNone/>
-            </a:pPr>
-            <a:r>
-              <a:rPr lang="en-US" sz="1200" i="1" dirty="0">
-                <a:solidFill>
-                  <a:srgbClr val="1C2833"/>
-                </a:solidFill>
-                <a:latin typeface="Arial" pitchFamily="34" charset="0"/>
-                <a:ea typeface="Arial" pitchFamily="34" charset="-122"/>
-                <a:cs typeface="Arial" pitchFamily="34" charset="-120"/>
-              </a:rPr>
-              <a:t>n</a:t>
-            </a:r>
-            <a:pPr algn="l" indent="0" marL="0">
-              <a:lnSpc>
-                <a:spcPts val="1680"/>
-              </a:lnSpc>
-              <a:spcBef>
-                <a:spcPts val="300"/>
-              </a:spcBef>
+              <a:t>quizzes/formative.md</a:t>
+            </a:r>
+            <a:pPr algn="l" indent="0" marL="0">
+              <a:lnSpc>
+                <a:spcPts val="1620"/>
+              </a:lnSpc>
               <a:spcAft>
                 <a:spcPts val="300"/>
               </a:spcAft>
@@ -3651,42 +3814,20 @@
                 <a:ea typeface="Arial" pitchFamily="34" charset="-122"/>
                 <a:cs typeface="Arial" pitchFamily="34" charset="-120"/>
               </a:rPr>
-              <a:t> = 5 case explicitly: 1 + 2 + ... + 25 = 25 × 26 / 2 = 325; split among 5 rows → 65. – The formula </a:t>
-            </a:r>
-            <a:pPr algn="l" indent="0" marL="0">
-              <a:lnSpc>
-                <a:spcPts val="1680"/>
-              </a:lnSpc>
-              <a:spcBef>
-                <a:spcPts val="300"/>
-              </a:spcBef>
-              <a:spcAft>
-                <a:spcPts val="300"/>
-              </a:spcAft>
-              <a:buNone/>
-            </a:pPr>
-            <a:r>
-              <a:rPr lang="en-US" sz="1200" i="1" dirty="0">
-                <a:solidFill>
-                  <a:srgbClr val="1C2833"/>
-                </a:solidFill>
-                <a:latin typeface="Arial" pitchFamily="34" charset="0"/>
-                <a:ea typeface="Arial" pitchFamily="34" charset="-122"/>
-                <a:cs typeface="Arial" pitchFamily="34" charset="-120"/>
-              </a:rPr>
-              <a:t>S = n(n² + 1)/2</a:t>
-            </a:r>
-            <a:pPr algn="l" indent="0" marL="0">
-              <a:lnSpc>
-                <a:spcPts val="1680"/>
-              </a:lnSpc>
-              <a:spcBef>
-                <a:spcPts val="300"/>
-              </a:spcBef>
-              <a:spcAft>
-                <a:spcPts val="300"/>
-              </a:spcAft>
-              <a:buNone/>
+              <a:t> Part A.</a:t>
+            </a:r>
+            <a:endParaRPr lang="en-US" sz="1200" dirty="0"/>
+          </a:p>
+          <a:p>
+            <a:pPr algn="l" marL="342900" indent="-342900">
+              <a:lnSpc>
+                <a:spcPts val="1620"/>
+              </a:lnSpc>
+              <a:spcAft>
+                <a:spcPts val="300"/>
+              </a:spcAft>
+              <a:buSzPct val="100000"/>
+              <a:buChar char="•"/>
             </a:pPr>
             <a:r>
               <a:rPr lang="en-US" sz="1200" dirty="0">
@@ -3697,42 +3838,20 @@
                 <a:ea typeface="Arial" pitchFamily="34" charset="-122"/>
                 <a:cs typeface="Arial" pitchFamily="34" charset="-120"/>
               </a:rPr>
-              <a:t> is </a:t>
-            </a:r>
-            <a:pPr algn="l" indent="0" marL="0">
-              <a:lnSpc>
-                <a:spcPts val="1680"/>
-              </a:lnSpc>
-              <a:spcBef>
-                <a:spcPts val="300"/>
-              </a:spcBef>
-              <a:spcAft>
-                <a:spcPts val="300"/>
-              </a:spcAft>
-              <a:buNone/>
-            </a:pPr>
-            <a:r>
-              <a:rPr lang="en-US" sz="1200" b="1" dirty="0">
-                <a:solidFill>
-                  <a:srgbClr val="1C2833"/>
-                </a:solidFill>
-                <a:latin typeface="Arial" pitchFamily="34" charset="0"/>
-                <a:ea typeface="Arial" pitchFamily="34" charset="-122"/>
-                <a:cs typeface="Arial" pitchFamily="34" charset="-120"/>
-              </a:rPr>
-              <a:t>the</a:t>
-            </a:r>
-            <a:pPr algn="l" indent="0" marL="0">
-              <a:lnSpc>
-                <a:spcPts val="1680"/>
-              </a:lnSpc>
-              <a:spcBef>
-                <a:spcPts val="300"/>
-              </a:spcBef>
-              <a:spcAft>
-                <a:spcPts val="300"/>
-              </a:spcAft>
-              <a:buNone/>
+              <a:t>Students complete individually. 10 minutes; 3 minutes for self-check against the board answer key.</a:t>
+            </a:r>
+            <a:endParaRPr lang="en-US" sz="1200" dirty="0"/>
+          </a:p>
+          <a:p>
+            <a:pPr algn="l" marL="342900" indent="-342900">
+              <a:lnSpc>
+                <a:spcPts val="1620"/>
+              </a:lnSpc>
+              <a:spcAft>
+                <a:spcPts val="300"/>
+              </a:spcAft>
+              <a:buSzPct val="100000"/>
+              <a:buChar char="•"/>
             </a:pPr>
             <a:r>
               <a:rPr lang="en-US" sz="1200" dirty="0">
@@ -3743,7 +3862,7 @@
                 <a:ea typeface="Arial" pitchFamily="34" charset="-122"/>
                 <a:cs typeface="Arial" pitchFamily="34" charset="-120"/>
               </a:rPr>
-              <a:t> rule of this module. Drill it.</a:t>
+              <a:t>Part A is 6 short questions: 3 on the formula, 3 on verifying given squares.</a:t>
             </a:r>
             <a:endParaRPr lang="en-US" sz="1200" dirty="0"/>
           </a:p>
@@ -3901,7 +4020,7 @@
                 <a:ea typeface="Georgia" pitchFamily="34" charset="-122"/>
                 <a:cs typeface="Georgia" pitchFamily="34" charset="-120"/>
               </a:rPr>
-              <a:t>Citation(s) used in this lesson</a:t>
+              <a:t>Wrap-up (5 min)</a:t>
             </a:r>
             <a:endParaRPr lang="en-US" sz="1800" dirty="0"/>
           </a:p>
@@ -3915,8 +4034,8 @@
         </p:nvSpPr>
         <p:spPr>
           <a:xfrm>
-            <a:off x="406301" y="870942"/>
-            <a:ext cx="8498026" cy="426541"/>
+            <a:off x="634901" y="883593"/>
+            <a:ext cx="8102798" cy="731341"/>
           </a:xfrm>
           <a:prstGeom prst="rect">
             <a:avLst/>
@@ -3928,6 +4047,156 @@
           <a:bodyPr wrap="square" lIns="0" tIns="0" rIns="0" bIns="0" rtlCol="0" anchor="t"/>
           <a:lstStyle/>
           <a:p>
+            <a:pPr algn="l" marL="342900" indent="-342900">
+              <a:lnSpc>
+                <a:spcPts val="1620"/>
+              </a:lnSpc>
+              <a:spcAft>
+                <a:spcPts val="300"/>
+              </a:spcAft>
+              <a:buSzPct val="100000"/>
+              <a:buChar char="•"/>
+            </a:pPr>
+            <a:r>
+              <a:rPr lang="en-US" sz="1200" i="1" dirty="0">
+                <a:solidFill>
+                  <a:srgbClr val="1C2833"/>
+                </a:solidFill>
+                <a:latin typeface="Arial" pitchFamily="34" charset="0"/>
+                <a:ea typeface="Arial" pitchFamily="34" charset="-122"/>
+                <a:cs typeface="Arial" pitchFamily="34" charset="-120"/>
+              </a:rPr>
+              <a:t>"Quick check: what would the magic constant be for a 10×10 magic square with the numbers 1 to 100?"</a:t>
+            </a:r>
+            <a:pPr algn="l" indent="0" marL="0">
+              <a:lnSpc>
+                <a:spcPts val="1620"/>
+              </a:lnSpc>
+              <a:spcAft>
+                <a:spcPts val="300"/>
+              </a:spcAft>
+              <a:buNone/>
+            </a:pPr>
+            <a:r>
+              <a:rPr lang="en-US" sz="1200" dirty="0">
+                <a:solidFill>
+                  <a:srgbClr val="1C2833"/>
+                </a:solidFill>
+                <a:latin typeface="Arial" pitchFamily="34" charset="0"/>
+                <a:ea typeface="Arial" pitchFamily="34" charset="-122"/>
+                <a:cs typeface="Arial" pitchFamily="34" charset="-120"/>
+              </a:rPr>
+              <a:t> Class works it out: S = 10 × 101 / 2 = </a:t>
+            </a:r>
+            <a:pPr algn="l" indent="0" marL="0">
+              <a:lnSpc>
+                <a:spcPts val="1620"/>
+              </a:lnSpc>
+              <a:spcAft>
+                <a:spcPts val="300"/>
+              </a:spcAft>
+              <a:buNone/>
+            </a:pPr>
+            <a:r>
+              <a:rPr lang="en-US" sz="1200" b="1" dirty="0">
+                <a:solidFill>
+                  <a:srgbClr val="1C2833"/>
+                </a:solidFill>
+                <a:latin typeface="Arial" pitchFamily="34" charset="0"/>
+                <a:ea typeface="Arial" pitchFamily="34" charset="-122"/>
+                <a:cs typeface="Arial" pitchFamily="34" charset="-120"/>
+              </a:rPr>
+              <a:t>505</a:t>
+            </a:r>
+            <a:pPr algn="l" indent="0" marL="0">
+              <a:lnSpc>
+                <a:spcPts val="1620"/>
+              </a:lnSpc>
+              <a:spcAft>
+                <a:spcPts val="300"/>
+              </a:spcAft>
+              <a:buNone/>
+            </a:pPr>
+            <a:r>
+              <a:rPr lang="en-US" sz="1200" dirty="0">
+                <a:solidFill>
+                  <a:srgbClr val="1C2833"/>
+                </a:solidFill>
+                <a:latin typeface="Arial" pitchFamily="34" charset="0"/>
+                <a:ea typeface="Arial" pitchFamily="34" charset="-122"/>
+                <a:cs typeface="Arial" pitchFamily="34" charset="-120"/>
+              </a:rPr>
+              <a:t>.</a:t>
+            </a:r>
+            <a:endParaRPr lang="en-US" sz="1200" dirty="0"/>
+          </a:p>
+          <a:p>
+            <a:pPr algn="l" marL="342900" indent="-342900">
+              <a:lnSpc>
+                <a:spcPts val="1620"/>
+              </a:lnSpc>
+              <a:spcAft>
+                <a:spcPts val="300"/>
+              </a:spcAft>
+              <a:buSzPct val="100000"/>
+              <a:buChar char="•"/>
+            </a:pPr>
+            <a:r>
+              <a:rPr lang="en-US" sz="1200" dirty="0">
+                <a:solidFill>
+                  <a:srgbClr val="1C2833"/>
+                </a:solidFill>
+                <a:latin typeface="Arial" pitchFamily="34" charset="0"/>
+                <a:ea typeface="Arial" pitchFamily="34" charset="-122"/>
+                <a:cs typeface="Arial" pitchFamily="34" charset="-120"/>
+              </a:rPr>
+              <a:t>Preview Day 3: </a:t>
+            </a:r>
+            <a:pPr algn="l" indent="0" marL="0">
+              <a:lnSpc>
+                <a:spcPts val="1620"/>
+              </a:lnSpc>
+              <a:spcAft>
+                <a:spcPts val="300"/>
+              </a:spcAft>
+              <a:buNone/>
+            </a:pPr>
+            <a:r>
+              <a:rPr lang="en-US" sz="1200" i="1" dirty="0">
+                <a:solidFill>
+                  <a:srgbClr val="1C2833"/>
+                </a:solidFill>
+                <a:latin typeface="Arial" pitchFamily="34" charset="0"/>
+                <a:ea typeface="Arial" pitchFamily="34" charset="-122"/>
+                <a:cs typeface="Arial" pitchFamily="34" charset="-120"/>
+              </a:rPr>
+              <a:t>"Tomorrow we ask: how many different 3×3 magic squares are there with 1 to 9? Take guesses tonight."</a:t>
+            </a:r>
+            <a:endParaRPr lang="en-US" sz="1200" dirty="0"/>
+          </a:p>
+        </p:txBody>
+      </p:sp>
+      <p:sp>
+        <p:nvSpPr>
+          <p:cNvPr id="5" name="Text 3"/>
+          <p:cNvSpPr/>
+          <p:nvPr/>
+        </p:nvSpPr>
+        <p:spPr>
+          <a:xfrm>
+            <a:off x="406301" y="4434929"/>
+            <a:ext cx="8498026" cy="213271"/>
+          </a:xfrm>
+          <a:prstGeom prst="rect">
+            <a:avLst/>
+          </a:prstGeom>
+          <a:noFill/>
+          <a:ln/>
+        </p:spPr>
+        <p:txBody>
+          <a:bodyPr wrap="square" lIns="0" tIns="0" rIns="0" bIns="0" rtlCol="0" anchor="t"/>
+          <a:lstStyle/>
+          <a:p>
             <a:pPr algn="l" indent="0" marL="0">
               <a:lnSpc>
                 <a:spcPts val="1680"/>
@@ -3949,8 +4218,1174 @@
                 <a:ea typeface="Arial" pitchFamily="34" charset="-122"/>
                 <a:cs typeface="Arial" pitchFamily="34" charset="-120"/>
               </a:rPr>
-              <a:t>– Nārāyaṇa Paṇḍita, </a:t>
-            </a:r>
+              <a:t>Middle ·  · IKS Curriculum</a:t>
+            </a:r>
+            <a:endParaRPr lang="en-US" sz="1200" dirty="0"/>
+          </a:p>
+        </p:txBody>
+      </p:sp>
+    </p:spTree>
+  </p:cSld>
+  <p:clrMapOvr>
+    <a:masterClrMapping/>
+  </p:clrMapOvr>
+</p:sld>
+</file>
+
+<file path=ppt/slides/slide14.xml><?xml version="1.0" encoding="utf-8"?>
+<p:sld xmlns:a="http://schemas.openxmlformats.org/drawingml/2006/main" xmlns:r="http://schemas.openxmlformats.org/officeDocument/2006/relationships" xmlns:p="http://schemas.openxmlformats.org/presentationml/2006/main">
+  <p:cSld name="Slide 14">
+    <p:bg>
+      <p:bgPr>
+        <a:solidFill>
+          <a:srgbClr val="FFFFFF"/>
+        </a:solidFill>
+      </p:bgPr>
+    </p:bg>
+    <p:spTree>
+      <p:nvGrpSpPr>
+        <p:cNvPr id="1" name=""/>
+        <p:cNvGrpSpPr/>
+        <p:nvPr/>
+      </p:nvGrpSpPr>
+      <p:grpSpPr>
+        <a:xfrm>
+          <a:off x="0" y="0"/>
+          <a:ext cx="0" cy="0"/>
+          <a:chOff x="0" y="0"/>
+          <a:chExt cx="0" cy="0"/>
+        </a:xfrm>
+      </p:grpSpPr>
+      <p:sp>
+        <p:nvSpPr>
+          <p:cNvPr id="2" name="Text 0"/>
+          <p:cNvSpPr/>
+          <p:nvPr/>
+        </p:nvSpPr>
+        <p:spPr>
+          <a:xfrm>
+            <a:off x="0" y="0"/>
+            <a:ext cx="9144000" cy="101501"/>
+          </a:xfrm>
+          <a:prstGeom prst="rect">
+            <a:avLst/>
+          </a:prstGeom>
+          <a:solidFill>
+            <a:srgbClr val="277884"/>
+          </a:solidFill>
+          <a:ln/>
+        </p:spPr>
+        <p:txBody>
+          <a:bodyPr wrap="square" rtlCol="0" anchor="ctr"/>
+          <a:lstStyle/>
+          <a:p>
+            <a:pPr indent="0" marL="0">
+              <a:buNone/>
+            </a:pPr>
+            <a:endParaRPr lang="en-US" dirty="0"/>
+          </a:p>
+        </p:txBody>
+      </p:sp>
+      <p:sp>
+        <p:nvSpPr>
+          <p:cNvPr id="3" name="Text 1"/>
+          <p:cNvSpPr/>
+          <p:nvPr/>
+        </p:nvSpPr>
+        <p:spPr>
+          <a:xfrm>
+            <a:off x="406301" y="457051"/>
+            <a:ext cx="8498026" cy="274290"/>
+          </a:xfrm>
+          <a:prstGeom prst="rect">
+            <a:avLst/>
+          </a:prstGeom>
+          <a:noFill/>
+          <a:ln/>
+        </p:spPr>
+        <p:txBody>
+          <a:bodyPr wrap="square" lIns="0" tIns="0" rIns="0" bIns="0" rtlCol="0" anchor="t"/>
+          <a:lstStyle/>
+          <a:p>
+            <a:pPr algn="l" indent="0" marL="0">
+              <a:lnSpc>
+                <a:spcPts val="2160"/>
+              </a:lnSpc>
+              <a:spcBef>
+                <a:spcPts val="600"/>
+              </a:spcBef>
+              <a:spcAft>
+                <a:spcPts val="800"/>
+              </a:spcAft>
+              <a:buNone/>
+            </a:pPr>
+            <a:r>
+              <a:rPr lang="en-US" sz="1800" b="1" dirty="0">
+                <a:solidFill>
+                  <a:srgbClr val="FE4447"/>
+                </a:solidFill>
+                <a:latin typeface="Georgia" pitchFamily="34" charset="0"/>
+                <a:ea typeface="Georgia" pitchFamily="34" charset="-122"/>
+                <a:cs typeface="Georgia" pitchFamily="34" charset="-120"/>
+              </a:rPr>
+              <a:t>Student-facing content</a:t>
+            </a:r>
+            <a:endParaRPr lang="en-US" sz="1800" dirty="0"/>
+          </a:p>
+        </p:txBody>
+      </p:sp>
+      <p:sp>
+        <p:nvSpPr>
+          <p:cNvPr id="4" name="Text 2"/>
+          <p:cNvSpPr/>
+          <p:nvPr/>
+        </p:nvSpPr>
+        <p:spPr>
+          <a:xfrm>
+            <a:off x="406301" y="883593"/>
+            <a:ext cx="8331398" cy="2188369"/>
+          </a:xfrm>
+          <a:prstGeom prst="rect">
+            <a:avLst/>
+          </a:prstGeom>
+          <a:solidFill>
+            <a:srgbClr val="F4F8F9"/>
+          </a:solidFill>
+          <a:ln/>
+        </p:spPr>
+        <p:txBody>
+          <a:bodyPr wrap="square" rtlCol="0" anchor="ctr"/>
+          <a:lstStyle/>
+          <a:p>
+            <a:pPr indent="0" marL="0">
+              <a:buNone/>
+            </a:pPr>
+            <a:endParaRPr lang="en-US" dirty="0"/>
+          </a:p>
+        </p:txBody>
+      </p:sp>
+      <p:sp>
+        <p:nvSpPr>
+          <p:cNvPr id="5" name="Shape 3"/>
+          <p:cNvSpPr/>
+          <p:nvPr/>
+        </p:nvSpPr>
+        <p:spPr>
+          <a:xfrm>
+            <a:off x="434876" y="883593"/>
+            <a:ext cx="0" cy="2188369"/>
+          </a:xfrm>
+          <a:prstGeom prst="line">
+            <a:avLst/>
+          </a:prstGeom>
+          <a:noFill/>
+          <a:ln w="57150">
+            <a:solidFill>
+              <a:srgbClr val="FE4447"/>
+            </a:solidFill>
+            <a:prstDash val="solid"/>
+          </a:ln>
+        </p:spPr>
+      </p:sp>
+      <p:sp>
+        <p:nvSpPr>
+          <p:cNvPr id="6" name="Text 4"/>
+          <p:cNvSpPr/>
+          <p:nvPr/>
+        </p:nvSpPr>
+        <p:spPr>
+          <a:xfrm>
+            <a:off x="692051" y="1074093"/>
+            <a:ext cx="7973389" cy="230981"/>
+          </a:xfrm>
+          <a:prstGeom prst="rect">
+            <a:avLst/>
+          </a:prstGeom>
+          <a:noFill/>
+          <a:ln/>
+        </p:spPr>
+        <p:txBody>
+          <a:bodyPr wrap="square" lIns="0" tIns="0" rIns="0" bIns="0" rtlCol="0" anchor="t"/>
+          <a:lstStyle/>
+          <a:p>
+            <a:pPr algn="l" indent="0" marL="0">
+              <a:lnSpc>
+                <a:spcPts val="1820"/>
+              </a:lnSpc>
+              <a:spcBef>
+                <a:spcPts val="300"/>
+              </a:spcBef>
+              <a:spcAft>
+                <a:spcPts val="300"/>
+              </a:spcAft>
+              <a:buNone/>
+            </a:pPr>
+            <a:r>
+              <a:rPr lang="en-US" sz="1300" b="1" i="1" dirty="0">
+                <a:solidFill>
+                  <a:srgbClr val="1C2833"/>
+                </a:solidFill>
+                <a:latin typeface="Georgia" pitchFamily="34" charset="0"/>
+                <a:ea typeface="Georgia" pitchFamily="34" charset="-122"/>
+                <a:cs typeface="Georgia" pitchFamily="34" charset="-120"/>
+              </a:rPr>
+              <a:t>The magic constant formula.</a:t>
+            </a:r>
+            <a:endParaRPr lang="en-US" sz="1300" dirty="0"/>
+          </a:p>
+        </p:txBody>
+      </p:sp>
+      <p:sp>
+        <p:nvSpPr>
+          <p:cNvPr id="7" name="Text 5"/>
+          <p:cNvSpPr/>
+          <p:nvPr/>
+        </p:nvSpPr>
+        <p:spPr>
+          <a:xfrm>
+            <a:off x="692051" y="1343174"/>
+            <a:ext cx="7973389" cy="230981"/>
+          </a:xfrm>
+          <a:prstGeom prst="rect">
+            <a:avLst/>
+          </a:prstGeom>
+          <a:noFill/>
+          <a:ln/>
+        </p:spPr>
+        <p:txBody>
+          <a:bodyPr wrap="square" lIns="0" tIns="0" rIns="0" bIns="0" rtlCol="0" anchor="t"/>
+          <a:lstStyle/>
+          <a:p>
+            <a:pPr algn="l" indent="0" marL="0">
+              <a:lnSpc>
+                <a:spcPts val="1820"/>
+              </a:lnSpc>
+              <a:spcBef>
+                <a:spcPts val="300"/>
+              </a:spcBef>
+              <a:spcAft>
+                <a:spcPts val="300"/>
+              </a:spcAft>
+              <a:buNone/>
+            </a:pPr>
+            <a:r>
+              <a:rPr lang="en-US" sz="1300" dirty="0">
+                <a:solidFill>
+                  <a:srgbClr val="1C2833"/>
+                </a:solidFill>
+                <a:latin typeface="Georgia" pitchFamily="34" charset="0"/>
+                <a:ea typeface="Georgia" pitchFamily="34" charset="-122"/>
+                <a:cs typeface="Georgia" pitchFamily="34" charset="-120"/>
+              </a:rPr>
+              <a:t>For an </a:t>
+            </a:r>
+            <a:pPr algn="l" indent="0" marL="0">
+              <a:lnSpc>
+                <a:spcPts val="1820"/>
+              </a:lnSpc>
+              <a:spcBef>
+                <a:spcPts val="300"/>
+              </a:spcBef>
+              <a:spcAft>
+                <a:spcPts val="300"/>
+              </a:spcAft>
+              <a:buNone/>
+            </a:pPr>
+            <a:r>
+              <a:rPr lang="en-US" sz="1300" i="1" dirty="0">
+                <a:solidFill>
+                  <a:srgbClr val="1C2833"/>
+                </a:solidFill>
+                <a:latin typeface="Georgia" pitchFamily="34" charset="0"/>
+                <a:ea typeface="Georgia" pitchFamily="34" charset="-122"/>
+                <a:cs typeface="Georgia" pitchFamily="34" charset="-120"/>
+              </a:rPr>
+              <a:t>n × n</a:t>
+            </a:r>
+            <a:pPr algn="l" indent="0" marL="0">
+              <a:lnSpc>
+                <a:spcPts val="1820"/>
+              </a:lnSpc>
+              <a:spcBef>
+                <a:spcPts val="300"/>
+              </a:spcBef>
+              <a:spcAft>
+                <a:spcPts val="300"/>
+              </a:spcAft>
+              <a:buNone/>
+            </a:pPr>
+            <a:r>
+              <a:rPr lang="en-US" sz="1300" dirty="0">
+                <a:solidFill>
+                  <a:srgbClr val="1C2833"/>
+                </a:solidFill>
+                <a:latin typeface="Georgia" pitchFamily="34" charset="0"/>
+                <a:ea typeface="Georgia" pitchFamily="34" charset="-122"/>
+                <a:cs typeface="Georgia" pitchFamily="34" charset="-120"/>
+              </a:rPr>
+              <a:t> magic square containing the numbers 1, 2, ..., </a:t>
+            </a:r>
+            <a:pPr algn="l" indent="0" marL="0">
+              <a:lnSpc>
+                <a:spcPts val="1820"/>
+              </a:lnSpc>
+              <a:spcBef>
+                <a:spcPts val="300"/>
+              </a:spcBef>
+              <a:spcAft>
+                <a:spcPts val="300"/>
+              </a:spcAft>
+              <a:buNone/>
+            </a:pPr>
+            <a:r>
+              <a:rPr lang="en-US" sz="1300" i="1" dirty="0">
+                <a:solidFill>
+                  <a:srgbClr val="1C2833"/>
+                </a:solidFill>
+                <a:latin typeface="Georgia" pitchFamily="34" charset="0"/>
+                <a:ea typeface="Georgia" pitchFamily="34" charset="-122"/>
+                <a:cs typeface="Georgia" pitchFamily="34" charset="-120"/>
+              </a:rPr>
+              <a:t>n</a:t>
+            </a:r>
+            <a:pPr algn="l" indent="0" marL="0">
+              <a:lnSpc>
+                <a:spcPts val="1820"/>
+              </a:lnSpc>
+              <a:spcBef>
+                <a:spcPts val="300"/>
+              </a:spcBef>
+              <a:spcAft>
+                <a:spcPts val="300"/>
+              </a:spcAft>
+              <a:buNone/>
+            </a:pPr>
+            <a:r>
+              <a:rPr lang="en-US" sz="1300" dirty="0">
+                <a:solidFill>
+                  <a:srgbClr val="1C2833"/>
+                </a:solidFill>
+                <a:latin typeface="Georgia" pitchFamily="34" charset="0"/>
+                <a:ea typeface="Georgia" pitchFamily="34" charset="-122"/>
+                <a:cs typeface="Georgia" pitchFamily="34" charset="-120"/>
+              </a:rPr>
+              <a:t>²:</a:t>
+            </a:r>
+            <a:endParaRPr lang="en-US" sz="1300" dirty="0"/>
+          </a:p>
+        </p:txBody>
+      </p:sp>
+      <p:sp>
+        <p:nvSpPr>
+          <p:cNvPr id="8" name="Text 6"/>
+          <p:cNvSpPr/>
+          <p:nvPr/>
+        </p:nvSpPr>
+        <p:spPr>
+          <a:xfrm>
+            <a:off x="692051" y="1612255"/>
+            <a:ext cx="7973389" cy="230981"/>
+          </a:xfrm>
+          <a:prstGeom prst="rect">
+            <a:avLst/>
+          </a:prstGeom>
+          <a:noFill/>
+          <a:ln/>
+        </p:spPr>
+        <p:txBody>
+          <a:bodyPr wrap="square" lIns="0" tIns="0" rIns="0" bIns="0" rtlCol="0" anchor="t"/>
+          <a:lstStyle/>
+          <a:p>
+            <a:pPr algn="l" indent="0" marL="0">
+              <a:lnSpc>
+                <a:spcPts val="1820"/>
+              </a:lnSpc>
+              <a:spcBef>
+                <a:spcPts val="300"/>
+              </a:spcBef>
+              <a:spcAft>
+                <a:spcPts val="300"/>
+              </a:spcAft>
+              <a:buNone/>
+            </a:pPr>
+            <a:r>
+              <a:rPr lang="en-US" sz="1300" dirty="0">
+                <a:solidFill>
+                  <a:srgbClr val="1C2833"/>
+                </a:solidFill>
+                <a:latin typeface="Georgia" pitchFamily="34" charset="0"/>
+                <a:ea typeface="Georgia" pitchFamily="34" charset="-122"/>
+                <a:cs typeface="Georgia" pitchFamily="34" charset="-120"/>
+              </a:rPr>
+              <a:t>&gt; </a:t>
+            </a:r>
+            <a:pPr algn="l" indent="0" marL="0">
+              <a:lnSpc>
+                <a:spcPts val="1820"/>
+              </a:lnSpc>
+              <a:spcBef>
+                <a:spcPts val="300"/>
+              </a:spcBef>
+              <a:spcAft>
+                <a:spcPts val="300"/>
+              </a:spcAft>
+              <a:buNone/>
+            </a:pPr>
+            <a:r>
+              <a:rPr lang="en-US" sz="1300" b="1" i="1" dirty="0">
+                <a:solidFill>
+                  <a:srgbClr val="1C2833"/>
+                </a:solidFill>
+                <a:latin typeface="Georgia" pitchFamily="34" charset="0"/>
+                <a:ea typeface="Georgia" pitchFamily="34" charset="-122"/>
+                <a:cs typeface="Georgia" pitchFamily="34" charset="-120"/>
+              </a:rPr>
+              <a:t>S = n(n² + 1) / 2</a:t>
+            </a:r>
+            <a:endParaRPr lang="en-US" sz="1300" dirty="0"/>
+          </a:p>
+        </p:txBody>
+      </p:sp>
+      <p:sp>
+        <p:nvSpPr>
+          <p:cNvPr id="9" name="Text 7"/>
+          <p:cNvSpPr/>
+          <p:nvPr/>
+        </p:nvSpPr>
+        <p:spPr>
+          <a:xfrm>
+            <a:off x="692051" y="1881336"/>
+            <a:ext cx="7973389" cy="461963"/>
+          </a:xfrm>
+          <a:prstGeom prst="rect">
+            <a:avLst/>
+          </a:prstGeom>
+          <a:noFill/>
+          <a:ln/>
+        </p:spPr>
+        <p:txBody>
+          <a:bodyPr wrap="square" lIns="0" tIns="0" rIns="0" bIns="0" rtlCol="0" anchor="t"/>
+          <a:lstStyle/>
+          <a:p>
+            <a:pPr algn="l" indent="0" marL="0">
+              <a:lnSpc>
+                <a:spcPts val="1820"/>
+              </a:lnSpc>
+              <a:spcBef>
+                <a:spcPts val="300"/>
+              </a:spcBef>
+              <a:spcAft>
+                <a:spcPts val="300"/>
+              </a:spcAft>
+              <a:buNone/>
+            </a:pPr>
+            <a:r>
+              <a:rPr lang="en-US" sz="1300" b="1" i="1" dirty="0">
+                <a:solidFill>
+                  <a:srgbClr val="1C2833"/>
+                </a:solidFill>
+                <a:latin typeface="Georgia" pitchFamily="34" charset="0"/>
+                <a:ea typeface="Georgia" pitchFamily="34" charset="-122"/>
+                <a:cs typeface="Georgia" pitchFamily="34" charset="-120"/>
+              </a:rPr>
+              <a:t>Why?</a:t>
+            </a:r>
+            <a:pPr algn="l" indent="0" marL="0">
+              <a:lnSpc>
+                <a:spcPts val="1820"/>
+              </a:lnSpc>
+              <a:spcBef>
+                <a:spcPts val="300"/>
+              </a:spcBef>
+              <a:spcAft>
+                <a:spcPts val="300"/>
+              </a:spcAft>
+              <a:buNone/>
+            </a:pPr>
+            <a:r>
+              <a:rPr lang="en-US" sz="1300" dirty="0">
+                <a:solidFill>
+                  <a:srgbClr val="1C2833"/>
+                </a:solidFill>
+                <a:latin typeface="Georgia" pitchFamily="34" charset="0"/>
+                <a:ea typeface="Georgia" pitchFamily="34" charset="-122"/>
+                <a:cs typeface="Georgia" pitchFamily="34" charset="-120"/>
+              </a:rPr>
+              <a:t> The sum of all </a:t>
+            </a:r>
+            <a:pPr algn="l" indent="0" marL="0">
+              <a:lnSpc>
+                <a:spcPts val="1820"/>
+              </a:lnSpc>
+              <a:spcBef>
+                <a:spcPts val="300"/>
+              </a:spcBef>
+              <a:spcAft>
+                <a:spcPts val="300"/>
+              </a:spcAft>
+              <a:buNone/>
+            </a:pPr>
+            <a:r>
+              <a:rPr lang="en-US" sz="1300" i="1" dirty="0">
+                <a:solidFill>
+                  <a:srgbClr val="1C2833"/>
+                </a:solidFill>
+                <a:latin typeface="Georgia" pitchFamily="34" charset="0"/>
+                <a:ea typeface="Georgia" pitchFamily="34" charset="-122"/>
+                <a:cs typeface="Georgia" pitchFamily="34" charset="-120"/>
+              </a:rPr>
+              <a:t>n</a:t>
+            </a:r>
+            <a:pPr algn="l" indent="0" marL="0">
+              <a:lnSpc>
+                <a:spcPts val="1820"/>
+              </a:lnSpc>
+              <a:spcBef>
+                <a:spcPts val="300"/>
+              </a:spcBef>
+              <a:spcAft>
+                <a:spcPts val="300"/>
+              </a:spcAft>
+              <a:buNone/>
+            </a:pPr>
+            <a:r>
+              <a:rPr lang="en-US" sz="1300" dirty="0">
+                <a:solidFill>
+                  <a:srgbClr val="1C2833"/>
+                </a:solidFill>
+                <a:latin typeface="Georgia" pitchFamily="34" charset="0"/>
+                <a:ea typeface="Georgia" pitchFamily="34" charset="-122"/>
+                <a:cs typeface="Georgia" pitchFamily="34" charset="-120"/>
+              </a:rPr>
+              <a:t>² numbers is </a:t>
+            </a:r>
+            <a:pPr algn="l" indent="0" marL="0">
+              <a:lnSpc>
+                <a:spcPts val="1820"/>
+              </a:lnSpc>
+              <a:spcBef>
+                <a:spcPts val="300"/>
+              </a:spcBef>
+              <a:spcAft>
+                <a:spcPts val="300"/>
+              </a:spcAft>
+              <a:buNone/>
+            </a:pPr>
+            <a:r>
+              <a:rPr lang="en-US" sz="1300" i="1" dirty="0">
+                <a:solidFill>
+                  <a:srgbClr val="1C2833"/>
+                </a:solidFill>
+                <a:latin typeface="Georgia" pitchFamily="34" charset="0"/>
+                <a:ea typeface="Georgia" pitchFamily="34" charset="-122"/>
+                <a:cs typeface="Georgia" pitchFamily="34" charset="-120"/>
+              </a:rPr>
+              <a:t>n</a:t>
+            </a:r>
+            <a:pPr algn="l" indent="0" marL="0">
+              <a:lnSpc>
+                <a:spcPts val="1820"/>
+              </a:lnSpc>
+              <a:spcBef>
+                <a:spcPts val="300"/>
+              </a:spcBef>
+              <a:spcAft>
+                <a:spcPts val="300"/>
+              </a:spcAft>
+              <a:buNone/>
+            </a:pPr>
+            <a:r>
+              <a:rPr lang="en-US" sz="1300" dirty="0">
+                <a:solidFill>
+                  <a:srgbClr val="1C2833"/>
+                </a:solidFill>
+                <a:latin typeface="Georgia" pitchFamily="34" charset="0"/>
+                <a:ea typeface="Georgia" pitchFamily="34" charset="-122"/>
+                <a:cs typeface="Georgia" pitchFamily="34" charset="-120"/>
+              </a:rPr>
+              <a:t>²(</a:t>
+            </a:r>
+            <a:pPr algn="l" indent="0" marL="0">
+              <a:lnSpc>
+                <a:spcPts val="1820"/>
+              </a:lnSpc>
+              <a:spcBef>
+                <a:spcPts val="300"/>
+              </a:spcBef>
+              <a:spcAft>
+                <a:spcPts val="300"/>
+              </a:spcAft>
+              <a:buNone/>
+            </a:pPr>
+            <a:r>
+              <a:rPr lang="en-US" sz="1300" i="1" dirty="0">
+                <a:solidFill>
+                  <a:srgbClr val="1C2833"/>
+                </a:solidFill>
+                <a:latin typeface="Georgia" pitchFamily="34" charset="0"/>
+                <a:ea typeface="Georgia" pitchFamily="34" charset="-122"/>
+                <a:cs typeface="Georgia" pitchFamily="34" charset="-120"/>
+              </a:rPr>
+              <a:t>n</a:t>
+            </a:r>
+            <a:pPr algn="l" indent="0" marL="0">
+              <a:lnSpc>
+                <a:spcPts val="1820"/>
+              </a:lnSpc>
+              <a:spcBef>
+                <a:spcPts val="300"/>
+              </a:spcBef>
+              <a:spcAft>
+                <a:spcPts val="300"/>
+              </a:spcAft>
+              <a:buNone/>
+            </a:pPr>
+            <a:r>
+              <a:rPr lang="en-US" sz="1300" dirty="0">
+                <a:solidFill>
+                  <a:srgbClr val="1C2833"/>
+                </a:solidFill>
+                <a:latin typeface="Georgia" pitchFamily="34" charset="0"/>
+                <a:ea typeface="Georgia" pitchFamily="34" charset="-122"/>
+                <a:cs typeface="Georgia" pitchFamily="34" charset="-120"/>
+              </a:rPr>
+              <a:t>² + 1) / 2 (the standard sum-to-</a:t>
+            </a:r>
+            <a:pPr algn="l" indent="0" marL="0">
+              <a:lnSpc>
+                <a:spcPts val="1820"/>
+              </a:lnSpc>
+              <a:spcBef>
+                <a:spcPts val="300"/>
+              </a:spcBef>
+              <a:spcAft>
+                <a:spcPts val="300"/>
+              </a:spcAft>
+              <a:buNone/>
+            </a:pPr>
+            <a:r>
+              <a:rPr lang="en-US" sz="1300" i="1" dirty="0">
+                <a:solidFill>
+                  <a:srgbClr val="1C2833"/>
+                </a:solidFill>
+                <a:latin typeface="Georgia" pitchFamily="34" charset="0"/>
+                <a:ea typeface="Georgia" pitchFamily="34" charset="-122"/>
+                <a:cs typeface="Georgia" pitchFamily="34" charset="-120"/>
+              </a:rPr>
+              <a:t>n</a:t>
+            </a:r>
+            <a:pPr algn="l" indent="0" marL="0">
+              <a:lnSpc>
+                <a:spcPts val="1820"/>
+              </a:lnSpc>
+              <a:spcBef>
+                <a:spcPts val="300"/>
+              </a:spcBef>
+              <a:spcAft>
+                <a:spcPts val="300"/>
+              </a:spcAft>
+              <a:buNone/>
+            </a:pPr>
+            <a:r>
+              <a:rPr lang="en-US" sz="1300" dirty="0">
+                <a:solidFill>
+                  <a:srgbClr val="1C2833"/>
+                </a:solidFill>
+                <a:latin typeface="Georgia" pitchFamily="34" charset="0"/>
+                <a:ea typeface="Georgia" pitchFamily="34" charset="-122"/>
+                <a:cs typeface="Georgia" pitchFamily="34" charset="-120"/>
+              </a:rPr>
+              <a:t> formula). This total is split equally among the </a:t>
+            </a:r>
+            <a:pPr algn="l" indent="0" marL="0">
+              <a:lnSpc>
+                <a:spcPts val="1820"/>
+              </a:lnSpc>
+              <a:spcBef>
+                <a:spcPts val="300"/>
+              </a:spcBef>
+              <a:spcAft>
+                <a:spcPts val="300"/>
+              </a:spcAft>
+              <a:buNone/>
+            </a:pPr>
+            <a:r>
+              <a:rPr lang="en-US" sz="1300" i="1" dirty="0">
+                <a:solidFill>
+                  <a:srgbClr val="1C2833"/>
+                </a:solidFill>
+                <a:latin typeface="Georgia" pitchFamily="34" charset="0"/>
+                <a:ea typeface="Georgia" pitchFamily="34" charset="-122"/>
+                <a:cs typeface="Georgia" pitchFamily="34" charset="-120"/>
+              </a:rPr>
+              <a:t>n</a:t>
+            </a:r>
+            <a:pPr algn="l" indent="0" marL="0">
+              <a:lnSpc>
+                <a:spcPts val="1820"/>
+              </a:lnSpc>
+              <a:spcBef>
+                <a:spcPts val="300"/>
+              </a:spcBef>
+              <a:spcAft>
+                <a:spcPts val="300"/>
+              </a:spcAft>
+              <a:buNone/>
+            </a:pPr>
+            <a:r>
+              <a:rPr lang="en-US" sz="1300" dirty="0">
+                <a:solidFill>
+                  <a:srgbClr val="1C2833"/>
+                </a:solidFill>
+                <a:latin typeface="Georgia" pitchFamily="34" charset="0"/>
+                <a:ea typeface="Georgia" pitchFamily="34" charset="-122"/>
+                <a:cs typeface="Georgia" pitchFamily="34" charset="-120"/>
+              </a:rPr>
+              <a:t> rows, each of which sums to </a:t>
+            </a:r>
+            <a:pPr algn="l" indent="0" marL="0">
+              <a:lnSpc>
+                <a:spcPts val="1820"/>
+              </a:lnSpc>
+              <a:spcBef>
+                <a:spcPts val="300"/>
+              </a:spcBef>
+              <a:spcAft>
+                <a:spcPts val="300"/>
+              </a:spcAft>
+              <a:buNone/>
+            </a:pPr>
+            <a:r>
+              <a:rPr lang="en-US" sz="1300" i="1" dirty="0">
+                <a:solidFill>
+                  <a:srgbClr val="1C2833"/>
+                </a:solidFill>
+                <a:latin typeface="Georgia" pitchFamily="34" charset="0"/>
+                <a:ea typeface="Georgia" pitchFamily="34" charset="-122"/>
+                <a:cs typeface="Georgia" pitchFamily="34" charset="-120"/>
+              </a:rPr>
+              <a:t>S</a:t>
+            </a:r>
+            <a:pPr algn="l" indent="0" marL="0">
+              <a:lnSpc>
+                <a:spcPts val="1820"/>
+              </a:lnSpc>
+              <a:spcBef>
+                <a:spcPts val="300"/>
+              </a:spcBef>
+              <a:spcAft>
+                <a:spcPts val="300"/>
+              </a:spcAft>
+              <a:buNone/>
+            </a:pPr>
+            <a:r>
+              <a:rPr lang="en-US" sz="1300" dirty="0">
+                <a:solidFill>
+                  <a:srgbClr val="1C2833"/>
+                </a:solidFill>
+                <a:latin typeface="Georgia" pitchFamily="34" charset="0"/>
+                <a:ea typeface="Georgia" pitchFamily="34" charset="-122"/>
+                <a:cs typeface="Georgia" pitchFamily="34" charset="-120"/>
+              </a:rPr>
+              <a:t>. So </a:t>
+            </a:r>
+            <a:pPr algn="l" indent="0" marL="0">
+              <a:lnSpc>
+                <a:spcPts val="1820"/>
+              </a:lnSpc>
+              <a:spcBef>
+                <a:spcPts val="300"/>
+              </a:spcBef>
+              <a:spcAft>
+                <a:spcPts val="300"/>
+              </a:spcAft>
+              <a:buNone/>
+            </a:pPr>
+            <a:r>
+              <a:rPr lang="en-US" sz="1300" i="1" dirty="0">
+                <a:solidFill>
+                  <a:srgbClr val="1C2833"/>
+                </a:solidFill>
+                <a:latin typeface="Georgia" pitchFamily="34" charset="0"/>
+                <a:ea typeface="Georgia" pitchFamily="34" charset="-122"/>
+                <a:cs typeface="Georgia" pitchFamily="34" charset="-120"/>
+              </a:rPr>
+              <a:t>n × S</a:t>
+            </a:r>
+            <a:pPr algn="l" indent="0" marL="0">
+              <a:lnSpc>
+                <a:spcPts val="1820"/>
+              </a:lnSpc>
+              <a:spcBef>
+                <a:spcPts val="300"/>
+              </a:spcBef>
+              <a:spcAft>
+                <a:spcPts val="300"/>
+              </a:spcAft>
+              <a:buNone/>
+            </a:pPr>
+            <a:r>
+              <a:rPr lang="en-US" sz="1300" dirty="0">
+                <a:solidFill>
+                  <a:srgbClr val="1C2833"/>
+                </a:solidFill>
+                <a:latin typeface="Georgia" pitchFamily="34" charset="0"/>
+                <a:ea typeface="Georgia" pitchFamily="34" charset="-122"/>
+                <a:cs typeface="Georgia" pitchFamily="34" charset="-120"/>
+              </a:rPr>
+              <a:t> = </a:t>
+            </a:r>
+            <a:pPr algn="l" indent="0" marL="0">
+              <a:lnSpc>
+                <a:spcPts val="1820"/>
+              </a:lnSpc>
+              <a:spcBef>
+                <a:spcPts val="300"/>
+              </a:spcBef>
+              <a:spcAft>
+                <a:spcPts val="300"/>
+              </a:spcAft>
+              <a:buNone/>
+            </a:pPr>
+            <a:r>
+              <a:rPr lang="en-US" sz="1300" i="1" dirty="0">
+                <a:solidFill>
+                  <a:srgbClr val="1C2833"/>
+                </a:solidFill>
+                <a:latin typeface="Georgia" pitchFamily="34" charset="0"/>
+                <a:ea typeface="Georgia" pitchFamily="34" charset="-122"/>
+                <a:cs typeface="Georgia" pitchFamily="34" charset="-120"/>
+              </a:rPr>
+              <a:t>n</a:t>
+            </a:r>
+            <a:pPr algn="l" indent="0" marL="0">
+              <a:lnSpc>
+                <a:spcPts val="1820"/>
+              </a:lnSpc>
+              <a:spcBef>
+                <a:spcPts val="300"/>
+              </a:spcBef>
+              <a:spcAft>
+                <a:spcPts val="300"/>
+              </a:spcAft>
+              <a:buNone/>
+            </a:pPr>
+            <a:r>
+              <a:rPr lang="en-US" sz="1300" dirty="0">
+                <a:solidFill>
+                  <a:srgbClr val="1C2833"/>
+                </a:solidFill>
+                <a:latin typeface="Georgia" pitchFamily="34" charset="0"/>
+                <a:ea typeface="Georgia" pitchFamily="34" charset="-122"/>
+                <a:cs typeface="Georgia" pitchFamily="34" charset="-120"/>
+              </a:rPr>
+              <a:t>²(</a:t>
+            </a:r>
+            <a:pPr algn="l" indent="0" marL="0">
+              <a:lnSpc>
+                <a:spcPts val="1820"/>
+              </a:lnSpc>
+              <a:spcBef>
+                <a:spcPts val="300"/>
+              </a:spcBef>
+              <a:spcAft>
+                <a:spcPts val="300"/>
+              </a:spcAft>
+              <a:buNone/>
+            </a:pPr>
+            <a:r>
+              <a:rPr lang="en-US" sz="1300" i="1" dirty="0">
+                <a:solidFill>
+                  <a:srgbClr val="1C2833"/>
+                </a:solidFill>
+                <a:latin typeface="Georgia" pitchFamily="34" charset="0"/>
+                <a:ea typeface="Georgia" pitchFamily="34" charset="-122"/>
+                <a:cs typeface="Georgia" pitchFamily="34" charset="-120"/>
+              </a:rPr>
+              <a:t>n</a:t>
+            </a:r>
+            <a:pPr algn="l" indent="0" marL="0">
+              <a:lnSpc>
+                <a:spcPts val="1820"/>
+              </a:lnSpc>
+              <a:spcBef>
+                <a:spcPts val="300"/>
+              </a:spcBef>
+              <a:spcAft>
+                <a:spcPts val="300"/>
+              </a:spcAft>
+              <a:buNone/>
+            </a:pPr>
+            <a:r>
+              <a:rPr lang="en-US" sz="1300" dirty="0">
+                <a:solidFill>
+                  <a:srgbClr val="1C2833"/>
+                </a:solidFill>
+                <a:latin typeface="Georgia" pitchFamily="34" charset="0"/>
+                <a:ea typeface="Georgia" pitchFamily="34" charset="-122"/>
+                <a:cs typeface="Georgia" pitchFamily="34" charset="-120"/>
+              </a:rPr>
+              <a:t>² + 1) / 2 → divide both sides by </a:t>
+            </a:r>
+            <a:pPr algn="l" indent="0" marL="0">
+              <a:lnSpc>
+                <a:spcPts val="1820"/>
+              </a:lnSpc>
+              <a:spcBef>
+                <a:spcPts val="300"/>
+              </a:spcBef>
+              <a:spcAft>
+                <a:spcPts val="300"/>
+              </a:spcAft>
+              <a:buNone/>
+            </a:pPr>
+            <a:r>
+              <a:rPr lang="en-US" sz="1300" i="1" dirty="0">
+                <a:solidFill>
+                  <a:srgbClr val="1C2833"/>
+                </a:solidFill>
+                <a:latin typeface="Georgia" pitchFamily="34" charset="0"/>
+                <a:ea typeface="Georgia" pitchFamily="34" charset="-122"/>
+                <a:cs typeface="Georgia" pitchFamily="34" charset="-120"/>
+              </a:rPr>
+              <a:t>n</a:t>
+            </a:r>
+            <a:pPr algn="l" indent="0" marL="0">
+              <a:lnSpc>
+                <a:spcPts val="1820"/>
+              </a:lnSpc>
+              <a:spcBef>
+                <a:spcPts val="300"/>
+              </a:spcBef>
+              <a:spcAft>
+                <a:spcPts val="300"/>
+              </a:spcAft>
+              <a:buNone/>
+            </a:pPr>
+            <a:r>
+              <a:rPr lang="en-US" sz="1300" dirty="0">
+                <a:solidFill>
+                  <a:srgbClr val="1C2833"/>
+                </a:solidFill>
+                <a:latin typeface="Georgia" pitchFamily="34" charset="0"/>
+                <a:ea typeface="Georgia" pitchFamily="34" charset="-122"/>
+                <a:cs typeface="Georgia" pitchFamily="34" charset="-120"/>
+              </a:rPr>
+              <a:t>.</a:t>
+            </a:r>
+            <a:endParaRPr lang="en-US" sz="1300" dirty="0"/>
+          </a:p>
+        </p:txBody>
+      </p:sp>
+      <p:sp>
+        <p:nvSpPr>
+          <p:cNvPr id="10" name="Text 8"/>
+          <p:cNvSpPr/>
+          <p:nvPr/>
+        </p:nvSpPr>
+        <p:spPr>
+          <a:xfrm>
+            <a:off x="692051" y="2381399"/>
+            <a:ext cx="7973389" cy="230981"/>
+          </a:xfrm>
+          <a:prstGeom prst="rect">
+            <a:avLst/>
+          </a:prstGeom>
+          <a:noFill/>
+          <a:ln/>
+        </p:spPr>
+        <p:txBody>
+          <a:bodyPr wrap="square" lIns="0" tIns="0" rIns="0" bIns="0" rtlCol="0" anchor="t"/>
+          <a:lstStyle/>
+          <a:p>
+            <a:pPr algn="l" indent="0" marL="0">
+              <a:lnSpc>
+                <a:spcPts val="1820"/>
+              </a:lnSpc>
+              <a:spcBef>
+                <a:spcPts val="300"/>
+              </a:spcBef>
+              <a:spcAft>
+                <a:spcPts val="300"/>
+              </a:spcAft>
+              <a:buNone/>
+            </a:pPr>
+            <a:r>
+              <a:rPr lang="en-US" sz="1300" dirty="0">
+                <a:solidFill>
+                  <a:srgbClr val="1C2833"/>
+                </a:solidFill>
+                <a:latin typeface="Georgia" pitchFamily="34" charset="0"/>
+                <a:ea typeface="Georgia" pitchFamily="34" charset="-122"/>
+                <a:cs typeface="Georgia" pitchFamily="34" charset="-120"/>
+              </a:rPr>
+              <a:t>| </a:t>
+            </a:r>
+            <a:pPr algn="l" indent="0" marL="0">
+              <a:lnSpc>
+                <a:spcPts val="1820"/>
+              </a:lnSpc>
+              <a:spcBef>
+                <a:spcPts val="300"/>
+              </a:spcBef>
+              <a:spcAft>
+                <a:spcPts val="300"/>
+              </a:spcAft>
+              <a:buNone/>
+            </a:pPr>
+            <a:r>
+              <a:rPr lang="en-US" sz="1300" i="1" dirty="0">
+                <a:solidFill>
+                  <a:srgbClr val="1C2833"/>
+                </a:solidFill>
+                <a:latin typeface="Georgia" pitchFamily="34" charset="0"/>
+                <a:ea typeface="Georgia" pitchFamily="34" charset="-122"/>
+                <a:cs typeface="Georgia" pitchFamily="34" charset="-120"/>
+              </a:rPr>
+              <a:t>n</a:t>
+            </a:r>
+            <a:pPr algn="l" indent="0" marL="0">
+              <a:lnSpc>
+                <a:spcPts val="1820"/>
+              </a:lnSpc>
+              <a:spcBef>
+                <a:spcPts val="300"/>
+              </a:spcBef>
+              <a:spcAft>
+                <a:spcPts val="300"/>
+              </a:spcAft>
+              <a:buNone/>
+            </a:pPr>
+            <a:r>
+              <a:rPr lang="en-US" sz="1300" dirty="0">
+                <a:solidFill>
+                  <a:srgbClr val="1C2833"/>
+                </a:solidFill>
+                <a:latin typeface="Georgia" pitchFamily="34" charset="0"/>
+                <a:ea typeface="Georgia" pitchFamily="34" charset="-122"/>
+                <a:cs typeface="Georgia" pitchFamily="34" charset="-120"/>
+              </a:rPr>
+              <a:t> | Constant | |-----|----------| | 3 | 15 | | 4 | 34 | | 5 | 65 | | 6 | 111 | | 7 | 175 |</a:t>
+            </a:r>
+            <a:endParaRPr lang="en-US" sz="1300" dirty="0"/>
+          </a:p>
+        </p:txBody>
+      </p:sp>
+      <p:sp>
+        <p:nvSpPr>
+          <p:cNvPr id="11" name="Text 9"/>
+          <p:cNvSpPr/>
+          <p:nvPr/>
+        </p:nvSpPr>
+        <p:spPr>
+          <a:xfrm>
+            <a:off x="692051" y="2650480"/>
+            <a:ext cx="7973389" cy="230981"/>
+          </a:xfrm>
+          <a:prstGeom prst="rect">
+            <a:avLst/>
+          </a:prstGeom>
+          <a:noFill/>
+          <a:ln/>
+        </p:spPr>
+        <p:txBody>
+          <a:bodyPr wrap="square" lIns="0" tIns="0" rIns="0" bIns="0" rtlCol="0" anchor="t"/>
+          <a:lstStyle/>
+          <a:p>
+            <a:pPr algn="l" indent="0" marL="0">
+              <a:lnSpc>
+                <a:spcPts val="1820"/>
+              </a:lnSpc>
+              <a:spcBef>
+                <a:spcPts val="300"/>
+              </a:spcBef>
+              <a:spcAft>
+                <a:spcPts val="300"/>
+              </a:spcAft>
+              <a:buNone/>
+            </a:pPr>
+            <a:r>
+              <a:rPr lang="en-US" sz="1300" dirty="0">
+                <a:solidFill>
+                  <a:srgbClr val="1C2833"/>
+                </a:solidFill>
+                <a:latin typeface="Georgia" pitchFamily="34" charset="0"/>
+                <a:ea typeface="Georgia" pitchFamily="34" charset="-122"/>
+                <a:cs typeface="Georgia" pitchFamily="34" charset="-120"/>
+              </a:rPr>
+              <a:t>Nārāyaṇa Paṇḍita stated this rule in </a:t>
+            </a:r>
+            <a:pPr algn="l" indent="0" marL="0">
+              <a:lnSpc>
+                <a:spcPts val="1820"/>
+              </a:lnSpc>
+              <a:spcBef>
+                <a:spcPts val="300"/>
+              </a:spcBef>
+              <a:spcAft>
+                <a:spcPts val="300"/>
+              </a:spcAft>
+              <a:buNone/>
+            </a:pPr>
+            <a:r>
+              <a:rPr lang="en-US" sz="1300" i="1" dirty="0">
+                <a:solidFill>
+                  <a:srgbClr val="1C2833"/>
+                </a:solidFill>
+                <a:latin typeface="Georgia" pitchFamily="34" charset="0"/>
+                <a:ea typeface="Georgia" pitchFamily="34" charset="-122"/>
+                <a:cs typeface="Georgia" pitchFamily="34" charset="-120"/>
+              </a:rPr>
+              <a:t>Bhadragaṇita</a:t>
+            </a:r>
+            <a:pPr algn="l" indent="0" marL="0">
+              <a:lnSpc>
+                <a:spcPts val="1820"/>
+              </a:lnSpc>
+              <a:spcBef>
+                <a:spcPts val="300"/>
+              </a:spcBef>
+              <a:spcAft>
+                <a:spcPts val="300"/>
+              </a:spcAft>
+              <a:buNone/>
+            </a:pPr>
+            <a:r>
+              <a:rPr lang="en-US" sz="1300" dirty="0">
+                <a:solidFill>
+                  <a:srgbClr val="1C2833"/>
+                </a:solidFill>
+                <a:latin typeface="Georgia" pitchFamily="34" charset="0"/>
+                <a:ea typeface="Georgia" pitchFamily="34" charset="-122"/>
+                <a:cs typeface="Georgia" pitchFamily="34" charset="-120"/>
+              </a:rPr>
+              <a:t> (1356 CE).</a:t>
+            </a:r>
+            <a:endParaRPr lang="en-US" sz="1300" dirty="0"/>
+          </a:p>
+        </p:txBody>
+      </p:sp>
+      <p:sp>
+        <p:nvSpPr>
+          <p:cNvPr id="12" name="Text 10"/>
+          <p:cNvSpPr/>
+          <p:nvPr/>
+        </p:nvSpPr>
+        <p:spPr>
+          <a:xfrm>
+            <a:off x="406301" y="4434929"/>
+            <a:ext cx="8498026" cy="213271"/>
+          </a:xfrm>
+          <a:prstGeom prst="rect">
+            <a:avLst/>
+          </a:prstGeom>
+          <a:noFill/>
+          <a:ln/>
+        </p:spPr>
+        <p:txBody>
+          <a:bodyPr wrap="square" lIns="0" tIns="0" rIns="0" bIns="0" rtlCol="0" anchor="t"/>
+          <a:lstStyle/>
+          <a:p>
             <a:pPr algn="l" indent="0" marL="0">
               <a:lnSpc>
                 <a:spcPts val="1680"/>
@@ -3964,6 +5399,182 @@
               <a:buNone/>
             </a:pPr>
             <a:r>
+              <a:rPr lang="en-US" sz="1200" dirty="0">
+                <a:solidFill>
+                  <a:srgbClr val="1C2833"/>
+                </a:solidFill>
+                <a:latin typeface="Arial" pitchFamily="34" charset="0"/>
+                <a:ea typeface="Arial" pitchFamily="34" charset="-122"/>
+                <a:cs typeface="Arial" pitchFamily="34" charset="-120"/>
+              </a:rPr>
+              <a:t>Middle ·  · IKS Curriculum</a:t>
+            </a:r>
+            <a:endParaRPr lang="en-US" sz="1200" dirty="0"/>
+          </a:p>
+        </p:txBody>
+      </p:sp>
+    </p:spTree>
+  </p:cSld>
+  <p:clrMapOvr>
+    <a:masterClrMapping/>
+  </p:clrMapOvr>
+</p:sld>
+</file>
+
+<file path=ppt/slides/slide15.xml><?xml version="1.0" encoding="utf-8"?>
+<p:sld xmlns:a="http://schemas.openxmlformats.org/drawingml/2006/main" xmlns:r="http://schemas.openxmlformats.org/officeDocument/2006/relationships" xmlns:p="http://schemas.openxmlformats.org/presentationml/2006/main">
+  <p:cSld name="Slide 15">
+    <p:bg>
+      <p:bgPr>
+        <a:solidFill>
+          <a:srgbClr val="FFFFFF"/>
+        </a:solidFill>
+      </p:bgPr>
+    </p:bg>
+    <p:spTree>
+      <p:nvGrpSpPr>
+        <p:cNvPr id="1" name=""/>
+        <p:cNvGrpSpPr/>
+        <p:nvPr/>
+      </p:nvGrpSpPr>
+      <p:grpSpPr>
+        <a:xfrm>
+          <a:off x="0" y="0"/>
+          <a:ext cx="0" cy="0"/>
+          <a:chOff x="0" y="0"/>
+          <a:chExt cx="0" cy="0"/>
+        </a:xfrm>
+      </p:grpSpPr>
+      <p:sp>
+        <p:nvSpPr>
+          <p:cNvPr id="2" name="Text 0"/>
+          <p:cNvSpPr/>
+          <p:nvPr/>
+        </p:nvSpPr>
+        <p:spPr>
+          <a:xfrm>
+            <a:off x="0" y="0"/>
+            <a:ext cx="9144000" cy="101501"/>
+          </a:xfrm>
+          <a:prstGeom prst="rect">
+            <a:avLst/>
+          </a:prstGeom>
+          <a:solidFill>
+            <a:srgbClr val="277884"/>
+          </a:solidFill>
+          <a:ln/>
+        </p:spPr>
+        <p:txBody>
+          <a:bodyPr wrap="square" rtlCol="0" anchor="ctr"/>
+          <a:lstStyle/>
+          <a:p>
+            <a:pPr indent="0" marL="0">
+              <a:buNone/>
+            </a:pPr>
+            <a:endParaRPr lang="en-US" dirty="0"/>
+          </a:p>
+        </p:txBody>
+      </p:sp>
+      <p:sp>
+        <p:nvSpPr>
+          <p:cNvPr id="3" name="Text 1"/>
+          <p:cNvSpPr/>
+          <p:nvPr/>
+        </p:nvSpPr>
+        <p:spPr>
+          <a:xfrm>
+            <a:off x="406301" y="457051"/>
+            <a:ext cx="8498026" cy="274290"/>
+          </a:xfrm>
+          <a:prstGeom prst="rect">
+            <a:avLst/>
+          </a:prstGeom>
+          <a:noFill/>
+          <a:ln/>
+        </p:spPr>
+        <p:txBody>
+          <a:bodyPr wrap="square" lIns="0" tIns="0" rIns="0" bIns="0" rtlCol="0" anchor="t"/>
+          <a:lstStyle/>
+          <a:p>
+            <a:pPr algn="l" indent="0" marL="0">
+              <a:lnSpc>
+                <a:spcPts val="2160"/>
+              </a:lnSpc>
+              <a:spcBef>
+                <a:spcPts val="600"/>
+              </a:spcBef>
+              <a:spcAft>
+                <a:spcPts val="800"/>
+              </a:spcAft>
+              <a:buNone/>
+            </a:pPr>
+            <a:r>
+              <a:rPr lang="en-US" sz="1800" b="1" dirty="0">
+                <a:solidFill>
+                  <a:srgbClr val="FE4447"/>
+                </a:solidFill>
+                <a:latin typeface="Georgia" pitchFamily="34" charset="0"/>
+                <a:ea typeface="Georgia" pitchFamily="34" charset="-122"/>
+                <a:cs typeface="Georgia" pitchFamily="34" charset="-120"/>
+              </a:rPr>
+              <a:t>Homework</a:t>
+            </a:r>
+            <a:endParaRPr lang="en-US" sz="1800" dirty="0"/>
+          </a:p>
+        </p:txBody>
+      </p:sp>
+      <p:sp>
+        <p:nvSpPr>
+          <p:cNvPr id="4" name="Text 2"/>
+          <p:cNvSpPr/>
+          <p:nvPr/>
+        </p:nvSpPr>
+        <p:spPr>
+          <a:xfrm>
+            <a:off x="634901" y="883593"/>
+            <a:ext cx="8102798" cy="525661"/>
+          </a:xfrm>
+          <a:prstGeom prst="rect">
+            <a:avLst/>
+          </a:prstGeom>
+          <a:noFill/>
+          <a:ln/>
+        </p:spPr>
+        <p:txBody>
+          <a:bodyPr wrap="square" lIns="0" tIns="0" rIns="0" bIns="0" rtlCol="0" anchor="t"/>
+          <a:lstStyle/>
+          <a:p>
+            <a:pPr algn="l" marL="342900" indent="-342900">
+              <a:lnSpc>
+                <a:spcPts val="1620"/>
+              </a:lnSpc>
+              <a:spcAft>
+                <a:spcPts val="300"/>
+              </a:spcAft>
+              <a:buSzPct val="100000"/>
+              <a:buChar char="•"/>
+            </a:pPr>
+            <a:r>
+              <a:rPr lang="en-US" sz="1200" dirty="0">
+                <a:solidFill>
+                  <a:srgbClr val="1C2833"/>
+                </a:solidFill>
+                <a:latin typeface="Arial" pitchFamily="34" charset="0"/>
+                <a:ea typeface="Arial" pitchFamily="34" charset="-122"/>
+                <a:cs typeface="Arial" pitchFamily="34" charset="-120"/>
+              </a:rPr>
+              <a:t>Verify the formula for </a:t>
+            </a:r>
+            <a:pPr algn="l" indent="0" marL="0">
+              <a:lnSpc>
+                <a:spcPts val="1620"/>
+              </a:lnSpc>
+              <a:spcAft>
+                <a:spcPts val="300"/>
+              </a:spcAft>
+              <a:buNone/>
+            </a:pPr>
+            <a:r>
               <a:rPr lang="en-US" sz="1200" i="1" dirty="0">
                 <a:solidFill>
                   <a:srgbClr val="1C2833"/>
@@ -3972,15 +5583,1360 @@
                 <a:ea typeface="Arial" pitchFamily="34" charset="-122"/>
                 <a:cs typeface="Arial" pitchFamily="34" charset="-120"/>
               </a:rPr>
+              <a:t>n</a:t>
+            </a:r>
+            <a:pPr algn="l" indent="0" marL="0">
+              <a:lnSpc>
+                <a:spcPts val="1620"/>
+              </a:lnSpc>
+              <a:spcAft>
+                <a:spcPts val="300"/>
+              </a:spcAft>
+              <a:buNone/>
+            </a:pPr>
+            <a:r>
+              <a:rPr lang="en-US" sz="1200" dirty="0">
+                <a:solidFill>
+                  <a:srgbClr val="1C2833"/>
+                </a:solidFill>
+                <a:latin typeface="Arial" pitchFamily="34" charset="0"/>
+                <a:ea typeface="Arial" pitchFamily="34" charset="-122"/>
+                <a:cs typeface="Arial" pitchFamily="34" charset="-120"/>
+              </a:rPr>
+              <a:t> = 8 and </a:t>
+            </a:r>
+            <a:pPr algn="l" indent="0" marL="0">
+              <a:lnSpc>
+                <a:spcPts val="1620"/>
+              </a:lnSpc>
+              <a:spcAft>
+                <a:spcPts val="300"/>
+              </a:spcAft>
+              <a:buNone/>
+            </a:pPr>
+            <a:r>
+              <a:rPr lang="en-US" sz="1200" i="1" dirty="0">
+                <a:solidFill>
+                  <a:srgbClr val="1C2833"/>
+                </a:solidFill>
+                <a:latin typeface="Arial" pitchFamily="34" charset="0"/>
+                <a:ea typeface="Arial" pitchFamily="34" charset="-122"/>
+                <a:cs typeface="Arial" pitchFamily="34" charset="-120"/>
+              </a:rPr>
+              <a:t>n</a:t>
+            </a:r>
+            <a:pPr algn="l" indent="0" marL="0">
+              <a:lnSpc>
+                <a:spcPts val="1620"/>
+              </a:lnSpc>
+              <a:spcAft>
+                <a:spcPts val="300"/>
+              </a:spcAft>
+              <a:buNone/>
+            </a:pPr>
+            <a:r>
+              <a:rPr lang="en-US" sz="1200" dirty="0">
+                <a:solidFill>
+                  <a:srgbClr val="1C2833"/>
+                </a:solidFill>
+                <a:latin typeface="Arial" pitchFamily="34" charset="0"/>
+                <a:ea typeface="Arial" pitchFamily="34" charset="-122"/>
+                <a:cs typeface="Arial" pitchFamily="34" charset="-120"/>
+              </a:rPr>
+              <a:t> = 9. (Answers: 260 and 369.)</a:t>
+            </a:r>
+            <a:endParaRPr lang="en-US" sz="1200" dirty="0"/>
+          </a:p>
+          <a:p>
+            <a:pPr algn="l" marL="342900" indent="-342900">
+              <a:lnSpc>
+                <a:spcPts val="1620"/>
+              </a:lnSpc>
+              <a:spcAft>
+                <a:spcPts val="300"/>
+              </a:spcAft>
+              <a:buSzPct val="100000"/>
+              <a:buChar char="•"/>
+            </a:pPr>
+            <a:r>
+              <a:rPr lang="en-US" sz="1200" dirty="0">
+                <a:solidFill>
+                  <a:srgbClr val="1C2833"/>
+                </a:solidFill>
+                <a:latin typeface="Arial" pitchFamily="34" charset="0"/>
+                <a:ea typeface="Arial" pitchFamily="34" charset="-122"/>
+                <a:cs typeface="Arial" pitchFamily="34" charset="-120"/>
+              </a:rPr>
+              <a:t>For each, also compute the total sum </a:t>
+            </a:r>
+            <a:pPr algn="l" indent="0" marL="0">
+              <a:lnSpc>
+                <a:spcPts val="1620"/>
+              </a:lnSpc>
+              <a:spcAft>
+                <a:spcPts val="300"/>
+              </a:spcAft>
+              <a:buNone/>
+            </a:pPr>
+            <a:r>
+              <a:rPr lang="en-US" sz="1200" i="1" dirty="0">
+                <a:solidFill>
+                  <a:srgbClr val="1C2833"/>
+                </a:solidFill>
+                <a:latin typeface="Arial" pitchFamily="34" charset="0"/>
+                <a:ea typeface="Arial" pitchFamily="34" charset="-122"/>
+                <a:cs typeface="Arial" pitchFamily="34" charset="-120"/>
+              </a:rPr>
+              <a:t>n</a:t>
+            </a:r>
+            <a:pPr algn="l" indent="0" marL="0">
+              <a:lnSpc>
+                <a:spcPts val="1620"/>
+              </a:lnSpc>
+              <a:spcAft>
+                <a:spcPts val="300"/>
+              </a:spcAft>
+              <a:buNone/>
+            </a:pPr>
+            <a:r>
+              <a:rPr lang="en-US" sz="1200" dirty="0">
+                <a:solidFill>
+                  <a:srgbClr val="1C2833"/>
+                </a:solidFill>
+                <a:latin typeface="Arial" pitchFamily="34" charset="0"/>
+                <a:ea typeface="Arial" pitchFamily="34" charset="-122"/>
+                <a:cs typeface="Arial" pitchFamily="34" charset="-120"/>
+              </a:rPr>
+              <a:t>²(</a:t>
+            </a:r>
+            <a:pPr algn="l" indent="0" marL="0">
+              <a:lnSpc>
+                <a:spcPts val="1620"/>
+              </a:lnSpc>
+              <a:spcAft>
+                <a:spcPts val="300"/>
+              </a:spcAft>
+              <a:buNone/>
+            </a:pPr>
+            <a:r>
+              <a:rPr lang="en-US" sz="1200" i="1" dirty="0">
+                <a:solidFill>
+                  <a:srgbClr val="1C2833"/>
+                </a:solidFill>
+                <a:latin typeface="Arial" pitchFamily="34" charset="0"/>
+                <a:ea typeface="Arial" pitchFamily="34" charset="-122"/>
+                <a:cs typeface="Arial" pitchFamily="34" charset="-120"/>
+              </a:rPr>
+              <a:t>n</a:t>
+            </a:r>
+            <a:pPr algn="l" indent="0" marL="0">
+              <a:lnSpc>
+                <a:spcPts val="1620"/>
+              </a:lnSpc>
+              <a:spcAft>
+                <a:spcPts val="300"/>
+              </a:spcAft>
+              <a:buNone/>
+            </a:pPr>
+            <a:r>
+              <a:rPr lang="en-US" sz="1200" dirty="0">
+                <a:solidFill>
+                  <a:srgbClr val="1C2833"/>
+                </a:solidFill>
+                <a:latin typeface="Arial" pitchFamily="34" charset="0"/>
+                <a:ea typeface="Arial" pitchFamily="34" charset="-122"/>
+                <a:cs typeface="Arial" pitchFamily="34" charset="-120"/>
+              </a:rPr>
+              <a:t>² + 1)/2 directly and confirm it equals </a:t>
+            </a:r>
+            <a:pPr algn="l" indent="0" marL="0">
+              <a:lnSpc>
+                <a:spcPts val="1620"/>
+              </a:lnSpc>
+              <a:spcAft>
+                <a:spcPts val="300"/>
+              </a:spcAft>
+              <a:buNone/>
+            </a:pPr>
+            <a:r>
+              <a:rPr lang="en-US" sz="1200" i="1" dirty="0">
+                <a:solidFill>
+                  <a:srgbClr val="1C2833"/>
+                </a:solidFill>
+                <a:latin typeface="Arial" pitchFamily="34" charset="0"/>
+                <a:ea typeface="Arial" pitchFamily="34" charset="-122"/>
+                <a:cs typeface="Arial" pitchFamily="34" charset="-120"/>
+              </a:rPr>
+              <a:t>n × S</a:t>
+            </a:r>
+            <a:pPr algn="l" indent="0" marL="0">
+              <a:lnSpc>
+                <a:spcPts val="1620"/>
+              </a:lnSpc>
+              <a:spcAft>
+                <a:spcPts val="300"/>
+              </a:spcAft>
+              <a:buNone/>
+            </a:pPr>
+            <a:r>
+              <a:rPr lang="en-US" sz="1200" dirty="0">
+                <a:solidFill>
+                  <a:srgbClr val="1C2833"/>
+                </a:solidFill>
+                <a:latin typeface="Arial" pitchFamily="34" charset="0"/>
+                <a:ea typeface="Arial" pitchFamily="34" charset="-122"/>
+                <a:cs typeface="Arial" pitchFamily="34" charset="-120"/>
+              </a:rPr>
+              <a:t>.</a:t>
+            </a:r>
+            <a:endParaRPr lang="en-US" sz="1200" dirty="0"/>
+          </a:p>
+        </p:txBody>
+      </p:sp>
+      <p:sp>
+        <p:nvSpPr>
+          <p:cNvPr id="5" name="Text 3"/>
+          <p:cNvSpPr/>
+          <p:nvPr/>
+        </p:nvSpPr>
+        <p:spPr>
+          <a:xfrm>
+            <a:off x="406301" y="4434929"/>
+            <a:ext cx="8498026" cy="213271"/>
+          </a:xfrm>
+          <a:prstGeom prst="rect">
+            <a:avLst/>
+          </a:prstGeom>
+          <a:noFill/>
+          <a:ln/>
+        </p:spPr>
+        <p:txBody>
+          <a:bodyPr wrap="square" lIns="0" tIns="0" rIns="0" bIns="0" rtlCol="0" anchor="t"/>
+          <a:lstStyle/>
+          <a:p>
+            <a:pPr algn="l" indent="0" marL="0">
+              <a:lnSpc>
+                <a:spcPts val="1680"/>
+              </a:lnSpc>
+              <a:spcBef>
+                <a:spcPts val="300"/>
+              </a:spcBef>
+              <a:spcAft>
+                <a:spcPts val="300"/>
+              </a:spcAft>
+              <a:buNone/>
+            </a:pPr>
+            <a:r>
+              <a:rPr lang="en-US" sz="1200" dirty="0">
+                <a:solidFill>
+                  <a:srgbClr val="1C2833"/>
+                </a:solidFill>
+                <a:latin typeface="Arial" pitchFamily="34" charset="0"/>
+                <a:ea typeface="Arial" pitchFamily="34" charset="-122"/>
+                <a:cs typeface="Arial" pitchFamily="34" charset="-120"/>
+              </a:rPr>
+              <a:t>Middle ·  · IKS Curriculum</a:t>
+            </a:r>
+            <a:endParaRPr lang="en-US" sz="1200" dirty="0"/>
+          </a:p>
+        </p:txBody>
+      </p:sp>
+    </p:spTree>
+  </p:cSld>
+  <p:clrMapOvr>
+    <a:masterClrMapping/>
+  </p:clrMapOvr>
+</p:sld>
+</file>
+
+<file path=ppt/slides/slide16.xml><?xml version="1.0" encoding="utf-8"?>
+<p:sld xmlns:a="http://schemas.openxmlformats.org/drawingml/2006/main" xmlns:r="http://schemas.openxmlformats.org/officeDocument/2006/relationships" xmlns:p="http://schemas.openxmlformats.org/presentationml/2006/main">
+  <p:cSld name="Slide 16">
+    <p:bg>
+      <p:bgPr>
+        <a:solidFill>
+          <a:srgbClr val="FFFFFF"/>
+        </a:solidFill>
+      </p:bgPr>
+    </p:bg>
+    <p:spTree>
+      <p:nvGrpSpPr>
+        <p:cNvPr id="1" name=""/>
+        <p:cNvGrpSpPr/>
+        <p:nvPr/>
+      </p:nvGrpSpPr>
+      <p:grpSpPr>
+        <a:xfrm>
+          <a:off x="0" y="0"/>
+          <a:ext cx="0" cy="0"/>
+          <a:chOff x="0" y="0"/>
+          <a:chExt cx="0" cy="0"/>
+        </a:xfrm>
+      </p:grpSpPr>
+      <p:sp>
+        <p:nvSpPr>
+          <p:cNvPr id="2" name="Text 0"/>
+          <p:cNvSpPr/>
+          <p:nvPr/>
+        </p:nvSpPr>
+        <p:spPr>
+          <a:xfrm>
+            <a:off x="0" y="0"/>
+            <a:ext cx="9144000" cy="101501"/>
+          </a:xfrm>
+          <a:prstGeom prst="rect">
+            <a:avLst/>
+          </a:prstGeom>
+          <a:solidFill>
+            <a:srgbClr val="277884"/>
+          </a:solidFill>
+          <a:ln/>
+        </p:spPr>
+        <p:txBody>
+          <a:bodyPr wrap="square" rtlCol="0" anchor="ctr"/>
+          <a:lstStyle/>
+          <a:p>
+            <a:pPr indent="0" marL="0">
+              <a:buNone/>
+            </a:pPr>
+            <a:endParaRPr lang="en-US" dirty="0"/>
+          </a:p>
+        </p:txBody>
+      </p:sp>
+      <p:sp>
+        <p:nvSpPr>
+          <p:cNvPr id="3" name="Text 1"/>
+          <p:cNvSpPr/>
+          <p:nvPr/>
+        </p:nvSpPr>
+        <p:spPr>
+          <a:xfrm>
+            <a:off x="406301" y="457051"/>
+            <a:ext cx="8498026" cy="274290"/>
+          </a:xfrm>
+          <a:prstGeom prst="rect">
+            <a:avLst/>
+          </a:prstGeom>
+          <a:noFill/>
+          <a:ln/>
+        </p:spPr>
+        <p:txBody>
+          <a:bodyPr wrap="square" lIns="0" tIns="0" rIns="0" bIns="0" rtlCol="0" anchor="t"/>
+          <a:lstStyle/>
+          <a:p>
+            <a:pPr algn="l" indent="0" marL="0">
+              <a:lnSpc>
+                <a:spcPts val="2160"/>
+              </a:lnSpc>
+              <a:spcBef>
+                <a:spcPts val="600"/>
+              </a:spcBef>
+              <a:spcAft>
+                <a:spcPts val="800"/>
+              </a:spcAft>
+              <a:buNone/>
+            </a:pPr>
+            <a:r>
+              <a:rPr lang="en-US" sz="1800" b="1" dirty="0">
+                <a:solidFill>
+                  <a:srgbClr val="FE4447"/>
+                </a:solidFill>
+                <a:latin typeface="Georgia" pitchFamily="34" charset="0"/>
+                <a:ea typeface="Georgia" pitchFamily="34" charset="-122"/>
+                <a:cs typeface="Georgia" pitchFamily="34" charset="-120"/>
+              </a:rPr>
+              <a:t>Differentiation</a:t>
+            </a:r>
+            <a:endParaRPr lang="en-US" sz="1800" dirty="0"/>
+          </a:p>
+        </p:txBody>
+      </p:sp>
+      <p:sp>
+        <p:nvSpPr>
+          <p:cNvPr id="4" name="Text 2"/>
+          <p:cNvSpPr/>
+          <p:nvPr/>
+        </p:nvSpPr>
+        <p:spPr>
+          <a:xfrm>
+            <a:off x="634901" y="883593"/>
+            <a:ext cx="8102798" cy="937022"/>
+          </a:xfrm>
+          <a:prstGeom prst="rect">
+            <a:avLst/>
+          </a:prstGeom>
+          <a:noFill/>
+          <a:ln/>
+        </p:spPr>
+        <p:txBody>
+          <a:bodyPr wrap="square" lIns="0" tIns="0" rIns="0" bIns="0" rtlCol="0" anchor="t"/>
+          <a:lstStyle/>
+          <a:p>
+            <a:pPr algn="l" marL="342900" indent="-342900">
+              <a:lnSpc>
+                <a:spcPts val="1620"/>
+              </a:lnSpc>
+              <a:spcAft>
+                <a:spcPts val="300"/>
+              </a:spcAft>
+              <a:buSzPct val="100000"/>
+              <a:buChar char="•"/>
+            </a:pPr>
+            <a:r>
+              <a:rPr lang="en-US" sz="1200" b="1" dirty="0">
+                <a:solidFill>
+                  <a:srgbClr val="1C2833"/>
+                </a:solidFill>
+                <a:latin typeface="Arial" pitchFamily="34" charset="0"/>
+                <a:ea typeface="Arial" pitchFamily="34" charset="-122"/>
+                <a:cs typeface="Arial" pitchFamily="34" charset="-120"/>
+              </a:rPr>
+              <a:t>One tier up:</a:t>
+            </a:r>
+            <a:pPr algn="l" indent="0" marL="0">
+              <a:lnSpc>
+                <a:spcPts val="1620"/>
+              </a:lnSpc>
+              <a:spcAft>
+                <a:spcPts val="300"/>
+              </a:spcAft>
+              <a:buNone/>
+            </a:pPr>
+            <a:r>
+              <a:rPr lang="en-US" sz="1200" dirty="0">
+                <a:solidFill>
+                  <a:srgbClr val="1C2833"/>
+                </a:solidFill>
+                <a:latin typeface="Arial" pitchFamily="34" charset="0"/>
+                <a:ea typeface="Arial" pitchFamily="34" charset="-122"/>
+                <a:cs typeface="Arial" pitchFamily="34" charset="-120"/>
+              </a:rPr>
+              <a:t> What if the magic square contains </a:t>
+            </a:r>
+            <a:pPr algn="l" indent="0" marL="0">
+              <a:lnSpc>
+                <a:spcPts val="1620"/>
+              </a:lnSpc>
+              <a:spcAft>
+                <a:spcPts val="300"/>
+              </a:spcAft>
+              <a:buNone/>
+            </a:pPr>
+            <a:r>
+              <a:rPr lang="en-US" sz="1200" i="1" dirty="0">
+                <a:solidFill>
+                  <a:srgbClr val="1C2833"/>
+                </a:solidFill>
+                <a:latin typeface="Arial" pitchFamily="34" charset="0"/>
+                <a:ea typeface="Arial" pitchFamily="34" charset="-122"/>
+                <a:cs typeface="Arial" pitchFamily="34" charset="-120"/>
+              </a:rPr>
+              <a:t>consecutive</a:t>
+            </a:r>
+            <a:pPr algn="l" indent="0" marL="0">
+              <a:lnSpc>
+                <a:spcPts val="1620"/>
+              </a:lnSpc>
+              <a:spcAft>
+                <a:spcPts val="300"/>
+              </a:spcAft>
+              <a:buNone/>
+            </a:pPr>
+            <a:r>
+              <a:rPr lang="en-US" sz="1200" dirty="0">
+                <a:solidFill>
+                  <a:srgbClr val="1C2833"/>
+                </a:solidFill>
+                <a:latin typeface="Arial" pitchFamily="34" charset="0"/>
+                <a:ea typeface="Arial" pitchFamily="34" charset="-122"/>
+                <a:cs typeface="Arial" pitchFamily="34" charset="-120"/>
+              </a:rPr>
+              <a:t> numbers but starting at </a:t>
+            </a:r>
+            <a:pPr algn="l" indent="0" marL="0">
+              <a:lnSpc>
+                <a:spcPts val="1620"/>
+              </a:lnSpc>
+              <a:spcAft>
+                <a:spcPts val="300"/>
+              </a:spcAft>
+              <a:buNone/>
+            </a:pPr>
+            <a:r>
+              <a:rPr lang="en-US" sz="1200" i="1" dirty="0">
+                <a:solidFill>
+                  <a:srgbClr val="1C2833"/>
+                </a:solidFill>
+                <a:latin typeface="Arial" pitchFamily="34" charset="0"/>
+                <a:ea typeface="Arial" pitchFamily="34" charset="-122"/>
+                <a:cs typeface="Arial" pitchFamily="34" charset="-120"/>
+              </a:rPr>
+              <a:t>k</a:t>
+            </a:r>
+            <a:pPr algn="l" indent="0" marL="0">
+              <a:lnSpc>
+                <a:spcPts val="1620"/>
+              </a:lnSpc>
+              <a:spcAft>
+                <a:spcPts val="300"/>
+              </a:spcAft>
+              <a:buNone/>
+            </a:pPr>
+            <a:r>
+              <a:rPr lang="en-US" sz="1200" dirty="0">
+                <a:solidFill>
+                  <a:srgbClr val="1C2833"/>
+                </a:solidFill>
+                <a:latin typeface="Arial" pitchFamily="34" charset="0"/>
+                <a:ea typeface="Arial" pitchFamily="34" charset="-122"/>
+                <a:cs typeface="Arial" pitchFamily="34" charset="-120"/>
+              </a:rPr>
+              <a:t>, not at 1? (E.g. a 3×3 with 5, 6, 7, ..., 13.) Derive a formula for the new magic constant. (Answer: </a:t>
+            </a:r>
+            <a:pPr algn="l" indent="0" marL="0">
+              <a:lnSpc>
+                <a:spcPts val="1620"/>
+              </a:lnSpc>
+              <a:spcAft>
+                <a:spcPts val="300"/>
+              </a:spcAft>
+              <a:buNone/>
+            </a:pPr>
+            <a:r>
+              <a:rPr lang="en-US" sz="1200" i="1" dirty="0">
+                <a:solidFill>
+                  <a:srgbClr val="1C2833"/>
+                </a:solidFill>
+                <a:latin typeface="Arial" pitchFamily="34" charset="0"/>
+                <a:ea typeface="Arial" pitchFamily="34" charset="-122"/>
+                <a:cs typeface="Arial" pitchFamily="34" charset="-120"/>
+              </a:rPr>
+              <a:t>S</a:t>
+            </a:r>
+            <a:pPr algn="l" indent="0" marL="0">
+              <a:lnSpc>
+                <a:spcPts val="1620"/>
+              </a:lnSpc>
+              <a:spcAft>
+                <a:spcPts val="300"/>
+              </a:spcAft>
+              <a:buNone/>
+            </a:pPr>
+            <a:r>
+              <a:rPr lang="en-US" sz="1200" dirty="0">
+                <a:solidFill>
+                  <a:srgbClr val="1C2833"/>
+                </a:solidFill>
+                <a:latin typeface="Arial" pitchFamily="34" charset="0"/>
+                <a:ea typeface="Arial" pitchFamily="34" charset="-122"/>
+                <a:cs typeface="Arial" pitchFamily="34" charset="-120"/>
+              </a:rPr>
+              <a:t> = </a:t>
+            </a:r>
+            <a:pPr algn="l" indent="0" marL="0">
+              <a:lnSpc>
+                <a:spcPts val="1620"/>
+              </a:lnSpc>
+              <a:spcAft>
+                <a:spcPts val="300"/>
+              </a:spcAft>
+              <a:buNone/>
+            </a:pPr>
+            <a:r>
+              <a:rPr lang="en-US" sz="1200" i="1" dirty="0">
+                <a:solidFill>
+                  <a:srgbClr val="1C2833"/>
+                </a:solidFill>
+                <a:latin typeface="Arial" pitchFamily="34" charset="0"/>
+                <a:ea typeface="Arial" pitchFamily="34" charset="-122"/>
+                <a:cs typeface="Arial" pitchFamily="34" charset="-120"/>
+              </a:rPr>
+              <a:t>n × k</a:t>
+            </a:r>
+            <a:pPr algn="l" indent="0" marL="0">
+              <a:lnSpc>
+                <a:spcPts val="1620"/>
+              </a:lnSpc>
+              <a:spcAft>
+                <a:spcPts val="300"/>
+              </a:spcAft>
+              <a:buNone/>
+            </a:pPr>
+            <a:r>
+              <a:rPr lang="en-US" sz="1200" dirty="0">
+                <a:solidFill>
+                  <a:srgbClr val="1C2833"/>
+                </a:solidFill>
+                <a:latin typeface="Arial" pitchFamily="34" charset="0"/>
+                <a:ea typeface="Arial" pitchFamily="34" charset="-122"/>
+                <a:cs typeface="Arial" pitchFamily="34" charset="-120"/>
+              </a:rPr>
+              <a:t> + </a:t>
+            </a:r>
+            <a:pPr algn="l" indent="0" marL="0">
+              <a:lnSpc>
+                <a:spcPts val="1620"/>
+              </a:lnSpc>
+              <a:spcAft>
+                <a:spcPts val="300"/>
+              </a:spcAft>
+              <a:buNone/>
+            </a:pPr>
+            <a:r>
+              <a:rPr lang="en-US" sz="1200" i="1" dirty="0">
+                <a:solidFill>
+                  <a:srgbClr val="1C2833"/>
+                </a:solidFill>
+                <a:latin typeface="Arial" pitchFamily="34" charset="0"/>
+                <a:ea typeface="Arial" pitchFamily="34" charset="-122"/>
+                <a:cs typeface="Arial" pitchFamily="34" charset="-120"/>
+              </a:rPr>
+              <a:t>n</a:t>
+            </a:r>
+            <a:pPr algn="l" indent="0" marL="0">
+              <a:lnSpc>
+                <a:spcPts val="1620"/>
+              </a:lnSpc>
+              <a:spcAft>
+                <a:spcPts val="300"/>
+              </a:spcAft>
+              <a:buNone/>
+            </a:pPr>
+            <a:r>
+              <a:rPr lang="en-US" sz="1200" dirty="0">
+                <a:solidFill>
+                  <a:srgbClr val="1C2833"/>
+                </a:solidFill>
+                <a:latin typeface="Arial" pitchFamily="34" charset="0"/>
+                <a:ea typeface="Arial" pitchFamily="34" charset="-122"/>
+                <a:cs typeface="Arial" pitchFamily="34" charset="-120"/>
+              </a:rPr>
+              <a:t>(</a:t>
+            </a:r>
+            <a:pPr algn="l" indent="0" marL="0">
+              <a:lnSpc>
+                <a:spcPts val="1620"/>
+              </a:lnSpc>
+              <a:spcAft>
+                <a:spcPts val="300"/>
+              </a:spcAft>
+              <a:buNone/>
+            </a:pPr>
+            <a:r>
+              <a:rPr lang="en-US" sz="1200" i="1" dirty="0">
+                <a:solidFill>
+                  <a:srgbClr val="1C2833"/>
+                </a:solidFill>
+                <a:latin typeface="Arial" pitchFamily="34" charset="0"/>
+                <a:ea typeface="Arial" pitchFamily="34" charset="-122"/>
+                <a:cs typeface="Arial" pitchFamily="34" charset="-120"/>
+              </a:rPr>
+              <a:t>n</a:t>
+            </a:r>
+            <a:pPr algn="l" indent="0" marL="0">
+              <a:lnSpc>
+                <a:spcPts val="1620"/>
+              </a:lnSpc>
+              <a:spcAft>
+                <a:spcPts val="300"/>
+              </a:spcAft>
+              <a:buNone/>
+            </a:pPr>
+            <a:r>
+              <a:rPr lang="en-US" sz="1200" dirty="0">
+                <a:solidFill>
+                  <a:srgbClr val="1C2833"/>
+                </a:solidFill>
+                <a:latin typeface="Arial" pitchFamily="34" charset="0"/>
+                <a:ea typeface="Arial" pitchFamily="34" charset="-122"/>
+                <a:cs typeface="Arial" pitchFamily="34" charset="-120"/>
+              </a:rPr>
+              <a:t>²−1)/2.)</a:t>
+            </a:r>
+            <a:endParaRPr lang="en-US" sz="1200" dirty="0"/>
+          </a:p>
+          <a:p>
+            <a:pPr algn="l" marL="342900" indent="-342900">
+              <a:lnSpc>
+                <a:spcPts val="1620"/>
+              </a:lnSpc>
+              <a:spcAft>
+                <a:spcPts val="300"/>
+              </a:spcAft>
+              <a:buSzPct val="100000"/>
+              <a:buChar char="•"/>
+            </a:pPr>
+            <a:r>
+              <a:rPr lang="en-US" sz="1200" b="1" dirty="0">
+                <a:solidFill>
+                  <a:srgbClr val="1C2833"/>
+                </a:solidFill>
+                <a:latin typeface="Arial" pitchFamily="34" charset="0"/>
+                <a:ea typeface="Arial" pitchFamily="34" charset="-122"/>
+                <a:cs typeface="Arial" pitchFamily="34" charset="-120"/>
+              </a:rPr>
+              <a:t>One tier down:</a:t>
+            </a:r>
+            <a:pPr algn="l" indent="0" marL="0">
+              <a:lnSpc>
+                <a:spcPts val="1620"/>
+              </a:lnSpc>
+              <a:spcAft>
+                <a:spcPts val="300"/>
+              </a:spcAft>
+              <a:buNone/>
+            </a:pPr>
+            <a:r>
+              <a:rPr lang="en-US" sz="1200" dirty="0">
+                <a:solidFill>
+                  <a:srgbClr val="1C2833"/>
+                </a:solidFill>
+                <a:latin typeface="Arial" pitchFamily="34" charset="0"/>
+                <a:ea typeface="Arial" pitchFamily="34" charset="-122"/>
+                <a:cs typeface="Arial" pitchFamily="34" charset="-120"/>
+              </a:rPr>
+              <a:t> Focus on the 3×3 case alone. Verify the constant 15 by summing every row, column, and diagonal of the Day-1 square. Do it slowly.</a:t>
+            </a:r>
+            <a:endParaRPr lang="en-US" sz="1200" dirty="0"/>
+          </a:p>
+        </p:txBody>
+      </p:sp>
+      <p:sp>
+        <p:nvSpPr>
+          <p:cNvPr id="5" name="Text 3"/>
+          <p:cNvSpPr/>
+          <p:nvPr/>
+        </p:nvSpPr>
+        <p:spPr>
+          <a:xfrm>
+            <a:off x="406301" y="4434929"/>
+            <a:ext cx="8498026" cy="213271"/>
+          </a:xfrm>
+          <a:prstGeom prst="rect">
+            <a:avLst/>
+          </a:prstGeom>
+          <a:noFill/>
+          <a:ln/>
+        </p:spPr>
+        <p:txBody>
+          <a:bodyPr wrap="square" lIns="0" tIns="0" rIns="0" bIns="0" rtlCol="0" anchor="t"/>
+          <a:lstStyle/>
+          <a:p>
+            <a:pPr algn="l" indent="0" marL="0">
+              <a:lnSpc>
+                <a:spcPts val="1680"/>
+              </a:lnSpc>
+              <a:spcBef>
+                <a:spcPts val="300"/>
+              </a:spcBef>
+              <a:spcAft>
+                <a:spcPts val="300"/>
+              </a:spcAft>
+              <a:buNone/>
+            </a:pPr>
+            <a:r>
+              <a:rPr lang="en-US" sz="1200" dirty="0">
+                <a:solidFill>
+                  <a:srgbClr val="1C2833"/>
+                </a:solidFill>
+                <a:latin typeface="Arial" pitchFamily="34" charset="0"/>
+                <a:ea typeface="Arial" pitchFamily="34" charset="-122"/>
+                <a:cs typeface="Arial" pitchFamily="34" charset="-120"/>
+              </a:rPr>
+              <a:t>Middle ·  · IKS Curriculum</a:t>
+            </a:r>
+            <a:endParaRPr lang="en-US" sz="1200" dirty="0"/>
+          </a:p>
+        </p:txBody>
+      </p:sp>
+    </p:spTree>
+  </p:cSld>
+  <p:clrMapOvr>
+    <a:masterClrMapping/>
+  </p:clrMapOvr>
+</p:sld>
+</file>
+
+<file path=ppt/slides/slide17.xml><?xml version="1.0" encoding="utf-8"?>
+<p:sld xmlns:a="http://schemas.openxmlformats.org/drawingml/2006/main" xmlns:r="http://schemas.openxmlformats.org/officeDocument/2006/relationships" xmlns:p="http://schemas.openxmlformats.org/presentationml/2006/main">
+  <p:cSld name="Slide 17">
+    <p:bg>
+      <p:bgPr>
+        <a:solidFill>
+          <a:srgbClr val="FFFFFF"/>
+        </a:solidFill>
+      </p:bgPr>
+    </p:bg>
+    <p:spTree>
+      <p:nvGrpSpPr>
+        <p:cNvPr id="1" name=""/>
+        <p:cNvGrpSpPr/>
+        <p:nvPr/>
+      </p:nvGrpSpPr>
+      <p:grpSpPr>
+        <a:xfrm>
+          <a:off x="0" y="0"/>
+          <a:ext cx="0" cy="0"/>
+          <a:chOff x="0" y="0"/>
+          <a:chExt cx="0" cy="0"/>
+        </a:xfrm>
+      </p:grpSpPr>
+      <p:sp>
+        <p:nvSpPr>
+          <p:cNvPr id="2" name="Text 0"/>
+          <p:cNvSpPr/>
+          <p:nvPr/>
+        </p:nvSpPr>
+        <p:spPr>
+          <a:xfrm>
+            <a:off x="0" y="0"/>
+            <a:ext cx="9144000" cy="101501"/>
+          </a:xfrm>
+          <a:prstGeom prst="rect">
+            <a:avLst/>
+          </a:prstGeom>
+          <a:solidFill>
+            <a:srgbClr val="277884"/>
+          </a:solidFill>
+          <a:ln/>
+        </p:spPr>
+        <p:txBody>
+          <a:bodyPr wrap="square" rtlCol="0" anchor="ctr"/>
+          <a:lstStyle/>
+          <a:p>
+            <a:pPr indent="0" marL="0">
+              <a:buNone/>
+            </a:pPr>
+            <a:endParaRPr lang="en-US" dirty="0"/>
+          </a:p>
+        </p:txBody>
+      </p:sp>
+      <p:sp>
+        <p:nvSpPr>
+          <p:cNvPr id="3" name="Text 1"/>
+          <p:cNvSpPr/>
+          <p:nvPr/>
+        </p:nvSpPr>
+        <p:spPr>
+          <a:xfrm>
+            <a:off x="406301" y="457051"/>
+            <a:ext cx="8498026" cy="274290"/>
+          </a:xfrm>
+          <a:prstGeom prst="rect">
+            <a:avLst/>
+          </a:prstGeom>
+          <a:noFill/>
+          <a:ln/>
+        </p:spPr>
+        <p:txBody>
+          <a:bodyPr wrap="square" lIns="0" tIns="0" rIns="0" bIns="0" rtlCol="0" anchor="t"/>
+          <a:lstStyle/>
+          <a:p>
+            <a:pPr algn="l" indent="0" marL="0">
+              <a:lnSpc>
+                <a:spcPts val="2160"/>
+              </a:lnSpc>
+              <a:spcBef>
+                <a:spcPts val="600"/>
+              </a:spcBef>
+              <a:spcAft>
+                <a:spcPts val="800"/>
+              </a:spcAft>
+              <a:buNone/>
+            </a:pPr>
+            <a:r>
+              <a:rPr lang="en-US" sz="1800" b="1" dirty="0">
+                <a:solidFill>
+                  <a:srgbClr val="FE4447"/>
+                </a:solidFill>
+                <a:latin typeface="Georgia" pitchFamily="34" charset="0"/>
+                <a:ea typeface="Georgia" pitchFamily="34" charset="-122"/>
+                <a:cs typeface="Georgia" pitchFamily="34" charset="-120"/>
+              </a:rPr>
+              <a:t>Teacher notes</a:t>
+            </a:r>
+            <a:endParaRPr lang="en-US" sz="1800" dirty="0"/>
+          </a:p>
+        </p:txBody>
+      </p:sp>
+      <p:sp>
+        <p:nvSpPr>
+          <p:cNvPr id="4" name="Text 2"/>
+          <p:cNvSpPr/>
+          <p:nvPr/>
+        </p:nvSpPr>
+        <p:spPr>
+          <a:xfrm>
+            <a:off x="634901" y="883593"/>
+            <a:ext cx="8102798" cy="1180802"/>
+          </a:xfrm>
+          <a:prstGeom prst="rect">
+            <a:avLst/>
+          </a:prstGeom>
+          <a:noFill/>
+          <a:ln/>
+        </p:spPr>
+        <p:txBody>
+          <a:bodyPr wrap="square" lIns="0" tIns="0" rIns="0" bIns="0" rtlCol="0" anchor="t"/>
+          <a:lstStyle/>
+          <a:p>
+            <a:pPr algn="l" marL="342900" indent="-342900">
+              <a:lnSpc>
+                <a:spcPts val="1620"/>
+              </a:lnSpc>
+              <a:spcAft>
+                <a:spcPts val="300"/>
+              </a:spcAft>
+              <a:buSzPct val="100000"/>
+              <a:buChar char="•"/>
+            </a:pPr>
+            <a:r>
+              <a:rPr lang="en-US" sz="1200" dirty="0">
+                <a:solidFill>
+                  <a:srgbClr val="1C2833"/>
+                </a:solidFill>
+                <a:latin typeface="Arial" pitchFamily="34" charset="0"/>
+                <a:ea typeface="Arial" pitchFamily="34" charset="-122"/>
+                <a:cs typeface="Arial" pitchFamily="34" charset="-120"/>
+              </a:rPr>
+              <a:t>A common stumble: students compute 1 + 2 + ... + 9 incorrectly. Remind them that 1+9, 2+8, 3+7, 4+6 each = 10, plus 5 = 45. This itself is a pretty argument worth pausing on.</a:t>
+            </a:r>
+            <a:endParaRPr lang="en-US" sz="1200" dirty="0"/>
+          </a:p>
+          <a:p>
+            <a:pPr algn="l" marL="342900" indent="-342900">
+              <a:lnSpc>
+                <a:spcPts val="1620"/>
+              </a:lnSpc>
+              <a:spcAft>
+                <a:spcPts val="300"/>
+              </a:spcAft>
+              <a:buSzPct val="100000"/>
+              <a:buChar char="•"/>
+            </a:pPr>
+            <a:r>
+              <a:rPr lang="en-US" sz="1200" dirty="0">
+                <a:solidFill>
+                  <a:srgbClr val="1C2833"/>
+                </a:solidFill>
+                <a:latin typeface="Arial" pitchFamily="34" charset="0"/>
+                <a:ea typeface="Arial" pitchFamily="34" charset="-122"/>
+                <a:cs typeface="Arial" pitchFamily="34" charset="-120"/>
+              </a:rPr>
+              <a:t>For the generalisation, some students will struggle with the </a:t>
+            </a:r>
+            <a:pPr algn="l" indent="0" marL="0">
+              <a:lnSpc>
+                <a:spcPts val="1620"/>
+              </a:lnSpc>
+              <a:spcAft>
+                <a:spcPts val="300"/>
+              </a:spcAft>
+              <a:buNone/>
+            </a:pPr>
+            <a:r>
+              <a:rPr lang="en-US" sz="1200" i="1" dirty="0">
+                <a:solidFill>
+                  <a:srgbClr val="1C2833"/>
+                </a:solidFill>
+                <a:latin typeface="Arial" pitchFamily="34" charset="0"/>
+                <a:ea typeface="Arial" pitchFamily="34" charset="-122"/>
+                <a:cs typeface="Arial" pitchFamily="34" charset="-120"/>
+              </a:rPr>
+              <a:t>n</a:t>
+            </a:r>
+            <a:pPr algn="l" indent="0" marL="0">
+              <a:lnSpc>
+                <a:spcPts val="1620"/>
+              </a:lnSpc>
+              <a:spcAft>
+                <a:spcPts val="300"/>
+              </a:spcAft>
+              <a:buNone/>
+            </a:pPr>
+            <a:r>
+              <a:rPr lang="en-US" sz="1200" dirty="0">
+                <a:solidFill>
+                  <a:srgbClr val="1C2833"/>
+                </a:solidFill>
+                <a:latin typeface="Arial" pitchFamily="34" charset="0"/>
+                <a:ea typeface="Arial" pitchFamily="34" charset="-122"/>
+                <a:cs typeface="Arial" pitchFamily="34" charset="-120"/>
+              </a:rPr>
+              <a:t>² notation. Walk them through the </a:t>
+            </a:r>
+            <a:pPr algn="l" indent="0" marL="0">
+              <a:lnSpc>
+                <a:spcPts val="1620"/>
+              </a:lnSpc>
+              <a:spcAft>
+                <a:spcPts val="300"/>
+              </a:spcAft>
+              <a:buNone/>
+            </a:pPr>
+            <a:r>
+              <a:rPr lang="en-US" sz="1200" i="1" dirty="0">
+                <a:solidFill>
+                  <a:srgbClr val="1C2833"/>
+                </a:solidFill>
+                <a:latin typeface="Arial" pitchFamily="34" charset="0"/>
+                <a:ea typeface="Arial" pitchFamily="34" charset="-122"/>
+                <a:cs typeface="Arial" pitchFamily="34" charset="-120"/>
+              </a:rPr>
+              <a:t>n</a:t>
+            </a:r>
+            <a:pPr algn="l" indent="0" marL="0">
+              <a:lnSpc>
+                <a:spcPts val="1620"/>
+              </a:lnSpc>
+              <a:spcAft>
+                <a:spcPts val="300"/>
+              </a:spcAft>
+              <a:buNone/>
+            </a:pPr>
+            <a:r>
+              <a:rPr lang="en-US" sz="1200" dirty="0">
+                <a:solidFill>
+                  <a:srgbClr val="1C2833"/>
+                </a:solidFill>
+                <a:latin typeface="Arial" pitchFamily="34" charset="0"/>
+                <a:ea typeface="Arial" pitchFamily="34" charset="-122"/>
+                <a:cs typeface="Arial" pitchFamily="34" charset="-120"/>
+              </a:rPr>
+              <a:t> = 5 case explicitly: 1 + 2 + ... + 25 = 25 × 26 / 2 = 325; split among 5 rows → 65.</a:t>
+            </a:r>
+            <a:endParaRPr lang="en-US" sz="1200" dirty="0"/>
+          </a:p>
+          <a:p>
+            <a:pPr algn="l" marL="342900" indent="-342900">
+              <a:lnSpc>
+                <a:spcPts val="1620"/>
+              </a:lnSpc>
+              <a:spcAft>
+                <a:spcPts val="300"/>
+              </a:spcAft>
+              <a:buSzPct val="100000"/>
+              <a:buChar char="•"/>
+            </a:pPr>
+            <a:r>
+              <a:rPr lang="en-US" sz="1200" dirty="0">
+                <a:solidFill>
+                  <a:srgbClr val="1C2833"/>
+                </a:solidFill>
+                <a:latin typeface="Arial" pitchFamily="34" charset="0"/>
+                <a:ea typeface="Arial" pitchFamily="34" charset="-122"/>
+                <a:cs typeface="Arial" pitchFamily="34" charset="-120"/>
+              </a:rPr>
+              <a:t>The formula </a:t>
+            </a:r>
+            <a:pPr algn="l" indent="0" marL="0">
+              <a:lnSpc>
+                <a:spcPts val="1620"/>
+              </a:lnSpc>
+              <a:spcAft>
+                <a:spcPts val="300"/>
+              </a:spcAft>
+              <a:buNone/>
+            </a:pPr>
+            <a:r>
+              <a:rPr lang="en-US" sz="1200" i="1" dirty="0">
+                <a:solidFill>
+                  <a:srgbClr val="1C2833"/>
+                </a:solidFill>
+                <a:latin typeface="Arial" pitchFamily="34" charset="0"/>
+                <a:ea typeface="Arial" pitchFamily="34" charset="-122"/>
+                <a:cs typeface="Arial" pitchFamily="34" charset="-120"/>
+              </a:rPr>
+              <a:t>S = n(n² + 1)/2</a:t>
+            </a:r>
+            <a:pPr algn="l" indent="0" marL="0">
+              <a:lnSpc>
+                <a:spcPts val="1620"/>
+              </a:lnSpc>
+              <a:spcAft>
+                <a:spcPts val="300"/>
+              </a:spcAft>
+              <a:buNone/>
+            </a:pPr>
+            <a:r>
+              <a:rPr lang="en-US" sz="1200" dirty="0">
+                <a:solidFill>
+                  <a:srgbClr val="1C2833"/>
+                </a:solidFill>
+                <a:latin typeface="Arial" pitchFamily="34" charset="0"/>
+                <a:ea typeface="Arial" pitchFamily="34" charset="-122"/>
+                <a:cs typeface="Arial" pitchFamily="34" charset="-120"/>
+              </a:rPr>
+              <a:t> is </a:t>
+            </a:r>
+            <a:pPr algn="l" indent="0" marL="0">
+              <a:lnSpc>
+                <a:spcPts val="1620"/>
+              </a:lnSpc>
+              <a:spcAft>
+                <a:spcPts val="300"/>
+              </a:spcAft>
+              <a:buNone/>
+            </a:pPr>
+            <a:r>
+              <a:rPr lang="en-US" sz="1200" b="1" dirty="0">
+                <a:solidFill>
+                  <a:srgbClr val="1C2833"/>
+                </a:solidFill>
+                <a:latin typeface="Arial" pitchFamily="34" charset="0"/>
+                <a:ea typeface="Arial" pitchFamily="34" charset="-122"/>
+                <a:cs typeface="Arial" pitchFamily="34" charset="-120"/>
+              </a:rPr>
+              <a:t>the</a:t>
+            </a:r>
+            <a:pPr algn="l" indent="0" marL="0">
+              <a:lnSpc>
+                <a:spcPts val="1620"/>
+              </a:lnSpc>
+              <a:spcAft>
+                <a:spcPts val="300"/>
+              </a:spcAft>
+              <a:buNone/>
+            </a:pPr>
+            <a:r>
+              <a:rPr lang="en-US" sz="1200" dirty="0">
+                <a:solidFill>
+                  <a:srgbClr val="1C2833"/>
+                </a:solidFill>
+                <a:latin typeface="Arial" pitchFamily="34" charset="0"/>
+                <a:ea typeface="Arial" pitchFamily="34" charset="-122"/>
+                <a:cs typeface="Arial" pitchFamily="34" charset="-120"/>
+              </a:rPr>
+              <a:t> rule of this module. Drill it.</a:t>
+            </a:r>
+            <a:endParaRPr lang="en-US" sz="1200" dirty="0"/>
+          </a:p>
+        </p:txBody>
+      </p:sp>
+      <p:sp>
+        <p:nvSpPr>
+          <p:cNvPr id="5" name="Text 3"/>
+          <p:cNvSpPr/>
+          <p:nvPr/>
+        </p:nvSpPr>
+        <p:spPr>
+          <a:xfrm>
+            <a:off x="406301" y="4434929"/>
+            <a:ext cx="8498026" cy="213271"/>
+          </a:xfrm>
+          <a:prstGeom prst="rect">
+            <a:avLst/>
+          </a:prstGeom>
+          <a:noFill/>
+          <a:ln/>
+        </p:spPr>
+        <p:txBody>
+          <a:bodyPr wrap="square" lIns="0" tIns="0" rIns="0" bIns="0" rtlCol="0" anchor="t"/>
+          <a:lstStyle/>
+          <a:p>
+            <a:pPr algn="l" indent="0" marL="0">
+              <a:lnSpc>
+                <a:spcPts val="1680"/>
+              </a:lnSpc>
+              <a:spcBef>
+                <a:spcPts val="300"/>
+              </a:spcBef>
+              <a:spcAft>
+                <a:spcPts val="300"/>
+              </a:spcAft>
+              <a:buNone/>
+            </a:pPr>
+            <a:r>
+              <a:rPr lang="en-US" sz="1200" dirty="0">
+                <a:solidFill>
+                  <a:srgbClr val="1C2833"/>
+                </a:solidFill>
+                <a:latin typeface="Arial" pitchFamily="34" charset="0"/>
+                <a:ea typeface="Arial" pitchFamily="34" charset="-122"/>
+                <a:cs typeface="Arial" pitchFamily="34" charset="-120"/>
+              </a:rPr>
+              <a:t>Middle ·  · IKS Curriculum</a:t>
+            </a:r>
+            <a:endParaRPr lang="en-US" sz="1200" dirty="0"/>
+          </a:p>
+        </p:txBody>
+      </p:sp>
+    </p:spTree>
+  </p:cSld>
+  <p:clrMapOvr>
+    <a:masterClrMapping/>
+  </p:clrMapOvr>
+</p:sld>
+</file>
+
+<file path=ppt/slides/slide18.xml><?xml version="1.0" encoding="utf-8"?>
+<p:sld xmlns:a="http://schemas.openxmlformats.org/drawingml/2006/main" xmlns:r="http://schemas.openxmlformats.org/officeDocument/2006/relationships" xmlns:p="http://schemas.openxmlformats.org/presentationml/2006/main">
+  <p:cSld name="Slide 18">
+    <p:bg>
+      <p:bgPr>
+        <a:solidFill>
+          <a:srgbClr val="FFFFFF"/>
+        </a:solidFill>
+      </p:bgPr>
+    </p:bg>
+    <p:spTree>
+      <p:nvGrpSpPr>
+        <p:cNvPr id="1" name=""/>
+        <p:cNvGrpSpPr/>
+        <p:nvPr/>
+      </p:nvGrpSpPr>
+      <p:grpSpPr>
+        <a:xfrm>
+          <a:off x="0" y="0"/>
+          <a:ext cx="0" cy="0"/>
+          <a:chOff x="0" y="0"/>
+          <a:chExt cx="0" cy="0"/>
+        </a:xfrm>
+      </p:grpSpPr>
+      <p:sp>
+        <p:nvSpPr>
+          <p:cNvPr id="2" name="Text 0"/>
+          <p:cNvSpPr/>
+          <p:nvPr/>
+        </p:nvSpPr>
+        <p:spPr>
+          <a:xfrm>
+            <a:off x="0" y="0"/>
+            <a:ext cx="9144000" cy="101501"/>
+          </a:xfrm>
+          <a:prstGeom prst="rect">
+            <a:avLst/>
+          </a:prstGeom>
+          <a:solidFill>
+            <a:srgbClr val="277884"/>
+          </a:solidFill>
+          <a:ln/>
+        </p:spPr>
+        <p:txBody>
+          <a:bodyPr wrap="square" rtlCol="0" anchor="ctr"/>
+          <a:lstStyle/>
+          <a:p>
+            <a:pPr indent="0" marL="0">
+              <a:buNone/>
+            </a:pPr>
+            <a:endParaRPr lang="en-US" dirty="0"/>
+          </a:p>
+        </p:txBody>
+      </p:sp>
+      <p:sp>
+        <p:nvSpPr>
+          <p:cNvPr id="3" name="Text 1"/>
+          <p:cNvSpPr/>
+          <p:nvPr/>
+        </p:nvSpPr>
+        <p:spPr>
+          <a:xfrm>
+            <a:off x="406301" y="457051"/>
+            <a:ext cx="8498026" cy="274290"/>
+          </a:xfrm>
+          <a:prstGeom prst="rect">
+            <a:avLst/>
+          </a:prstGeom>
+          <a:noFill/>
+          <a:ln/>
+        </p:spPr>
+        <p:txBody>
+          <a:bodyPr wrap="square" lIns="0" tIns="0" rIns="0" bIns="0" rtlCol="0" anchor="t"/>
+          <a:lstStyle/>
+          <a:p>
+            <a:pPr algn="l" indent="0" marL="0">
+              <a:lnSpc>
+                <a:spcPts val="2160"/>
+              </a:lnSpc>
+              <a:spcBef>
+                <a:spcPts val="600"/>
+              </a:spcBef>
+              <a:spcAft>
+                <a:spcPts val="800"/>
+              </a:spcAft>
+              <a:buNone/>
+            </a:pPr>
+            <a:r>
+              <a:rPr lang="en-US" sz="1800" b="1" dirty="0">
+                <a:solidFill>
+                  <a:srgbClr val="FE4447"/>
+                </a:solidFill>
+                <a:latin typeface="Georgia" pitchFamily="34" charset="0"/>
+                <a:ea typeface="Georgia" pitchFamily="34" charset="-122"/>
+                <a:cs typeface="Georgia" pitchFamily="34" charset="-120"/>
+              </a:rPr>
+              <a:t>Citation(s) used in this lesson</a:t>
+            </a:r>
+            <a:endParaRPr lang="en-US" sz="1800" dirty="0"/>
+          </a:p>
+        </p:txBody>
+      </p:sp>
+      <p:sp>
+        <p:nvSpPr>
+          <p:cNvPr id="4" name="Text 2"/>
+          <p:cNvSpPr/>
+          <p:nvPr/>
+        </p:nvSpPr>
+        <p:spPr>
+          <a:xfrm>
+            <a:off x="634901" y="883593"/>
+            <a:ext cx="8102798" cy="487561"/>
+          </a:xfrm>
+          <a:prstGeom prst="rect">
+            <a:avLst/>
+          </a:prstGeom>
+          <a:noFill/>
+          <a:ln/>
+        </p:spPr>
+        <p:txBody>
+          <a:bodyPr wrap="square" lIns="0" tIns="0" rIns="0" bIns="0" rtlCol="0" anchor="t"/>
+          <a:lstStyle/>
+          <a:p>
+            <a:pPr algn="l" marL="342900" indent="-342900">
+              <a:lnSpc>
+                <a:spcPts val="1620"/>
+              </a:lnSpc>
+              <a:spcAft>
+                <a:spcPts val="300"/>
+              </a:spcAft>
+              <a:buSzPct val="100000"/>
+              <a:buChar char="•"/>
+            </a:pPr>
+            <a:r>
+              <a:rPr lang="en-US" sz="1200" dirty="0">
+                <a:solidFill>
+                  <a:srgbClr val="1C2833"/>
+                </a:solidFill>
+                <a:latin typeface="Arial" pitchFamily="34" charset="0"/>
+                <a:ea typeface="Arial" pitchFamily="34" charset="-122"/>
+                <a:cs typeface="Arial" pitchFamily="34" charset="-120"/>
+              </a:rPr>
+              <a:t>Nārāyaṇa Paṇḍita, </a:t>
+            </a:r>
+            <a:pPr algn="l" indent="0" marL="0">
+              <a:lnSpc>
+                <a:spcPts val="1620"/>
+              </a:lnSpc>
+              <a:spcAft>
+                <a:spcPts val="300"/>
+              </a:spcAft>
+              <a:buNone/>
+            </a:pPr>
+            <a:r>
+              <a:rPr lang="en-US" sz="1200" i="1" dirty="0">
+                <a:solidFill>
+                  <a:srgbClr val="1C2833"/>
+                </a:solidFill>
+                <a:latin typeface="Arial" pitchFamily="34" charset="0"/>
+                <a:ea typeface="Arial" pitchFamily="34" charset="-122"/>
+                <a:cs typeface="Arial" pitchFamily="34" charset="-120"/>
+              </a:rPr>
               <a:t>Gaṇita-kaumudī</a:t>
             </a:r>
             <a:pPr algn="l" indent="0" marL="0">
               <a:lnSpc>
-                <a:spcPts val="1680"/>
-              </a:lnSpc>
-              <a:spcBef>
-                <a:spcPts val="300"/>
-              </a:spcBef>
+                <a:spcPts val="1620"/>
+              </a:lnSpc>
               <a:spcAft>
                 <a:spcPts val="300"/>
               </a:spcAft>
@@ -3999,11 +6955,8 @@
             </a:r>
             <a:pPr algn="l" indent="0" marL="0">
               <a:lnSpc>
-                <a:spcPts val="1680"/>
-              </a:lnSpc>
-              <a:spcBef>
-                <a:spcPts val="300"/>
-              </a:spcBef>
+                <a:spcPts val="1620"/>
+              </a:lnSpc>
               <a:spcAft>
                 <a:spcPts val="300"/>
               </a:spcAft>
@@ -4022,11 +6975,8 @@
             </a:r>
             <a:pPr algn="l" indent="0" marL="0">
               <a:lnSpc>
-                <a:spcPts val="1680"/>
-              </a:lnSpc>
-              <a:spcBef>
-                <a:spcPts val="300"/>
-              </a:spcBef>
+                <a:spcPts val="1620"/>
+              </a:lnSpc>
               <a:spcAft>
                 <a:spcPts val="300"/>
               </a:spcAft>
@@ -4045,11 +6995,8 @@
             </a:r>
             <a:pPr algn="l" indent="0" marL="0">
               <a:lnSpc>
-                <a:spcPts val="1680"/>
-              </a:lnSpc>
-              <a:spcBef>
-                <a:spcPts val="300"/>
-              </a:spcBef>
+                <a:spcPts val="1620"/>
+              </a:lnSpc>
               <a:spcAft>
                 <a:spcPts val="300"/>
               </a:spcAft>
@@ -4068,11 +7015,8 @@
             </a:r>
             <a:pPr algn="l" indent="0" marL="0">
               <a:lnSpc>
-                <a:spcPts val="1680"/>
-              </a:lnSpc>
-              <a:spcBef>
-                <a:spcPts val="300"/>
-              </a:spcBef>
+                <a:spcPts val="1620"/>
+              </a:lnSpc>
               <a:spcAft>
                 <a:spcPts val="300"/>
               </a:spcAft>
@@ -4091,11 +7035,8 @@
             </a:r>
             <a:pPr algn="l" indent="0" marL="0">
               <a:lnSpc>
-                <a:spcPts val="1680"/>
-              </a:lnSpc>
-              <a:spcBef>
-                <a:spcPts val="300"/>
-              </a:spcBef>
+                <a:spcPts val="1620"/>
+              </a:lnSpc>
               <a:spcAft>
                 <a:spcPts val="300"/>
               </a:spcAft>
@@ -4114,11 +7055,8 @@
             </a:r>
             <a:pPr algn="l" indent="0" marL="0">
               <a:lnSpc>
-                <a:spcPts val="1680"/>
-              </a:lnSpc>
-              <a:spcBef>
-                <a:spcPts val="300"/>
-              </a:spcBef>
+                <a:spcPts val="1620"/>
+              </a:lnSpc>
               <a:spcAft>
                 <a:spcPts val="300"/>
               </a:spcAft>
@@ -4291,7 +7229,7 @@
                 <a:ea typeface="Georgia" pitchFamily="34" charset="-122"/>
                 <a:cs typeface="Georgia" pitchFamily="34" charset="-120"/>
               </a:rPr>
-              <a:t>Materials</a:t>
+              <a:t>Learning objective</a:t>
             </a:r>
             <a:endParaRPr lang="en-US" sz="1800" dirty="0"/>
           </a:p>
@@ -4306,7 +7244,7 @@
         <p:spPr>
           <a:xfrm>
             <a:off x="406301" y="870942"/>
-            <a:ext cx="8498026" cy="213271"/>
+            <a:ext cx="8498026" cy="426541"/>
           </a:xfrm>
           <a:prstGeom prst="rect">
             <a:avLst/>
@@ -4339,7 +7277,99 @@
                 <a:ea typeface="Arial" pitchFamily="34" charset="-122"/>
                 <a:cs typeface="Arial" pitchFamily="34" charset="-120"/>
               </a:rPr>
-              <a:t>– Whiteboard – Notebook + pen – The 3×3 magic square from Day 1, visible on the board</a:t>
+              <a:t>By the end of this lesson, students will (a) derive the magic constant </a:t>
+            </a:r>
+            <a:pPr algn="l" indent="0" marL="0">
+              <a:lnSpc>
+                <a:spcPts val="1680"/>
+              </a:lnSpc>
+              <a:spcBef>
+                <a:spcPts val="300"/>
+              </a:spcBef>
+              <a:spcAft>
+                <a:spcPts val="300"/>
+              </a:spcAft>
+              <a:buNone/>
+            </a:pPr>
+            <a:r>
+              <a:rPr lang="en-US" sz="1200" i="1" dirty="0">
+                <a:solidFill>
+                  <a:srgbClr val="1C2833"/>
+                </a:solidFill>
+                <a:latin typeface="Arial" pitchFamily="34" charset="0"/>
+                <a:ea typeface="Arial" pitchFamily="34" charset="-122"/>
+                <a:cs typeface="Arial" pitchFamily="34" charset="-120"/>
+              </a:rPr>
+              <a:t>S = n(n² + 1)/2</a:t>
+            </a:r>
+            <a:pPr algn="l" indent="0" marL="0">
+              <a:lnSpc>
+                <a:spcPts val="1680"/>
+              </a:lnSpc>
+              <a:spcBef>
+                <a:spcPts val="300"/>
+              </a:spcBef>
+              <a:spcAft>
+                <a:spcPts val="300"/>
+              </a:spcAft>
+              <a:buNone/>
+            </a:pPr>
+            <a:r>
+              <a:rPr lang="en-US" sz="1200" dirty="0">
+                <a:solidFill>
+                  <a:srgbClr val="1C2833"/>
+                </a:solidFill>
+                <a:latin typeface="Arial" pitchFamily="34" charset="0"/>
+                <a:ea typeface="Arial" pitchFamily="34" charset="-122"/>
+                <a:cs typeface="Arial" pitchFamily="34" charset="-120"/>
+              </a:rPr>
+              <a:t> for the 3×3 case by direct argument, and (b) apply the formula to predict the constant for </a:t>
+            </a:r>
+            <a:pPr algn="l" indent="0" marL="0">
+              <a:lnSpc>
+                <a:spcPts val="1680"/>
+              </a:lnSpc>
+              <a:spcBef>
+                <a:spcPts val="300"/>
+              </a:spcBef>
+              <a:spcAft>
+                <a:spcPts val="300"/>
+              </a:spcAft>
+              <a:buNone/>
+            </a:pPr>
+            <a:r>
+              <a:rPr lang="en-US" sz="1200" i="1" dirty="0">
+                <a:solidFill>
+                  <a:srgbClr val="1C2833"/>
+                </a:solidFill>
+                <a:latin typeface="Arial" pitchFamily="34" charset="0"/>
+                <a:ea typeface="Arial" pitchFamily="34" charset="-122"/>
+                <a:cs typeface="Arial" pitchFamily="34" charset="-120"/>
+              </a:rPr>
+              <a:t>n</a:t>
+            </a:r>
+            <a:pPr algn="l" indent="0" marL="0">
+              <a:lnSpc>
+                <a:spcPts val="1680"/>
+              </a:lnSpc>
+              <a:spcBef>
+                <a:spcPts val="300"/>
+              </a:spcBef>
+              <a:spcAft>
+                <a:spcPts val="300"/>
+              </a:spcAft>
+              <a:buNone/>
+            </a:pPr>
+            <a:r>
+              <a:rPr lang="en-US" sz="1200" dirty="0">
+                <a:solidFill>
+                  <a:srgbClr val="1C2833"/>
+                </a:solidFill>
+                <a:latin typeface="Arial" pitchFamily="34" charset="0"/>
+                <a:ea typeface="Arial" pitchFamily="34" charset="-122"/>
+                <a:cs typeface="Arial" pitchFamily="34" charset="-120"/>
+              </a:rPr>
+              <a:t> = 4, 5, 6, 7.</a:t>
             </a:r>
             <a:endParaRPr lang="en-US" sz="1200" dirty="0"/>
           </a:p>
@@ -4497,7 +7527,7 @@
                 <a:ea typeface="Georgia" pitchFamily="34" charset="-122"/>
                 <a:cs typeface="Georgia" pitchFamily="34" charset="-120"/>
               </a:rPr>
-              <a:t>Vocabulary review</a:t>
+              <a:t>Materials</a:t>
             </a:r>
             <a:endParaRPr lang="en-US" sz="1800" dirty="0"/>
           </a:p>
@@ -4512,7 +7542,7 @@
         <p:spPr>
           <a:xfrm>
             <a:off x="634901" y="883593"/>
-            <a:ext cx="8102798" cy="281880"/>
+            <a:ext cx="8102798" cy="769441"/>
           </a:xfrm>
           <a:prstGeom prst="rect">
             <a:avLst/>
@@ -4535,26 +7565,6 @@
               <a:buChar char="•"/>
             </a:pPr>
             <a:r>
-              <a:rPr lang="en-US" sz="1200" i="1" dirty="0">
-                <a:solidFill>
-                  <a:srgbClr val="1C2833"/>
-                </a:solidFill>
-                <a:latin typeface="Arial" pitchFamily="34" charset="0"/>
-                <a:ea typeface="Arial" pitchFamily="34" charset="-122"/>
-                <a:cs typeface="Arial" pitchFamily="34" charset="-120"/>
-              </a:rPr>
-              <a:t>magic square</a:t>
-            </a:r>
-            <a:pPr algn="l" indent="0" marL="0">
-              <a:lnSpc>
-                <a:spcPts val="1620"/>
-              </a:lnSpc>
-              <a:spcAft>
-                <a:spcPts val="300"/>
-              </a:spcAft>
-              <a:buNone/>
-            </a:pPr>
-            <a:r>
               <a:rPr lang="en-US" sz="1200" dirty="0">
                 <a:solidFill>
                   <a:srgbClr val="1C2833"/>
@@ -4563,36 +7573,20 @@
                 <a:ea typeface="Arial" pitchFamily="34" charset="-122"/>
                 <a:cs typeface="Arial" pitchFamily="34" charset="-120"/>
               </a:rPr>
-              <a:t>, </a:t>
-            </a:r>
-            <a:pPr algn="l" indent="0" marL="0">
-              <a:lnSpc>
-                <a:spcPts val="1620"/>
-              </a:lnSpc>
-              <a:spcAft>
-                <a:spcPts val="300"/>
-              </a:spcAft>
-              <a:buNone/>
-            </a:pPr>
-            <a:r>
-              <a:rPr lang="en-US" sz="1200" i="1" dirty="0">
-                <a:solidFill>
-                  <a:srgbClr val="1C2833"/>
-                </a:solidFill>
-                <a:latin typeface="Arial" pitchFamily="34" charset="0"/>
-                <a:ea typeface="Arial" pitchFamily="34" charset="-122"/>
-                <a:cs typeface="Arial" pitchFamily="34" charset="-120"/>
-              </a:rPr>
-              <a:t>magic constant</a:t>
-            </a:r>
-            <a:pPr algn="l" indent="0" marL="0">
-              <a:lnSpc>
-                <a:spcPts val="1620"/>
-              </a:lnSpc>
-              <a:spcAft>
-                <a:spcPts val="300"/>
-              </a:spcAft>
-              <a:buNone/>
+              <a:t>Whiteboard</a:t>
+            </a:r>
+            <a:endParaRPr lang="en-US" sz="1200" dirty="0"/>
+          </a:p>
+          <a:p>
+            <a:pPr algn="l" marL="342900" indent="-342900">
+              <a:lnSpc>
+                <a:spcPts val="1620"/>
+              </a:lnSpc>
+              <a:spcAft>
+                <a:spcPts val="300"/>
+              </a:spcAft>
+              <a:buSzPct val="100000"/>
+              <a:buChar char="•"/>
             </a:pPr>
             <a:r>
               <a:rPr lang="en-US" sz="1200" dirty="0">
@@ -4603,7 +7597,31 @@
                 <a:ea typeface="Arial" pitchFamily="34" charset="-122"/>
                 <a:cs typeface="Arial" pitchFamily="34" charset="-120"/>
               </a:rPr>
-              <a:t> — defined Day 1.</a:t>
+              <a:t>Notebook + pen</a:t>
+            </a:r>
+            <a:endParaRPr lang="en-US" sz="1200" dirty="0"/>
+          </a:p>
+          <a:p>
+            <a:pPr algn="l" marL="342900" indent="-342900">
+              <a:lnSpc>
+                <a:spcPts val="1620"/>
+              </a:lnSpc>
+              <a:spcAft>
+                <a:spcPts val="300"/>
+              </a:spcAft>
+              <a:buSzPct val="100000"/>
+              <a:buChar char="•"/>
+            </a:pPr>
+            <a:r>
+              <a:rPr lang="en-US" sz="1200" dirty="0">
+                <a:solidFill>
+                  <a:srgbClr val="1C2833"/>
+                </a:solidFill>
+                <a:latin typeface="Arial" pitchFamily="34" charset="0"/>
+                <a:ea typeface="Arial" pitchFamily="34" charset="-122"/>
+                <a:cs typeface="Arial" pitchFamily="34" charset="-120"/>
+              </a:rPr>
+              <a:t>The 3×3 magic square from Day 1, visible on the board</a:t>
             </a:r>
             <a:endParaRPr lang="en-US" sz="1200" dirty="0"/>
           </a:p>
@@ -4761,7 +7779,7 @@
                 <a:ea typeface="Georgia" pitchFamily="34" charset="-122"/>
                 <a:cs typeface="Georgia" pitchFamily="34" charset="-120"/>
               </a:rPr>
-              <a:t>Lesson flow</a:t>
+              <a:t>Vocabulary review</a:t>
             </a:r>
             <a:endParaRPr lang="en-US" sz="1800" dirty="0"/>
           </a:p>
@@ -4770,6 +7788,112 @@
       <p:sp>
         <p:nvSpPr>
           <p:cNvPr id="4" name="Text 2"/>
+          <p:cNvSpPr/>
+          <p:nvPr/>
+        </p:nvSpPr>
+        <p:spPr>
+          <a:xfrm>
+            <a:off x="634901" y="883593"/>
+            <a:ext cx="8102798" cy="281880"/>
+          </a:xfrm>
+          <a:prstGeom prst="rect">
+            <a:avLst/>
+          </a:prstGeom>
+          <a:noFill/>
+          <a:ln/>
+        </p:spPr>
+        <p:txBody>
+          <a:bodyPr wrap="square" lIns="0" tIns="0" rIns="0" bIns="0" rtlCol="0" anchor="t"/>
+          <a:lstStyle/>
+          <a:p>
+            <a:pPr algn="l" marL="342900" indent="-342900">
+              <a:lnSpc>
+                <a:spcPts val="1620"/>
+              </a:lnSpc>
+              <a:spcAft>
+                <a:spcPts val="300"/>
+              </a:spcAft>
+              <a:buSzPct val="100000"/>
+              <a:buChar char="•"/>
+            </a:pPr>
+            <a:r>
+              <a:rPr lang="en-US" sz="1200" i="1" dirty="0">
+                <a:solidFill>
+                  <a:srgbClr val="1C2833"/>
+                </a:solidFill>
+                <a:latin typeface="Arial" pitchFamily="34" charset="0"/>
+                <a:ea typeface="Arial" pitchFamily="34" charset="-122"/>
+                <a:cs typeface="Arial" pitchFamily="34" charset="-120"/>
+              </a:rPr>
+              <a:t>magic square</a:t>
+            </a:r>
+            <a:pPr algn="l" indent="0" marL="0">
+              <a:lnSpc>
+                <a:spcPts val="1620"/>
+              </a:lnSpc>
+              <a:spcAft>
+                <a:spcPts val="300"/>
+              </a:spcAft>
+              <a:buNone/>
+            </a:pPr>
+            <a:r>
+              <a:rPr lang="en-US" sz="1200" dirty="0">
+                <a:solidFill>
+                  <a:srgbClr val="1C2833"/>
+                </a:solidFill>
+                <a:latin typeface="Arial" pitchFamily="34" charset="0"/>
+                <a:ea typeface="Arial" pitchFamily="34" charset="-122"/>
+                <a:cs typeface="Arial" pitchFamily="34" charset="-120"/>
+              </a:rPr>
+              <a:t>, </a:t>
+            </a:r>
+            <a:pPr algn="l" indent="0" marL="0">
+              <a:lnSpc>
+                <a:spcPts val="1620"/>
+              </a:lnSpc>
+              <a:spcAft>
+                <a:spcPts val="300"/>
+              </a:spcAft>
+              <a:buNone/>
+            </a:pPr>
+            <a:r>
+              <a:rPr lang="en-US" sz="1200" i="1" dirty="0">
+                <a:solidFill>
+                  <a:srgbClr val="1C2833"/>
+                </a:solidFill>
+                <a:latin typeface="Arial" pitchFamily="34" charset="0"/>
+                <a:ea typeface="Arial" pitchFamily="34" charset="-122"/>
+                <a:cs typeface="Arial" pitchFamily="34" charset="-120"/>
+              </a:rPr>
+              <a:t>magic constant</a:t>
+            </a:r>
+            <a:pPr algn="l" indent="0" marL="0">
+              <a:lnSpc>
+                <a:spcPts val="1620"/>
+              </a:lnSpc>
+              <a:spcAft>
+                <a:spcPts val="300"/>
+              </a:spcAft>
+              <a:buNone/>
+            </a:pPr>
+            <a:r>
+              <a:rPr lang="en-US" sz="1200" dirty="0">
+                <a:solidFill>
+                  <a:srgbClr val="1C2833"/>
+                </a:solidFill>
+                <a:latin typeface="Arial" pitchFamily="34" charset="0"/>
+                <a:ea typeface="Arial" pitchFamily="34" charset="-122"/>
+                <a:cs typeface="Arial" pitchFamily="34" charset="-120"/>
+              </a:rPr>
+              <a:t> — defined Day 1.</a:t>
+            </a:r>
+            <a:endParaRPr lang="en-US" sz="1200" dirty="0"/>
+          </a:p>
+        </p:txBody>
+      </p:sp>
+      <p:sp>
+        <p:nvSpPr>
+          <p:cNvPr id="5" name="Text 3"/>
           <p:cNvSpPr/>
           <p:nvPr/>
         </p:nvSpPr>
@@ -4919,7 +8043,7 @@
                 <a:ea typeface="Georgia" pitchFamily="34" charset="-122"/>
                 <a:cs typeface="Georgia" pitchFamily="34" charset="-120"/>
               </a:rPr>
-              <a:t>Warm-up (5 min)</a:t>
+              <a:t>Lesson flow</a:t>
             </a:r>
             <a:endParaRPr lang="en-US" sz="1800" dirty="0"/>
           </a:p>
@@ -4928,166 +8052,6 @@
       <p:sp>
         <p:nvSpPr>
           <p:cNvPr id="4" name="Text 2"/>
-          <p:cNvSpPr/>
-          <p:nvPr/>
-        </p:nvSpPr>
-        <p:spPr>
-          <a:xfrm>
-            <a:off x="406301" y="870942"/>
-            <a:ext cx="8498026" cy="213271"/>
-          </a:xfrm>
-          <a:prstGeom prst="rect">
-            <a:avLst/>
-          </a:prstGeom>
-          <a:noFill/>
-          <a:ln/>
-        </p:spPr>
-        <p:txBody>
-          <a:bodyPr wrap="square" lIns="0" tIns="0" rIns="0" bIns="0" rtlCol="0" anchor="t"/>
-          <a:lstStyle/>
-          <a:p>
-            <a:pPr algn="l" indent="0" marL="0">
-              <a:lnSpc>
-                <a:spcPts val="1680"/>
-              </a:lnSpc>
-              <a:spcBef>
-                <a:spcPts val="300"/>
-              </a:spcBef>
-              <a:spcAft>
-                <a:spcPts val="300"/>
-              </a:spcAft>
-              <a:buNone/>
-            </a:pPr>
-            <a:r>
-              <a:rPr lang="en-US" sz="1200" dirty="0">
-                <a:solidFill>
-                  <a:srgbClr val="1C2833"/>
-                </a:solidFill>
-                <a:latin typeface="Arial" pitchFamily="34" charset="0"/>
-                <a:ea typeface="Arial" pitchFamily="34" charset="-122"/>
-                <a:cs typeface="Arial" pitchFamily="34" charset="-120"/>
-              </a:rPr>
-              <a:t>– Recall chant: </a:t>
-            </a:r>
-            <a:pPr algn="l" indent="0" marL="0">
-              <a:lnSpc>
-                <a:spcPts val="1680"/>
-              </a:lnSpc>
-              <a:spcBef>
-                <a:spcPts val="300"/>
-              </a:spcBef>
-              <a:spcAft>
-                <a:spcPts val="300"/>
-              </a:spcAft>
-              <a:buNone/>
-            </a:pPr>
-            <a:r>
-              <a:rPr lang="en-US" sz="1200" i="1" dirty="0">
-                <a:solidFill>
-                  <a:srgbClr val="1C2833"/>
-                </a:solidFill>
-                <a:latin typeface="Arial" pitchFamily="34" charset="0"/>
-                <a:ea typeface="Arial" pitchFamily="34" charset="-122"/>
-                <a:cs typeface="Arial" pitchFamily="34" charset="-120"/>
-              </a:rPr>
-              <a:t>"3×3 square with 1 to 9 — magic constant is ____?"</a:t>
-            </a:r>
-            <a:pPr algn="l" indent="0" marL="0">
-              <a:lnSpc>
-                <a:spcPts val="1680"/>
-              </a:lnSpc>
-              <a:spcBef>
-                <a:spcPts val="300"/>
-              </a:spcBef>
-              <a:spcAft>
-                <a:spcPts val="300"/>
-              </a:spcAft>
-              <a:buNone/>
-            </a:pPr>
-            <a:r>
-              <a:rPr lang="en-US" sz="1200" dirty="0">
-                <a:solidFill>
-                  <a:srgbClr val="1C2833"/>
-                </a:solidFill>
-                <a:latin typeface="Arial" pitchFamily="34" charset="0"/>
-                <a:ea typeface="Arial" pitchFamily="34" charset="-122"/>
-                <a:cs typeface="Arial" pitchFamily="34" charset="-120"/>
-              </a:rPr>
-              <a:t> Class: "15."</a:t>
-            </a:r>
-            <a:endParaRPr lang="en-US" sz="1200" dirty="0"/>
-          </a:p>
-        </p:txBody>
-      </p:sp>
-      <p:sp>
-        <p:nvSpPr>
-          <p:cNvPr id="5" name="Text 3"/>
-          <p:cNvSpPr/>
-          <p:nvPr/>
-        </p:nvSpPr>
-        <p:spPr>
-          <a:xfrm>
-            <a:off x="634901" y="1173063"/>
-            <a:ext cx="8102798" cy="281880"/>
-          </a:xfrm>
-          <a:prstGeom prst="rect">
-            <a:avLst/>
-          </a:prstGeom>
-          <a:noFill/>
-          <a:ln/>
-        </p:spPr>
-        <p:txBody>
-          <a:bodyPr wrap="square" lIns="0" tIns="0" rIns="0" bIns="0" rtlCol="0" anchor="t"/>
-          <a:lstStyle/>
-          <a:p>
-            <a:pPr algn="l" marL="342900" indent="-342900">
-              <a:lnSpc>
-                <a:spcPts val="1620"/>
-              </a:lnSpc>
-              <a:spcAft>
-                <a:spcPts val="300"/>
-              </a:spcAft>
-              <a:buSzPct val="100000"/>
-              <a:buChar char="•"/>
-            </a:pPr>
-            <a:r>
-              <a:rPr lang="en-US" sz="1200" i="1" dirty="0">
-                <a:solidFill>
-                  <a:srgbClr val="1C2833"/>
-                </a:solidFill>
-                <a:latin typeface="Arial" pitchFamily="34" charset="0"/>
-                <a:ea typeface="Arial" pitchFamily="34" charset="-122"/>
-                <a:cs typeface="Arial" pitchFamily="34" charset="-120"/>
-              </a:rPr>
-              <a:t>"Why exactly 15, though? Why not 14 or 17?"</a:t>
-            </a:r>
-            <a:pPr algn="l" indent="0" marL="0">
-              <a:lnSpc>
-                <a:spcPts val="1620"/>
-              </a:lnSpc>
-              <a:spcAft>
-                <a:spcPts val="300"/>
-              </a:spcAft>
-              <a:buNone/>
-            </a:pPr>
-            <a:r>
-              <a:rPr lang="en-US" sz="1200" dirty="0">
-                <a:solidFill>
-                  <a:srgbClr val="1C2833"/>
-                </a:solidFill>
-                <a:latin typeface="Arial" pitchFamily="34" charset="0"/>
-                <a:ea typeface="Arial" pitchFamily="34" charset="-122"/>
-                <a:cs typeface="Arial" pitchFamily="34" charset="-120"/>
-              </a:rPr>
-              <a:t> Take 2 student responses.</a:t>
-            </a:r>
-            <a:endParaRPr lang="en-US" sz="1200" dirty="0"/>
-          </a:p>
-        </p:txBody>
-      </p:sp>
-      <p:sp>
-        <p:nvSpPr>
-          <p:cNvPr id="6" name="Text 4"/>
           <p:cNvSpPr/>
           <p:nvPr/>
         </p:nvSpPr>
@@ -5237,7 +8201,7 @@
                 <a:ea typeface="Georgia" pitchFamily="34" charset="-122"/>
                 <a:cs typeface="Georgia" pitchFamily="34" charset="-120"/>
               </a:rPr>
-              <a:t>Core (20 min)</a:t>
+              <a:t>Warm-up (5 min)</a:t>
             </a:r>
             <a:endParaRPr lang="en-US" sz="1800" dirty="0"/>
           </a:p>
@@ -5252,7 +8216,7 @@
         <p:spPr>
           <a:xfrm>
             <a:off x="634901" y="883593"/>
-            <a:ext cx="8102798" cy="281880"/>
+            <a:ext cx="8102798" cy="525661"/>
           </a:xfrm>
           <a:prstGeom prst="rect">
             <a:avLst/>
@@ -5275,26 +8239,6 @@
               <a:buChar char="•"/>
             </a:pPr>
             <a:r>
-              <a:rPr lang="en-US" sz="1200" b="1" dirty="0">
-                <a:solidFill>
-                  <a:srgbClr val="1C2833"/>
-                </a:solidFill>
-                <a:latin typeface="Arial" pitchFamily="34" charset="0"/>
-                <a:ea typeface="Arial" pitchFamily="34" charset="-122"/>
-                <a:cs typeface="Arial" pitchFamily="34" charset="-120"/>
-              </a:rPr>
-              <a:t>The sum argument.</a:t>
-            </a:r>
-            <a:pPr algn="l" indent="0" marL="0">
-              <a:lnSpc>
-                <a:spcPts val="1620"/>
-              </a:lnSpc>
-              <a:spcAft>
-                <a:spcPts val="300"/>
-              </a:spcAft>
-              <a:buNone/>
-            </a:pPr>
-            <a:r>
               <a:rPr lang="en-US" sz="1200" dirty="0">
                 <a:solidFill>
                   <a:srgbClr val="1C2833"/>
@@ -5303,7 +8247,91 @@
                 <a:ea typeface="Arial" pitchFamily="34" charset="-122"/>
                 <a:cs typeface="Arial" pitchFamily="34" charset="-120"/>
               </a:rPr>
-              <a:t> Write on the board:</a:t>
+              <a:t>Recall chant: </a:t>
+            </a:r>
+            <a:pPr algn="l" indent="0" marL="0">
+              <a:lnSpc>
+                <a:spcPts val="1620"/>
+              </a:lnSpc>
+              <a:spcAft>
+                <a:spcPts val="300"/>
+              </a:spcAft>
+              <a:buNone/>
+            </a:pPr>
+            <a:r>
+              <a:rPr lang="en-US" sz="1200" i="1" dirty="0">
+                <a:solidFill>
+                  <a:srgbClr val="1C2833"/>
+                </a:solidFill>
+                <a:latin typeface="Arial" pitchFamily="34" charset="0"/>
+                <a:ea typeface="Arial" pitchFamily="34" charset="-122"/>
+                <a:cs typeface="Arial" pitchFamily="34" charset="-120"/>
+              </a:rPr>
+              <a:t>"3×3 square with 1 to 9 — magic constant is ____?"</a:t>
+            </a:r>
+            <a:pPr algn="l" indent="0" marL="0">
+              <a:lnSpc>
+                <a:spcPts val="1620"/>
+              </a:lnSpc>
+              <a:spcAft>
+                <a:spcPts val="300"/>
+              </a:spcAft>
+              <a:buNone/>
+            </a:pPr>
+            <a:r>
+              <a:rPr lang="en-US" sz="1200" dirty="0">
+                <a:solidFill>
+                  <a:srgbClr val="1C2833"/>
+                </a:solidFill>
+                <a:latin typeface="Arial" pitchFamily="34" charset="0"/>
+                <a:ea typeface="Arial" pitchFamily="34" charset="-122"/>
+                <a:cs typeface="Arial" pitchFamily="34" charset="-120"/>
+              </a:rPr>
+              <a:t> Class: "15."</a:t>
+            </a:r>
+            <a:endParaRPr lang="en-US" sz="1200" dirty="0"/>
+          </a:p>
+          <a:p>
+            <a:pPr algn="l" marL="342900" indent="-342900">
+              <a:lnSpc>
+                <a:spcPts val="1620"/>
+              </a:lnSpc>
+              <a:spcAft>
+                <a:spcPts val="300"/>
+              </a:spcAft>
+              <a:buSzPct val="100000"/>
+              <a:buChar char="•"/>
+            </a:pPr>
+            <a:r>
+              <a:rPr lang="en-US" sz="1200" i="1" dirty="0">
+                <a:solidFill>
+                  <a:srgbClr val="1C2833"/>
+                </a:solidFill>
+                <a:latin typeface="Arial" pitchFamily="34" charset="0"/>
+                <a:ea typeface="Arial" pitchFamily="34" charset="-122"/>
+                <a:cs typeface="Arial" pitchFamily="34" charset="-120"/>
+              </a:rPr>
+              <a:t>"Why exactly 15, though? Why not 14 or 17?"</a:t>
+            </a:r>
+            <a:pPr algn="l" indent="0" marL="0">
+              <a:lnSpc>
+                <a:spcPts val="1620"/>
+              </a:lnSpc>
+              <a:spcAft>
+                <a:spcPts val="300"/>
+              </a:spcAft>
+              <a:buNone/>
+            </a:pPr>
+            <a:r>
+              <a:rPr lang="en-US" sz="1200" dirty="0">
+                <a:solidFill>
+                  <a:srgbClr val="1C2833"/>
+                </a:solidFill>
+                <a:latin typeface="Arial" pitchFamily="34" charset="0"/>
+                <a:ea typeface="Arial" pitchFamily="34" charset="-122"/>
+                <a:cs typeface="Arial" pitchFamily="34" charset="-120"/>
+              </a:rPr>
+              <a:t> Take 2 student responses.</a:t>
             </a:r>
             <a:endParaRPr lang="en-US" sz="1200" dirty="0"/>
           </a:p>
@@ -5317,1754 +8345,7 @@
         </p:nvSpPr>
         <p:spPr>
           <a:xfrm>
-            <a:off x="406301" y="1254323"/>
-            <a:ext cx="8498026" cy="213271"/>
-          </a:xfrm>
-          <a:prstGeom prst="rect">
-            <a:avLst/>
-          </a:prstGeom>
-          <a:noFill/>
-          <a:ln/>
-        </p:spPr>
-        <p:txBody>
-          <a:bodyPr wrap="square" lIns="0" tIns="0" rIns="0" bIns="0" rtlCol="0" anchor="t"/>
-          <a:lstStyle/>
-          <a:p>
-            <a:pPr algn="l" indent="0" marL="0">
-              <a:lnSpc>
-                <a:spcPts val="1680"/>
-              </a:lnSpc>
-              <a:spcBef>
-                <a:spcPts val="300"/>
-              </a:spcBef>
-              <a:spcAft>
-                <a:spcPts val="300"/>
-              </a:spcAft>
-              <a:buNone/>
-            </a:pPr>
-            <a:r>
-              <a:rPr lang="en-US" sz="1200" dirty="0">
-                <a:solidFill>
-                  <a:srgbClr val="1C2833"/>
-                </a:solidFill>
-                <a:latin typeface="Arial" pitchFamily="34" charset="0"/>
-                <a:ea typeface="Arial" pitchFamily="34" charset="-122"/>
-                <a:cs typeface="Arial" pitchFamily="34" charset="-120"/>
-              </a:rPr>
-              <a:t>&gt; Add up all the numbers in the square: 1 + 2 + 3 + 4 + 5 + 6 + 7 + 8 + 9 = 45.</a:t>
-            </a:r>
-            <a:endParaRPr lang="en-US" sz="1200" dirty="0"/>
-          </a:p>
-        </p:txBody>
-      </p:sp>
-      <p:sp>
-        <p:nvSpPr>
-          <p:cNvPr id="6" name="Text 4"/>
-          <p:cNvSpPr/>
-          <p:nvPr/>
-        </p:nvSpPr>
-        <p:spPr>
-          <a:xfrm>
-            <a:off x="406301" y="1543794"/>
-            <a:ext cx="8498026" cy="426541"/>
-          </a:xfrm>
-          <a:prstGeom prst="rect">
-            <a:avLst/>
-          </a:prstGeom>
-          <a:noFill/>
-          <a:ln/>
-        </p:spPr>
-        <p:txBody>
-          <a:bodyPr wrap="square" lIns="0" tIns="0" rIns="0" bIns="0" rtlCol="0" anchor="t"/>
-          <a:lstStyle/>
-          <a:p>
-            <a:pPr algn="l" indent="0" marL="0">
-              <a:lnSpc>
-                <a:spcPts val="1680"/>
-              </a:lnSpc>
-              <a:spcBef>
-                <a:spcPts val="300"/>
-              </a:spcBef>
-              <a:spcAft>
-                <a:spcPts val="300"/>
-              </a:spcAft>
-              <a:buNone/>
-            </a:pPr>
-            <a:r>
-              <a:rPr lang="en-US" sz="1200" i="1" dirty="0">
-                <a:solidFill>
-                  <a:srgbClr val="1C2833"/>
-                </a:solidFill>
-                <a:latin typeface="Arial" pitchFamily="34" charset="0"/>
-                <a:ea typeface="Arial" pitchFamily="34" charset="-122"/>
-                <a:cs typeface="Arial" pitchFamily="34" charset="-120"/>
-              </a:rPr>
-              <a:t>"This total goes into the square once. Now — the square has 3 rows. Each row has the same sum S. So 3 × S = 45 → S = 15."</a:t>
-            </a:r>
-            <a:endParaRPr lang="en-US" sz="1200" dirty="0"/>
-          </a:p>
-        </p:txBody>
-      </p:sp>
-      <p:sp>
-        <p:nvSpPr>
-          <p:cNvPr id="7" name="Text 5"/>
-          <p:cNvSpPr/>
-          <p:nvPr/>
-        </p:nvSpPr>
-        <p:spPr>
-          <a:xfrm>
-            <a:off x="406301" y="2046536"/>
-            <a:ext cx="8498026" cy="213271"/>
-          </a:xfrm>
-          <a:prstGeom prst="rect">
-            <a:avLst/>
-          </a:prstGeom>
-          <a:noFill/>
-          <a:ln/>
-        </p:spPr>
-        <p:txBody>
-          <a:bodyPr wrap="square" lIns="0" tIns="0" rIns="0" bIns="0" rtlCol="0" anchor="t"/>
-          <a:lstStyle/>
-          <a:p>
-            <a:pPr algn="l" indent="0" marL="0">
-              <a:lnSpc>
-                <a:spcPts val="1680"/>
-              </a:lnSpc>
-              <a:spcBef>
-                <a:spcPts val="300"/>
-              </a:spcBef>
-              <a:spcAft>
-                <a:spcPts val="300"/>
-              </a:spcAft>
-              <a:buNone/>
-            </a:pPr>
-            <a:r>
-              <a:rPr lang="en-US" sz="1200" dirty="0">
-                <a:solidFill>
-                  <a:srgbClr val="1C2833"/>
-                </a:solidFill>
-                <a:latin typeface="Arial" pitchFamily="34" charset="0"/>
-                <a:ea typeface="Arial" pitchFamily="34" charset="-122"/>
-                <a:cs typeface="Arial" pitchFamily="34" charset="-120"/>
-              </a:rPr>
-              <a:t>Repeat the logic with student input. They should arrive at the formula step-by-step.</a:t>
-            </a:r>
-            <a:endParaRPr lang="en-US" sz="1200" dirty="0"/>
-          </a:p>
-        </p:txBody>
-      </p:sp>
-      <p:sp>
-        <p:nvSpPr>
-          <p:cNvPr id="8" name="Text 6"/>
-          <p:cNvSpPr/>
-          <p:nvPr/>
-        </p:nvSpPr>
-        <p:spPr>
-          <a:xfrm>
-            <a:off x="634901" y="2348657"/>
-            <a:ext cx="8102798" cy="281880"/>
-          </a:xfrm>
-          <a:prstGeom prst="rect">
-            <a:avLst/>
-          </a:prstGeom>
-          <a:noFill/>
-          <a:ln/>
-        </p:spPr>
-        <p:txBody>
-          <a:bodyPr wrap="square" lIns="0" tIns="0" rIns="0" bIns="0" rtlCol="0" anchor="t"/>
-          <a:lstStyle/>
-          <a:p>
-            <a:pPr algn="l" marL="342900" indent="-342900">
-              <a:lnSpc>
-                <a:spcPts val="1620"/>
-              </a:lnSpc>
-              <a:spcAft>
-                <a:spcPts val="300"/>
-              </a:spcAft>
-              <a:buSzPct val="100000"/>
-              <a:buChar char="•"/>
-            </a:pPr>
-            <a:r>
-              <a:rPr lang="en-US" sz="1200" b="1" dirty="0">
-                <a:solidFill>
-                  <a:srgbClr val="1C2833"/>
-                </a:solidFill>
-                <a:latin typeface="Arial" pitchFamily="34" charset="0"/>
-                <a:ea typeface="Arial" pitchFamily="34" charset="-122"/>
-                <a:cs typeface="Arial" pitchFamily="34" charset="-120"/>
-              </a:rPr>
-              <a:t>Generalise.</a:t>
-            </a:r>
-            <a:pPr algn="l" indent="0" marL="0">
-              <a:lnSpc>
-                <a:spcPts val="1620"/>
-              </a:lnSpc>
-              <a:spcAft>
-                <a:spcPts val="300"/>
-              </a:spcAft>
-              <a:buNone/>
-            </a:pPr>
-            <a:r>
-              <a:rPr lang="en-US" sz="1200" dirty="0">
-                <a:solidFill>
-                  <a:srgbClr val="1C2833"/>
-                </a:solidFill>
-                <a:latin typeface="Arial" pitchFamily="34" charset="0"/>
-                <a:ea typeface="Arial" pitchFamily="34" charset="-122"/>
-                <a:cs typeface="Arial" pitchFamily="34" charset="-120"/>
-              </a:rPr>
-              <a:t> For an </a:t>
-            </a:r>
-            <a:pPr algn="l" indent="0" marL="0">
-              <a:lnSpc>
-                <a:spcPts val="1620"/>
-              </a:lnSpc>
-              <a:spcAft>
-                <a:spcPts val="300"/>
-              </a:spcAft>
-              <a:buNone/>
-            </a:pPr>
-            <a:r>
-              <a:rPr lang="en-US" sz="1200" i="1" dirty="0">
-                <a:solidFill>
-                  <a:srgbClr val="1C2833"/>
-                </a:solidFill>
-                <a:latin typeface="Arial" pitchFamily="34" charset="0"/>
-                <a:ea typeface="Arial" pitchFamily="34" charset="-122"/>
-                <a:cs typeface="Arial" pitchFamily="34" charset="-120"/>
-              </a:rPr>
-              <a:t>n × n</a:t>
-            </a:r>
-            <a:pPr algn="l" indent="0" marL="0">
-              <a:lnSpc>
-                <a:spcPts val="1620"/>
-              </a:lnSpc>
-              <a:spcAft>
-                <a:spcPts val="300"/>
-              </a:spcAft>
-              <a:buNone/>
-            </a:pPr>
-            <a:r>
-              <a:rPr lang="en-US" sz="1200" dirty="0">
-                <a:solidFill>
-                  <a:srgbClr val="1C2833"/>
-                </a:solidFill>
-                <a:latin typeface="Arial" pitchFamily="34" charset="0"/>
-                <a:ea typeface="Arial" pitchFamily="34" charset="-122"/>
-                <a:cs typeface="Arial" pitchFamily="34" charset="-120"/>
-              </a:rPr>
-              <a:t> square containing the numbers 1, 2, ..., </a:t>
-            </a:r>
-            <a:pPr algn="l" indent="0" marL="0">
-              <a:lnSpc>
-                <a:spcPts val="1620"/>
-              </a:lnSpc>
-              <a:spcAft>
-                <a:spcPts val="300"/>
-              </a:spcAft>
-              <a:buNone/>
-            </a:pPr>
-            <a:r>
-              <a:rPr lang="en-US" sz="1200" i="1" dirty="0">
-                <a:solidFill>
-                  <a:srgbClr val="1C2833"/>
-                </a:solidFill>
-                <a:latin typeface="Arial" pitchFamily="34" charset="0"/>
-                <a:ea typeface="Arial" pitchFamily="34" charset="-122"/>
-                <a:cs typeface="Arial" pitchFamily="34" charset="-120"/>
-              </a:rPr>
-              <a:t>n</a:t>
-            </a:r>
-            <a:pPr algn="l" indent="0" marL="0">
-              <a:lnSpc>
-                <a:spcPts val="1620"/>
-              </a:lnSpc>
-              <a:spcAft>
-                <a:spcPts val="300"/>
-              </a:spcAft>
-              <a:buNone/>
-            </a:pPr>
-            <a:r>
-              <a:rPr lang="en-US" sz="1200" dirty="0">
-                <a:solidFill>
-                  <a:srgbClr val="1C2833"/>
-                </a:solidFill>
-                <a:latin typeface="Arial" pitchFamily="34" charset="0"/>
-                <a:ea typeface="Arial" pitchFamily="34" charset="-122"/>
-                <a:cs typeface="Arial" pitchFamily="34" charset="-120"/>
-              </a:rPr>
-              <a:t>²:</a:t>
-            </a:r>
-            <a:endParaRPr lang="en-US" sz="1200" dirty="0"/>
-          </a:p>
-        </p:txBody>
-      </p:sp>
-      <p:sp>
-        <p:nvSpPr>
-          <p:cNvPr id="9" name="Text 7"/>
-          <p:cNvSpPr/>
-          <p:nvPr/>
-        </p:nvSpPr>
-        <p:spPr>
-          <a:xfrm>
-            <a:off x="406301" y="2719388"/>
-            <a:ext cx="8498026" cy="426541"/>
-          </a:xfrm>
-          <a:prstGeom prst="rect">
-            <a:avLst/>
-          </a:prstGeom>
-          <a:noFill/>
-          <a:ln/>
-        </p:spPr>
-        <p:txBody>
-          <a:bodyPr wrap="square" lIns="0" tIns="0" rIns="0" bIns="0" rtlCol="0" anchor="t"/>
-          <a:lstStyle/>
-          <a:p>
-            <a:pPr algn="l" indent="0" marL="0">
-              <a:lnSpc>
-                <a:spcPts val="1680"/>
-              </a:lnSpc>
-              <a:spcBef>
-                <a:spcPts val="300"/>
-              </a:spcBef>
-              <a:spcAft>
-                <a:spcPts val="300"/>
-              </a:spcAft>
-              <a:buNone/>
-            </a:pPr>
-            <a:r>
-              <a:rPr lang="en-US" sz="1200" dirty="0">
-                <a:solidFill>
-                  <a:srgbClr val="1C2833"/>
-                </a:solidFill>
-                <a:latin typeface="Arial" pitchFamily="34" charset="0"/>
-                <a:ea typeface="Arial" pitchFamily="34" charset="-122"/>
-                <a:cs typeface="Arial" pitchFamily="34" charset="-120"/>
-              </a:rPr>
-              <a:t>&gt; Sum of all numbers = 1 + 2 + ... + </a:t>
-            </a:r>
-            <a:pPr algn="l" indent="0" marL="0">
-              <a:lnSpc>
-                <a:spcPts val="1680"/>
-              </a:lnSpc>
-              <a:spcBef>
-                <a:spcPts val="300"/>
-              </a:spcBef>
-              <a:spcAft>
-                <a:spcPts val="300"/>
-              </a:spcAft>
-              <a:buNone/>
-            </a:pPr>
-            <a:r>
-              <a:rPr lang="en-US" sz="1200" i="1" dirty="0">
-                <a:solidFill>
-                  <a:srgbClr val="1C2833"/>
-                </a:solidFill>
-                <a:latin typeface="Arial" pitchFamily="34" charset="0"/>
-                <a:ea typeface="Arial" pitchFamily="34" charset="-122"/>
-                <a:cs typeface="Arial" pitchFamily="34" charset="-120"/>
-              </a:rPr>
-              <a:t>n</a:t>
-            </a:r>
-            <a:pPr algn="l" indent="0" marL="0">
-              <a:lnSpc>
-                <a:spcPts val="1680"/>
-              </a:lnSpc>
-              <a:spcBef>
-                <a:spcPts val="300"/>
-              </a:spcBef>
-              <a:spcAft>
-                <a:spcPts val="300"/>
-              </a:spcAft>
-              <a:buNone/>
-            </a:pPr>
-            <a:r>
-              <a:rPr lang="en-US" sz="1200" dirty="0">
-                <a:solidFill>
-                  <a:srgbClr val="1C2833"/>
-                </a:solidFill>
-                <a:latin typeface="Arial" pitchFamily="34" charset="0"/>
-                <a:ea typeface="Arial" pitchFamily="34" charset="-122"/>
-                <a:cs typeface="Arial" pitchFamily="34" charset="-120"/>
-              </a:rPr>
-              <a:t>² = </a:t>
-            </a:r>
-            <a:pPr algn="l" indent="0" marL="0">
-              <a:lnSpc>
-                <a:spcPts val="1680"/>
-              </a:lnSpc>
-              <a:spcBef>
-                <a:spcPts val="300"/>
-              </a:spcBef>
-              <a:spcAft>
-                <a:spcPts val="300"/>
-              </a:spcAft>
-              <a:buNone/>
-            </a:pPr>
-            <a:r>
-              <a:rPr lang="en-US" sz="1200" i="1" dirty="0">
-                <a:solidFill>
-                  <a:srgbClr val="1C2833"/>
-                </a:solidFill>
-                <a:latin typeface="Arial" pitchFamily="34" charset="0"/>
-                <a:ea typeface="Arial" pitchFamily="34" charset="-122"/>
-                <a:cs typeface="Arial" pitchFamily="34" charset="-120"/>
-              </a:rPr>
-              <a:t>n</a:t>
-            </a:r>
-            <a:pPr algn="l" indent="0" marL="0">
-              <a:lnSpc>
-                <a:spcPts val="1680"/>
-              </a:lnSpc>
-              <a:spcBef>
-                <a:spcPts val="300"/>
-              </a:spcBef>
-              <a:spcAft>
-                <a:spcPts val="300"/>
-              </a:spcAft>
-              <a:buNone/>
-            </a:pPr>
-            <a:r>
-              <a:rPr lang="en-US" sz="1200" dirty="0">
-                <a:solidFill>
-                  <a:srgbClr val="1C2833"/>
-                </a:solidFill>
-                <a:latin typeface="Arial" pitchFamily="34" charset="0"/>
-                <a:ea typeface="Arial" pitchFamily="34" charset="-122"/>
-                <a:cs typeface="Arial" pitchFamily="34" charset="-120"/>
-              </a:rPr>
-              <a:t>²(</a:t>
-            </a:r>
-            <a:pPr algn="l" indent="0" marL="0">
-              <a:lnSpc>
-                <a:spcPts val="1680"/>
-              </a:lnSpc>
-              <a:spcBef>
-                <a:spcPts val="300"/>
-              </a:spcBef>
-              <a:spcAft>
-                <a:spcPts val="300"/>
-              </a:spcAft>
-              <a:buNone/>
-            </a:pPr>
-            <a:r>
-              <a:rPr lang="en-US" sz="1200" i="1" dirty="0">
-                <a:solidFill>
-                  <a:srgbClr val="1C2833"/>
-                </a:solidFill>
-                <a:latin typeface="Arial" pitchFamily="34" charset="0"/>
-                <a:ea typeface="Arial" pitchFamily="34" charset="-122"/>
-                <a:cs typeface="Arial" pitchFamily="34" charset="-120"/>
-              </a:rPr>
-              <a:t>n</a:t>
-            </a:r>
-            <a:pPr algn="l" indent="0" marL="0">
-              <a:lnSpc>
-                <a:spcPts val="1680"/>
-              </a:lnSpc>
-              <a:spcBef>
-                <a:spcPts val="300"/>
-              </a:spcBef>
-              <a:spcAft>
-                <a:spcPts val="300"/>
-              </a:spcAft>
-              <a:buNone/>
-            </a:pPr>
-            <a:r>
-              <a:rPr lang="en-US" sz="1200" dirty="0">
-                <a:solidFill>
-                  <a:srgbClr val="1C2833"/>
-                </a:solidFill>
-                <a:latin typeface="Arial" pitchFamily="34" charset="0"/>
-                <a:ea typeface="Arial" pitchFamily="34" charset="-122"/>
-                <a:cs typeface="Arial" pitchFamily="34" charset="-120"/>
-              </a:rPr>
-              <a:t>² + 1) / 2 &gt; &gt; The square has </a:t>
-            </a:r>
-            <a:pPr algn="l" indent="0" marL="0">
-              <a:lnSpc>
-                <a:spcPts val="1680"/>
-              </a:lnSpc>
-              <a:spcBef>
-                <a:spcPts val="300"/>
-              </a:spcBef>
-              <a:spcAft>
-                <a:spcPts val="300"/>
-              </a:spcAft>
-              <a:buNone/>
-            </a:pPr>
-            <a:r>
-              <a:rPr lang="en-US" sz="1200" i="1" dirty="0">
-                <a:solidFill>
-                  <a:srgbClr val="1C2833"/>
-                </a:solidFill>
-                <a:latin typeface="Arial" pitchFamily="34" charset="0"/>
-                <a:ea typeface="Arial" pitchFamily="34" charset="-122"/>
-                <a:cs typeface="Arial" pitchFamily="34" charset="-120"/>
-              </a:rPr>
-              <a:t>n</a:t>
-            </a:r>
-            <a:pPr algn="l" indent="0" marL="0">
-              <a:lnSpc>
-                <a:spcPts val="1680"/>
-              </a:lnSpc>
-              <a:spcBef>
-                <a:spcPts val="300"/>
-              </a:spcBef>
-              <a:spcAft>
-                <a:spcPts val="300"/>
-              </a:spcAft>
-              <a:buNone/>
-            </a:pPr>
-            <a:r>
-              <a:rPr lang="en-US" sz="1200" dirty="0">
-                <a:solidFill>
-                  <a:srgbClr val="1C2833"/>
-                </a:solidFill>
-                <a:latin typeface="Arial" pitchFamily="34" charset="0"/>
-                <a:ea typeface="Arial" pitchFamily="34" charset="-122"/>
-                <a:cs typeface="Arial" pitchFamily="34" charset="-120"/>
-              </a:rPr>
-              <a:t> rows, each summing to </a:t>
-            </a:r>
-            <a:pPr algn="l" indent="0" marL="0">
-              <a:lnSpc>
-                <a:spcPts val="1680"/>
-              </a:lnSpc>
-              <a:spcBef>
-                <a:spcPts val="300"/>
-              </a:spcBef>
-              <a:spcAft>
-                <a:spcPts val="300"/>
-              </a:spcAft>
-              <a:buNone/>
-            </a:pPr>
-            <a:r>
-              <a:rPr lang="en-US" sz="1200" i="1" dirty="0">
-                <a:solidFill>
-                  <a:srgbClr val="1C2833"/>
-                </a:solidFill>
-                <a:latin typeface="Arial" pitchFamily="34" charset="0"/>
-                <a:ea typeface="Arial" pitchFamily="34" charset="-122"/>
-                <a:cs typeface="Arial" pitchFamily="34" charset="-120"/>
-              </a:rPr>
-              <a:t>S</a:t>
-            </a:r>
-            <a:pPr algn="l" indent="0" marL="0">
-              <a:lnSpc>
-                <a:spcPts val="1680"/>
-              </a:lnSpc>
-              <a:spcBef>
-                <a:spcPts val="300"/>
-              </a:spcBef>
-              <a:spcAft>
-                <a:spcPts val="300"/>
-              </a:spcAft>
-              <a:buNone/>
-            </a:pPr>
-            <a:r>
-              <a:rPr lang="en-US" sz="1200" dirty="0">
-                <a:solidFill>
-                  <a:srgbClr val="1C2833"/>
-                </a:solidFill>
-                <a:latin typeface="Arial" pitchFamily="34" charset="0"/>
-                <a:ea typeface="Arial" pitchFamily="34" charset="-122"/>
-                <a:cs typeface="Arial" pitchFamily="34" charset="-120"/>
-              </a:rPr>
-              <a:t>. So: &gt; &gt; </a:t>
-            </a:r>
-            <a:pPr algn="l" indent="0" marL="0">
-              <a:lnSpc>
-                <a:spcPts val="1680"/>
-              </a:lnSpc>
-              <a:spcBef>
-                <a:spcPts val="300"/>
-              </a:spcBef>
-              <a:spcAft>
-                <a:spcPts val="300"/>
-              </a:spcAft>
-              <a:buNone/>
-            </a:pPr>
-            <a:r>
-              <a:rPr lang="en-US" sz="1200" i="1" dirty="0">
-                <a:solidFill>
-                  <a:srgbClr val="1C2833"/>
-                </a:solidFill>
-                <a:latin typeface="Arial" pitchFamily="34" charset="0"/>
-                <a:ea typeface="Arial" pitchFamily="34" charset="-122"/>
-                <a:cs typeface="Arial" pitchFamily="34" charset="-120"/>
-              </a:rPr>
-              <a:t>n</a:t>
-            </a:r>
-            <a:pPr algn="l" indent="0" marL="0">
-              <a:lnSpc>
-                <a:spcPts val="1680"/>
-              </a:lnSpc>
-              <a:spcBef>
-                <a:spcPts val="300"/>
-              </a:spcBef>
-              <a:spcAft>
-                <a:spcPts val="300"/>
-              </a:spcAft>
-              <a:buNone/>
-            </a:pPr>
-            <a:r>
-              <a:rPr lang="en-US" sz="1200" dirty="0">
-                <a:solidFill>
-                  <a:srgbClr val="1C2833"/>
-                </a:solidFill>
-                <a:latin typeface="Arial" pitchFamily="34" charset="0"/>
-                <a:ea typeface="Arial" pitchFamily="34" charset="-122"/>
-                <a:cs typeface="Arial" pitchFamily="34" charset="-120"/>
-              </a:rPr>
-              <a:t> × </a:t>
-            </a:r>
-            <a:pPr algn="l" indent="0" marL="0">
-              <a:lnSpc>
-                <a:spcPts val="1680"/>
-              </a:lnSpc>
-              <a:spcBef>
-                <a:spcPts val="300"/>
-              </a:spcBef>
-              <a:spcAft>
-                <a:spcPts val="300"/>
-              </a:spcAft>
-              <a:buNone/>
-            </a:pPr>
-            <a:r>
-              <a:rPr lang="en-US" sz="1200" i="1" dirty="0">
-                <a:solidFill>
-                  <a:srgbClr val="1C2833"/>
-                </a:solidFill>
-                <a:latin typeface="Arial" pitchFamily="34" charset="0"/>
-                <a:ea typeface="Arial" pitchFamily="34" charset="-122"/>
-                <a:cs typeface="Arial" pitchFamily="34" charset="-120"/>
-              </a:rPr>
-              <a:t>S</a:t>
-            </a:r>
-            <a:pPr algn="l" indent="0" marL="0">
-              <a:lnSpc>
-                <a:spcPts val="1680"/>
-              </a:lnSpc>
-              <a:spcBef>
-                <a:spcPts val="300"/>
-              </a:spcBef>
-              <a:spcAft>
-                <a:spcPts val="300"/>
-              </a:spcAft>
-              <a:buNone/>
-            </a:pPr>
-            <a:r>
-              <a:rPr lang="en-US" sz="1200" dirty="0">
-                <a:solidFill>
-                  <a:srgbClr val="1C2833"/>
-                </a:solidFill>
-                <a:latin typeface="Arial" pitchFamily="34" charset="0"/>
-                <a:ea typeface="Arial" pitchFamily="34" charset="-122"/>
-                <a:cs typeface="Arial" pitchFamily="34" charset="-120"/>
-              </a:rPr>
-              <a:t> = </a:t>
-            </a:r>
-            <a:pPr algn="l" indent="0" marL="0">
-              <a:lnSpc>
-                <a:spcPts val="1680"/>
-              </a:lnSpc>
-              <a:spcBef>
-                <a:spcPts val="300"/>
-              </a:spcBef>
-              <a:spcAft>
-                <a:spcPts val="300"/>
-              </a:spcAft>
-              <a:buNone/>
-            </a:pPr>
-            <a:r>
-              <a:rPr lang="en-US" sz="1200" i="1" dirty="0">
-                <a:solidFill>
-                  <a:srgbClr val="1C2833"/>
-                </a:solidFill>
-                <a:latin typeface="Arial" pitchFamily="34" charset="0"/>
-                <a:ea typeface="Arial" pitchFamily="34" charset="-122"/>
-                <a:cs typeface="Arial" pitchFamily="34" charset="-120"/>
-              </a:rPr>
-              <a:t>n</a:t>
-            </a:r>
-            <a:pPr algn="l" indent="0" marL="0">
-              <a:lnSpc>
-                <a:spcPts val="1680"/>
-              </a:lnSpc>
-              <a:spcBef>
-                <a:spcPts val="300"/>
-              </a:spcBef>
-              <a:spcAft>
-                <a:spcPts val="300"/>
-              </a:spcAft>
-              <a:buNone/>
-            </a:pPr>
-            <a:r>
-              <a:rPr lang="en-US" sz="1200" dirty="0">
-                <a:solidFill>
-                  <a:srgbClr val="1C2833"/>
-                </a:solidFill>
-                <a:latin typeface="Arial" pitchFamily="34" charset="0"/>
-                <a:ea typeface="Arial" pitchFamily="34" charset="-122"/>
-                <a:cs typeface="Arial" pitchFamily="34" charset="-120"/>
-              </a:rPr>
-              <a:t>²(</a:t>
-            </a:r>
-            <a:pPr algn="l" indent="0" marL="0">
-              <a:lnSpc>
-                <a:spcPts val="1680"/>
-              </a:lnSpc>
-              <a:spcBef>
-                <a:spcPts val="300"/>
-              </a:spcBef>
-              <a:spcAft>
-                <a:spcPts val="300"/>
-              </a:spcAft>
-              <a:buNone/>
-            </a:pPr>
-            <a:r>
-              <a:rPr lang="en-US" sz="1200" i="1" dirty="0">
-                <a:solidFill>
-                  <a:srgbClr val="1C2833"/>
-                </a:solidFill>
-                <a:latin typeface="Arial" pitchFamily="34" charset="0"/>
-                <a:ea typeface="Arial" pitchFamily="34" charset="-122"/>
-                <a:cs typeface="Arial" pitchFamily="34" charset="-120"/>
-              </a:rPr>
-              <a:t>n</a:t>
-            </a:r>
-            <a:pPr algn="l" indent="0" marL="0">
-              <a:lnSpc>
-                <a:spcPts val="1680"/>
-              </a:lnSpc>
-              <a:spcBef>
-                <a:spcPts val="300"/>
-              </a:spcBef>
-              <a:spcAft>
-                <a:spcPts val="300"/>
-              </a:spcAft>
-              <a:buNone/>
-            </a:pPr>
-            <a:r>
-              <a:rPr lang="en-US" sz="1200" dirty="0">
-                <a:solidFill>
-                  <a:srgbClr val="1C2833"/>
-                </a:solidFill>
-                <a:latin typeface="Arial" pitchFamily="34" charset="0"/>
-                <a:ea typeface="Arial" pitchFamily="34" charset="-122"/>
-                <a:cs typeface="Arial" pitchFamily="34" charset="-120"/>
-              </a:rPr>
-              <a:t>² + 1) / 2 → </a:t>
-            </a:r>
-            <a:pPr algn="l" indent="0" marL="0">
-              <a:lnSpc>
-                <a:spcPts val="1680"/>
-              </a:lnSpc>
-              <a:spcBef>
-                <a:spcPts val="300"/>
-              </a:spcBef>
-              <a:spcAft>
-                <a:spcPts val="300"/>
-              </a:spcAft>
-              <a:buNone/>
-            </a:pPr>
-            <a:r>
-              <a:rPr lang="en-US" sz="1200" b="1" dirty="0">
-                <a:solidFill>
-                  <a:srgbClr val="1C2833"/>
-                </a:solidFill>
-                <a:latin typeface="Arial" pitchFamily="34" charset="0"/>
-                <a:ea typeface="Arial" pitchFamily="34" charset="-122"/>
-                <a:cs typeface="Arial" pitchFamily="34" charset="-120"/>
-              </a:rPr>
-              <a:t>S = n(n² + 1) / 2</a:t>
-            </a:r>
-            <a:endParaRPr lang="en-US" sz="1200" dirty="0"/>
-          </a:p>
-        </p:txBody>
-      </p:sp>
-      <p:sp>
-        <p:nvSpPr>
-          <p:cNvPr id="10" name="Text 8"/>
-          <p:cNvSpPr/>
-          <p:nvPr/>
-        </p:nvSpPr>
-        <p:spPr>
-          <a:xfrm>
-            <a:off x="634901" y="3234779"/>
-            <a:ext cx="8102798" cy="281880"/>
-          </a:xfrm>
-          <a:prstGeom prst="rect">
-            <a:avLst/>
-          </a:prstGeom>
-          <a:noFill/>
-          <a:ln/>
-        </p:spPr>
-        <p:txBody>
-          <a:bodyPr wrap="square" lIns="0" tIns="0" rIns="0" bIns="0" rtlCol="0" anchor="t"/>
-          <a:lstStyle/>
-          <a:p>
-            <a:pPr algn="l" marL="342900" indent="-342900">
-              <a:lnSpc>
-                <a:spcPts val="1620"/>
-              </a:lnSpc>
-              <a:spcAft>
-                <a:spcPts val="300"/>
-              </a:spcAft>
-              <a:buSzPct val="100000"/>
-              <a:buChar char="•"/>
-            </a:pPr>
-            <a:r>
-              <a:rPr lang="en-US" sz="1200" b="1" dirty="0">
-                <a:solidFill>
-                  <a:srgbClr val="1C2833"/>
-                </a:solidFill>
-                <a:latin typeface="Arial" pitchFamily="34" charset="0"/>
-                <a:ea typeface="Arial" pitchFamily="34" charset="-122"/>
-                <a:cs typeface="Arial" pitchFamily="34" charset="-120"/>
-              </a:rPr>
-              <a:t>Apply.</a:t>
-            </a:r>
-            <a:pPr algn="l" indent="0" marL="0">
-              <a:lnSpc>
-                <a:spcPts val="1620"/>
-              </a:lnSpc>
-              <a:spcAft>
-                <a:spcPts val="300"/>
-              </a:spcAft>
-              <a:buNone/>
-            </a:pPr>
-            <a:r>
-              <a:rPr lang="en-US" sz="1200" dirty="0">
-                <a:solidFill>
-                  <a:srgbClr val="1C2833"/>
-                </a:solidFill>
-                <a:latin typeface="Arial" pitchFamily="34" charset="0"/>
-                <a:ea typeface="Arial" pitchFamily="34" charset="-122"/>
-                <a:cs typeface="Arial" pitchFamily="34" charset="-120"/>
-              </a:rPr>
-              <a:t> Compute together for several </a:t>
-            </a:r>
-            <a:pPr algn="l" indent="0" marL="0">
-              <a:lnSpc>
-                <a:spcPts val="1620"/>
-              </a:lnSpc>
-              <a:spcAft>
-                <a:spcPts val="300"/>
-              </a:spcAft>
-              <a:buNone/>
-            </a:pPr>
-            <a:r>
-              <a:rPr lang="en-US" sz="1200" i="1" dirty="0">
-                <a:solidFill>
-                  <a:srgbClr val="1C2833"/>
-                </a:solidFill>
-                <a:latin typeface="Arial" pitchFamily="34" charset="0"/>
-                <a:ea typeface="Arial" pitchFamily="34" charset="-122"/>
-                <a:cs typeface="Arial" pitchFamily="34" charset="-120"/>
-              </a:rPr>
-              <a:t>n</a:t>
-            </a:r>
-            <a:pPr algn="l" indent="0" marL="0">
-              <a:lnSpc>
-                <a:spcPts val="1620"/>
-              </a:lnSpc>
-              <a:spcAft>
-                <a:spcPts val="300"/>
-              </a:spcAft>
-              <a:buNone/>
-            </a:pPr>
-            <a:r>
-              <a:rPr lang="en-US" sz="1200" dirty="0">
-                <a:solidFill>
-                  <a:srgbClr val="1C2833"/>
-                </a:solidFill>
-                <a:latin typeface="Arial" pitchFamily="34" charset="0"/>
-                <a:ea typeface="Arial" pitchFamily="34" charset="-122"/>
-                <a:cs typeface="Arial" pitchFamily="34" charset="-120"/>
-              </a:rPr>
-              <a:t>:</a:t>
-            </a:r>
-            <a:endParaRPr lang="en-US" sz="1200" dirty="0"/>
-          </a:p>
-        </p:txBody>
-      </p:sp>
-      <p:sp>
-        <p:nvSpPr>
-          <p:cNvPr id="11" name="Text 9"/>
-          <p:cNvSpPr/>
-          <p:nvPr/>
-        </p:nvSpPr>
-        <p:spPr>
-          <a:xfrm>
-            <a:off x="406301" y="3605510"/>
-            <a:ext cx="8498026" cy="213271"/>
-          </a:xfrm>
-          <a:prstGeom prst="rect">
-            <a:avLst/>
-          </a:prstGeom>
-          <a:noFill/>
-          <a:ln/>
-        </p:spPr>
-        <p:txBody>
-          <a:bodyPr wrap="square" lIns="0" tIns="0" rIns="0" bIns="0" rtlCol="0" anchor="t"/>
-          <a:lstStyle/>
-          <a:p>
-            <a:pPr algn="l" indent="0" marL="0">
-              <a:lnSpc>
-                <a:spcPts val="1680"/>
-              </a:lnSpc>
-              <a:spcBef>
-                <a:spcPts val="300"/>
-              </a:spcBef>
-              <a:spcAft>
-                <a:spcPts val="300"/>
-              </a:spcAft>
-              <a:buNone/>
-            </a:pPr>
-            <a:r>
-              <a:rPr lang="en-US" sz="1200" i="1" dirty="0">
-                <a:solidFill>
-                  <a:srgbClr val="1C2833"/>
-                </a:solidFill>
-                <a:latin typeface="Arial" pitchFamily="34" charset="0"/>
-                <a:ea typeface="Arial" pitchFamily="34" charset="-122"/>
-                <a:cs typeface="Arial" pitchFamily="34" charset="-120"/>
-              </a:rPr>
-              <a:t>Each row:</a:t>
-            </a:r>
-            <a:pPr algn="l" indent="0" marL="0">
-              <a:lnSpc>
-                <a:spcPts val="1680"/>
-              </a:lnSpc>
-              <a:spcBef>
-                <a:spcPts val="300"/>
-              </a:spcBef>
-              <a:spcAft>
-                <a:spcPts val="300"/>
-              </a:spcAft>
-              <a:buNone/>
-            </a:pPr>
-            <a:r>
-              <a:rPr lang="en-US" sz="1200" dirty="0">
-                <a:solidFill>
-                  <a:srgbClr val="1C2833"/>
-                </a:solidFill>
-                <a:latin typeface="Arial" pitchFamily="34" charset="0"/>
-                <a:ea typeface="Arial" pitchFamily="34" charset="-122"/>
-                <a:cs typeface="Arial" pitchFamily="34" charset="-120"/>
-              </a:rPr>
-              <a:t>n</a:t>
-            </a:r>
-            <a:pPr algn="l" indent="0" marL="0">
-              <a:lnSpc>
-                <a:spcPts val="1680"/>
-              </a:lnSpc>
-              <a:spcBef>
-                <a:spcPts val="300"/>
-              </a:spcBef>
-              <a:spcAft>
-                <a:spcPts val="300"/>
-              </a:spcAft>
-              <a:buNone/>
-            </a:pPr>
-            <a:r>
-              <a:rPr lang="en-US" sz="1200" i="1" dirty="0">
-                <a:solidFill>
-                  <a:srgbClr val="1C2833"/>
-                </a:solidFill>
-                <a:latin typeface="Arial" pitchFamily="34" charset="0"/>
-                <a:ea typeface="Arial" pitchFamily="34" charset="-122"/>
-                <a:cs typeface="Arial" pitchFamily="34" charset="-120"/>
-              </a:rPr>
-              <a:t> ·</a:t>
-            </a:r>
-            <a:pPr algn="l" indent="0" marL="0">
-              <a:lnSpc>
-                <a:spcPts val="1680"/>
-              </a:lnSpc>
-              <a:spcBef>
-                <a:spcPts val="300"/>
-              </a:spcBef>
-              <a:spcAft>
-                <a:spcPts val="300"/>
-              </a:spcAft>
-              <a:buNone/>
-            </a:pPr>
-            <a:r>
-              <a:rPr lang="en-US" sz="1200" dirty="0">
-                <a:solidFill>
-                  <a:srgbClr val="1C2833"/>
-                </a:solidFill>
-                <a:latin typeface="Arial" pitchFamily="34" charset="0"/>
-                <a:ea typeface="Arial" pitchFamily="34" charset="-122"/>
-                <a:cs typeface="Arial" pitchFamily="34" charset="-120"/>
-              </a:rPr>
-              <a:t>n</a:t>
-            </a:r>
-            <a:pPr algn="l" indent="0" marL="0">
-              <a:lnSpc>
-                <a:spcPts val="1680"/>
-              </a:lnSpc>
-              <a:spcBef>
-                <a:spcPts val="300"/>
-              </a:spcBef>
-              <a:spcAft>
-                <a:spcPts val="300"/>
-              </a:spcAft>
-              <a:buNone/>
-            </a:pPr>
-            <a:r>
-              <a:rPr lang="en-US" sz="1200" i="1" dirty="0">
-                <a:solidFill>
-                  <a:srgbClr val="1C2833"/>
-                </a:solidFill>
-                <a:latin typeface="Arial" pitchFamily="34" charset="0"/>
-                <a:ea typeface="Arial" pitchFamily="34" charset="-122"/>
-                <a:cs typeface="Arial" pitchFamily="34" charset="-120"/>
-              </a:rPr>
-              <a:t>² ·</a:t>
-            </a:r>
-            <a:pPr algn="l" indent="0" marL="0">
-              <a:lnSpc>
-                <a:spcPts val="1680"/>
-              </a:lnSpc>
-              <a:spcBef>
-                <a:spcPts val="300"/>
-              </a:spcBef>
-              <a:spcAft>
-                <a:spcPts val="300"/>
-              </a:spcAft>
-              <a:buNone/>
-            </a:pPr>
-            <a:r>
-              <a:rPr lang="en-US" sz="1200" dirty="0">
-                <a:solidFill>
-                  <a:srgbClr val="1C2833"/>
-                </a:solidFill>
-                <a:latin typeface="Arial" pitchFamily="34" charset="0"/>
-                <a:ea typeface="Arial" pitchFamily="34" charset="-122"/>
-                <a:cs typeface="Arial" pitchFamily="34" charset="-120"/>
-              </a:rPr>
-              <a:t>n</a:t>
-            </a:r>
-            <a:pPr algn="l" indent="0" marL="0">
-              <a:lnSpc>
-                <a:spcPts val="1680"/>
-              </a:lnSpc>
-              <a:spcBef>
-                <a:spcPts val="300"/>
-              </a:spcBef>
-              <a:spcAft>
-                <a:spcPts val="300"/>
-              </a:spcAft>
-              <a:buNone/>
-            </a:pPr>
-            <a:r>
-              <a:rPr lang="en-US" sz="1200" i="1" dirty="0">
-                <a:solidFill>
-                  <a:srgbClr val="1C2833"/>
-                </a:solidFill>
-                <a:latin typeface="Arial" pitchFamily="34" charset="0"/>
-                <a:ea typeface="Arial" pitchFamily="34" charset="-122"/>
-                <a:cs typeface="Arial" pitchFamily="34" charset="-120"/>
-              </a:rPr>
-              <a:t>²+1 ·</a:t>
-            </a:r>
-            <a:pPr algn="l" indent="0" marL="0">
-              <a:lnSpc>
-                <a:spcPts val="1680"/>
-              </a:lnSpc>
-              <a:spcBef>
-                <a:spcPts val="300"/>
-              </a:spcBef>
-              <a:spcAft>
-                <a:spcPts val="300"/>
-              </a:spcAft>
-              <a:buNone/>
-            </a:pPr>
-            <a:r>
-              <a:rPr lang="en-US" sz="1200" dirty="0">
-                <a:solidFill>
-                  <a:srgbClr val="1C2833"/>
-                </a:solidFill>
-                <a:latin typeface="Arial" pitchFamily="34" charset="0"/>
-                <a:ea typeface="Arial" pitchFamily="34" charset="-122"/>
-                <a:cs typeface="Arial" pitchFamily="34" charset="-120"/>
-              </a:rPr>
-              <a:t>n</a:t>
-            </a:r>
-            <a:pPr algn="l" indent="0" marL="0">
-              <a:lnSpc>
-                <a:spcPts val="1680"/>
-              </a:lnSpc>
-              <a:spcBef>
-                <a:spcPts val="300"/>
-              </a:spcBef>
-              <a:spcAft>
-                <a:spcPts val="300"/>
-              </a:spcAft>
-              <a:buNone/>
-            </a:pPr>
-            <a:r>
-              <a:rPr lang="en-US" sz="1200" i="1" dirty="0">
-                <a:solidFill>
-                  <a:srgbClr val="1C2833"/>
-                </a:solidFill>
-                <a:latin typeface="Arial" pitchFamily="34" charset="0"/>
-                <a:ea typeface="Arial" pitchFamily="34" charset="-122"/>
-                <a:cs typeface="Arial" pitchFamily="34" charset="-120"/>
-              </a:rPr>
-              <a:t>(</a:t>
-            </a:r>
-            <a:pPr algn="l" indent="0" marL="0">
-              <a:lnSpc>
-                <a:spcPts val="1680"/>
-              </a:lnSpc>
-              <a:spcBef>
-                <a:spcPts val="300"/>
-              </a:spcBef>
-              <a:spcAft>
-                <a:spcPts val="300"/>
-              </a:spcAft>
-              <a:buNone/>
-            </a:pPr>
-            <a:r>
-              <a:rPr lang="en-US" sz="1200" dirty="0">
-                <a:solidFill>
-                  <a:srgbClr val="1C2833"/>
-                </a:solidFill>
-                <a:latin typeface="Arial" pitchFamily="34" charset="0"/>
-                <a:ea typeface="Arial" pitchFamily="34" charset="-122"/>
-                <a:cs typeface="Arial" pitchFamily="34" charset="-120"/>
-              </a:rPr>
-              <a:t>n</a:t>
-            </a:r>
-            <a:pPr algn="l" indent="0" marL="0">
-              <a:lnSpc>
-                <a:spcPts val="1680"/>
-              </a:lnSpc>
-              <a:spcBef>
-                <a:spcPts val="300"/>
-              </a:spcBef>
-              <a:spcAft>
-                <a:spcPts val="300"/>
-              </a:spcAft>
-              <a:buNone/>
-            </a:pPr>
-            <a:r>
-              <a:rPr lang="en-US" sz="1200" i="1" dirty="0">
-                <a:solidFill>
-                  <a:srgbClr val="1C2833"/>
-                </a:solidFill>
-                <a:latin typeface="Arial" pitchFamily="34" charset="0"/>
-                <a:ea typeface="Arial" pitchFamily="34" charset="-122"/>
-                <a:cs typeface="Arial" pitchFamily="34" charset="-120"/>
-              </a:rPr>
-              <a:t>²+1)/2.</a:t>
-            </a:r>
-            <a:endParaRPr lang="en-US" sz="1200" dirty="0"/>
-          </a:p>
-        </p:txBody>
-      </p:sp>
-      <p:sp>
-        <p:nvSpPr>
-          <p:cNvPr id="12" name="Text 10"/>
-          <p:cNvSpPr/>
-          <p:nvPr/>
-        </p:nvSpPr>
-        <p:spPr>
-          <a:xfrm>
-            <a:off x="634901" y="3907631"/>
-            <a:ext cx="8102798" cy="1257002"/>
-          </a:xfrm>
-          <a:prstGeom prst="rect">
-            <a:avLst/>
-          </a:prstGeom>
-          <a:noFill/>
-          <a:ln/>
-        </p:spPr>
-        <p:txBody>
-          <a:bodyPr wrap="square" lIns="0" tIns="0" rIns="0" bIns="0" rtlCol="0" anchor="t"/>
-          <a:lstStyle/>
-          <a:p>
-            <a:pPr algn="l" marL="342900" indent="-342900">
-              <a:lnSpc>
-                <a:spcPts val="1620"/>
-              </a:lnSpc>
-              <a:spcAft>
-                <a:spcPts val="300"/>
-              </a:spcAft>
-              <a:buSzPct val="100000"/>
-              <a:buChar char="•"/>
-            </a:pPr>
-            <a:r>
-              <a:rPr lang="en-US" sz="1200" b="1" dirty="0">
-                <a:solidFill>
-                  <a:srgbClr val="1C2833"/>
-                </a:solidFill>
-                <a:latin typeface="Arial" pitchFamily="34" charset="0"/>
-                <a:ea typeface="Arial" pitchFamily="34" charset="-122"/>
-                <a:cs typeface="Arial" pitchFamily="34" charset="-120"/>
-              </a:rPr>
-              <a:t>3</a:t>
-            </a:r>
-            <a:pPr algn="l" indent="0" marL="0">
-              <a:lnSpc>
-                <a:spcPts val="1620"/>
-              </a:lnSpc>
-              <a:spcAft>
-                <a:spcPts val="300"/>
-              </a:spcAft>
-              <a:buNone/>
-            </a:pPr>
-            <a:r>
-              <a:rPr lang="en-US" sz="1200" dirty="0">
-                <a:solidFill>
-                  <a:srgbClr val="1C2833"/>
-                </a:solidFill>
-                <a:latin typeface="Arial" pitchFamily="34" charset="0"/>
-                <a:ea typeface="Arial" pitchFamily="34" charset="-122"/>
-                <a:cs typeface="Arial" pitchFamily="34" charset="-120"/>
-              </a:rPr>
-              <a:t> — 9 · 10 · 3 × 10 / 2 = </a:t>
-            </a:r>
-            <a:pPr algn="l" indent="0" marL="0">
-              <a:lnSpc>
-                <a:spcPts val="1620"/>
-              </a:lnSpc>
-              <a:spcAft>
-                <a:spcPts val="300"/>
-              </a:spcAft>
-              <a:buNone/>
-            </a:pPr>
-            <a:r>
-              <a:rPr lang="en-US" sz="1200" b="1" dirty="0">
-                <a:solidFill>
-                  <a:srgbClr val="1C2833"/>
-                </a:solidFill>
-                <a:latin typeface="Arial" pitchFamily="34" charset="0"/>
-                <a:ea typeface="Arial" pitchFamily="34" charset="-122"/>
-                <a:cs typeface="Arial" pitchFamily="34" charset="-120"/>
-              </a:rPr>
-              <a:t>15</a:t>
-            </a:r>
-            <a:endParaRPr lang="en-US" sz="1200" dirty="0"/>
-          </a:p>
-          <a:p>
-            <a:pPr algn="l" marL="342900" indent="-342900">
-              <a:lnSpc>
-                <a:spcPts val="1620"/>
-              </a:lnSpc>
-              <a:spcAft>
-                <a:spcPts val="300"/>
-              </a:spcAft>
-              <a:buSzPct val="100000"/>
-              <a:buChar char="•"/>
-            </a:pPr>
-            <a:r>
-              <a:rPr lang="en-US" sz="1200" b="1" dirty="0">
-                <a:solidFill>
-                  <a:srgbClr val="1C2833"/>
-                </a:solidFill>
-                <a:latin typeface="Arial" pitchFamily="34" charset="0"/>
-                <a:ea typeface="Arial" pitchFamily="34" charset="-122"/>
-                <a:cs typeface="Arial" pitchFamily="34" charset="-120"/>
-              </a:rPr>
-              <a:t>4</a:t>
-            </a:r>
-            <a:pPr algn="l" indent="0" marL="0">
-              <a:lnSpc>
-                <a:spcPts val="1620"/>
-              </a:lnSpc>
-              <a:spcAft>
-                <a:spcPts val="300"/>
-              </a:spcAft>
-              <a:buNone/>
-            </a:pPr>
-            <a:r>
-              <a:rPr lang="en-US" sz="1200" dirty="0">
-                <a:solidFill>
-                  <a:srgbClr val="1C2833"/>
-                </a:solidFill>
-                <a:latin typeface="Arial" pitchFamily="34" charset="0"/>
-                <a:ea typeface="Arial" pitchFamily="34" charset="-122"/>
-                <a:cs typeface="Arial" pitchFamily="34" charset="-120"/>
-              </a:rPr>
-              <a:t> — 16 · 17 · 4 × 17 / 2 = </a:t>
-            </a:r>
-            <a:pPr algn="l" indent="0" marL="0">
-              <a:lnSpc>
-                <a:spcPts val="1620"/>
-              </a:lnSpc>
-              <a:spcAft>
-                <a:spcPts val="300"/>
-              </a:spcAft>
-              <a:buNone/>
-            </a:pPr>
-            <a:r>
-              <a:rPr lang="en-US" sz="1200" b="1" dirty="0">
-                <a:solidFill>
-                  <a:srgbClr val="1C2833"/>
-                </a:solidFill>
-                <a:latin typeface="Arial" pitchFamily="34" charset="0"/>
-                <a:ea typeface="Arial" pitchFamily="34" charset="-122"/>
-                <a:cs typeface="Arial" pitchFamily="34" charset="-120"/>
-              </a:rPr>
-              <a:t>34</a:t>
-            </a:r>
-            <a:endParaRPr lang="en-US" sz="1200" dirty="0"/>
-          </a:p>
-          <a:p>
-            <a:pPr algn="l" marL="342900" indent="-342900">
-              <a:lnSpc>
-                <a:spcPts val="1620"/>
-              </a:lnSpc>
-              <a:spcAft>
-                <a:spcPts val="300"/>
-              </a:spcAft>
-              <a:buSzPct val="100000"/>
-              <a:buChar char="•"/>
-            </a:pPr>
-            <a:r>
-              <a:rPr lang="en-US" sz="1200" b="1" dirty="0">
-                <a:solidFill>
-                  <a:srgbClr val="1C2833"/>
-                </a:solidFill>
-                <a:latin typeface="Arial" pitchFamily="34" charset="0"/>
-                <a:ea typeface="Arial" pitchFamily="34" charset="-122"/>
-                <a:cs typeface="Arial" pitchFamily="34" charset="-120"/>
-              </a:rPr>
-              <a:t>5</a:t>
-            </a:r>
-            <a:pPr algn="l" indent="0" marL="0">
-              <a:lnSpc>
-                <a:spcPts val="1620"/>
-              </a:lnSpc>
-              <a:spcAft>
-                <a:spcPts val="300"/>
-              </a:spcAft>
-              <a:buNone/>
-            </a:pPr>
-            <a:r>
-              <a:rPr lang="en-US" sz="1200" dirty="0">
-                <a:solidFill>
-                  <a:srgbClr val="1C2833"/>
-                </a:solidFill>
-                <a:latin typeface="Arial" pitchFamily="34" charset="0"/>
-                <a:ea typeface="Arial" pitchFamily="34" charset="-122"/>
-                <a:cs typeface="Arial" pitchFamily="34" charset="-120"/>
-              </a:rPr>
-              <a:t> — 25 · 26 · 5 × 26 / 2 = </a:t>
-            </a:r>
-            <a:pPr algn="l" indent="0" marL="0">
-              <a:lnSpc>
-                <a:spcPts val="1620"/>
-              </a:lnSpc>
-              <a:spcAft>
-                <a:spcPts val="300"/>
-              </a:spcAft>
-              <a:buNone/>
-            </a:pPr>
-            <a:r>
-              <a:rPr lang="en-US" sz="1200" b="1" dirty="0">
-                <a:solidFill>
-                  <a:srgbClr val="1C2833"/>
-                </a:solidFill>
-                <a:latin typeface="Arial" pitchFamily="34" charset="0"/>
-                <a:ea typeface="Arial" pitchFamily="34" charset="-122"/>
-                <a:cs typeface="Arial" pitchFamily="34" charset="-120"/>
-              </a:rPr>
-              <a:t>65</a:t>
-            </a:r>
-            <a:endParaRPr lang="en-US" sz="1200" dirty="0"/>
-          </a:p>
-          <a:p>
-            <a:pPr algn="l" marL="342900" indent="-342900">
-              <a:lnSpc>
-                <a:spcPts val="1620"/>
-              </a:lnSpc>
-              <a:spcAft>
-                <a:spcPts val="300"/>
-              </a:spcAft>
-              <a:buSzPct val="100000"/>
-              <a:buChar char="•"/>
-            </a:pPr>
-            <a:r>
-              <a:rPr lang="en-US" sz="1200" b="1" dirty="0">
-                <a:solidFill>
-                  <a:srgbClr val="1C2833"/>
-                </a:solidFill>
-                <a:latin typeface="Arial" pitchFamily="34" charset="0"/>
-                <a:ea typeface="Arial" pitchFamily="34" charset="-122"/>
-                <a:cs typeface="Arial" pitchFamily="34" charset="-120"/>
-              </a:rPr>
-              <a:t>6</a:t>
-            </a:r>
-            <a:pPr algn="l" indent="0" marL="0">
-              <a:lnSpc>
-                <a:spcPts val="1620"/>
-              </a:lnSpc>
-              <a:spcAft>
-                <a:spcPts val="300"/>
-              </a:spcAft>
-              <a:buNone/>
-            </a:pPr>
-            <a:r>
-              <a:rPr lang="en-US" sz="1200" dirty="0">
-                <a:solidFill>
-                  <a:srgbClr val="1C2833"/>
-                </a:solidFill>
-                <a:latin typeface="Arial" pitchFamily="34" charset="0"/>
-                <a:ea typeface="Arial" pitchFamily="34" charset="-122"/>
-                <a:cs typeface="Arial" pitchFamily="34" charset="-120"/>
-              </a:rPr>
-              <a:t> — 36 · 37 · 6 × 37 / 2 = </a:t>
-            </a:r>
-            <a:pPr algn="l" indent="0" marL="0">
-              <a:lnSpc>
-                <a:spcPts val="1620"/>
-              </a:lnSpc>
-              <a:spcAft>
-                <a:spcPts val="300"/>
-              </a:spcAft>
-              <a:buNone/>
-            </a:pPr>
-            <a:r>
-              <a:rPr lang="en-US" sz="1200" b="1" dirty="0">
-                <a:solidFill>
-                  <a:srgbClr val="1C2833"/>
-                </a:solidFill>
-                <a:latin typeface="Arial" pitchFamily="34" charset="0"/>
-                <a:ea typeface="Arial" pitchFamily="34" charset="-122"/>
-                <a:cs typeface="Arial" pitchFamily="34" charset="-120"/>
-              </a:rPr>
-              <a:t>111</a:t>
-            </a:r>
-            <a:endParaRPr lang="en-US" sz="1200" dirty="0"/>
-          </a:p>
-          <a:p>
-            <a:pPr algn="l" marL="342900" indent="-342900">
-              <a:lnSpc>
-                <a:spcPts val="1620"/>
-              </a:lnSpc>
-              <a:spcAft>
-                <a:spcPts val="300"/>
-              </a:spcAft>
-              <a:buSzPct val="100000"/>
-              <a:buChar char="•"/>
-            </a:pPr>
-            <a:r>
-              <a:rPr lang="en-US" sz="1200" b="1" dirty="0">
-                <a:solidFill>
-                  <a:srgbClr val="1C2833"/>
-                </a:solidFill>
-                <a:latin typeface="Arial" pitchFamily="34" charset="0"/>
-                <a:ea typeface="Arial" pitchFamily="34" charset="-122"/>
-                <a:cs typeface="Arial" pitchFamily="34" charset="-120"/>
-              </a:rPr>
-              <a:t>7</a:t>
-            </a:r>
-            <a:pPr algn="l" indent="0" marL="0">
-              <a:lnSpc>
-                <a:spcPts val="1620"/>
-              </a:lnSpc>
-              <a:spcAft>
-                <a:spcPts val="300"/>
-              </a:spcAft>
-              <a:buNone/>
-            </a:pPr>
-            <a:r>
-              <a:rPr lang="en-US" sz="1200" dirty="0">
-                <a:solidFill>
-                  <a:srgbClr val="1C2833"/>
-                </a:solidFill>
-                <a:latin typeface="Arial" pitchFamily="34" charset="0"/>
-                <a:ea typeface="Arial" pitchFamily="34" charset="-122"/>
-                <a:cs typeface="Arial" pitchFamily="34" charset="-120"/>
-              </a:rPr>
-              <a:t> — 49 · 50 · 7 × 50 / 2 = </a:t>
-            </a:r>
-            <a:pPr algn="l" indent="0" marL="0">
-              <a:lnSpc>
-                <a:spcPts val="1620"/>
-              </a:lnSpc>
-              <a:spcAft>
-                <a:spcPts val="300"/>
-              </a:spcAft>
-              <a:buNone/>
-            </a:pPr>
-            <a:r>
-              <a:rPr lang="en-US" sz="1200" b="1" dirty="0">
-                <a:solidFill>
-                  <a:srgbClr val="1C2833"/>
-                </a:solidFill>
-                <a:latin typeface="Arial" pitchFamily="34" charset="0"/>
-                <a:ea typeface="Arial" pitchFamily="34" charset="-122"/>
-                <a:cs typeface="Arial" pitchFamily="34" charset="-120"/>
-              </a:rPr>
-              <a:t>175</a:t>
-            </a:r>
-            <a:endParaRPr lang="en-US" sz="1200" dirty="0"/>
-          </a:p>
-        </p:txBody>
-      </p:sp>
-      <p:sp>
-        <p:nvSpPr>
-          <p:cNvPr id="13" name="Text 11"/>
-          <p:cNvSpPr/>
-          <p:nvPr/>
-        </p:nvSpPr>
-        <p:spPr>
-          <a:xfrm>
-            <a:off x="634901" y="5266134"/>
-            <a:ext cx="8102798" cy="712291"/>
-          </a:xfrm>
-          <a:prstGeom prst="rect">
-            <a:avLst/>
-          </a:prstGeom>
-          <a:noFill/>
-          <a:ln/>
-        </p:spPr>
-        <p:txBody>
-          <a:bodyPr wrap="square" lIns="0" tIns="0" rIns="0" bIns="0" rtlCol="0" anchor="t"/>
-          <a:lstStyle/>
-          <a:p>
-            <a:pPr algn="l" marL="342900" indent="-342900">
-              <a:lnSpc>
-                <a:spcPts val="1620"/>
-              </a:lnSpc>
-              <a:spcAft>
-                <a:spcPts val="300"/>
-              </a:spcAft>
-              <a:buSzPct val="100000"/>
-              <a:buChar char="•"/>
-            </a:pPr>
-            <a:r>
-              <a:rPr lang="en-US" sz="1200" b="1" dirty="0">
-                <a:solidFill>
-                  <a:srgbClr val="1C2833"/>
-                </a:solidFill>
-                <a:latin typeface="Arial" pitchFamily="34" charset="0"/>
-                <a:ea typeface="Arial" pitchFamily="34" charset="-122"/>
-                <a:cs typeface="Arial" pitchFamily="34" charset="-120"/>
-              </a:rPr>
-              <a:t>A paraphrase from the source.</a:t>
-            </a:r>
-            <a:pPr algn="l" indent="0" marL="0">
-              <a:lnSpc>
-                <a:spcPts val="1620"/>
-              </a:lnSpc>
-              <a:spcAft>
-                <a:spcPts val="300"/>
-              </a:spcAft>
-              <a:buNone/>
-            </a:pPr>
-            <a:r>
-              <a:rPr lang="en-US" sz="1200" dirty="0">
-                <a:solidFill>
-                  <a:srgbClr val="1C2833"/>
-                </a:solidFill>
-                <a:latin typeface="Arial" pitchFamily="34" charset="0"/>
-                <a:ea typeface="Arial" pitchFamily="34" charset="-122"/>
-                <a:cs typeface="Arial" pitchFamily="34" charset="-120"/>
-              </a:rPr>
-              <a:t> Nārāyaṇa Paṇḍita, in </a:t>
-            </a:r>
-            <a:pPr algn="l" indent="0" marL="0">
-              <a:lnSpc>
-                <a:spcPts val="1620"/>
-              </a:lnSpc>
-              <a:spcAft>
-                <a:spcPts val="300"/>
-              </a:spcAft>
-              <a:buNone/>
-            </a:pPr>
-            <a:r>
-              <a:rPr lang="en-US" sz="1200" i="1" dirty="0">
-                <a:solidFill>
-                  <a:srgbClr val="1C2833"/>
-                </a:solidFill>
-                <a:latin typeface="Arial" pitchFamily="34" charset="0"/>
-                <a:ea typeface="Arial" pitchFamily="34" charset="-122"/>
-                <a:cs typeface="Arial" pitchFamily="34" charset="-120"/>
-              </a:rPr>
-              <a:t>Bhadragaṇita</a:t>
-            </a:r>
-            <a:pPr algn="l" indent="0" marL="0">
-              <a:lnSpc>
-                <a:spcPts val="1620"/>
-              </a:lnSpc>
-              <a:spcAft>
-                <a:spcPts val="300"/>
-              </a:spcAft>
-              <a:buNone/>
-            </a:pPr>
-            <a:r>
-              <a:rPr lang="en-US" sz="1200" dirty="0">
-                <a:solidFill>
-                  <a:srgbClr val="1C2833"/>
-                </a:solidFill>
-                <a:latin typeface="Arial" pitchFamily="34" charset="0"/>
-                <a:ea typeface="Arial" pitchFamily="34" charset="-122"/>
-                <a:cs typeface="Arial" pitchFamily="34" charset="-120"/>
-              </a:rPr>
-              <a:t> (Book 14 of </a:t>
-            </a:r>
-            <a:pPr algn="l" indent="0" marL="0">
-              <a:lnSpc>
-                <a:spcPts val="1620"/>
-              </a:lnSpc>
-              <a:spcAft>
-                <a:spcPts val="300"/>
-              </a:spcAft>
-              <a:buNone/>
-            </a:pPr>
-            <a:r>
-              <a:rPr lang="en-US" sz="1200" i="1" dirty="0">
-                <a:solidFill>
-                  <a:srgbClr val="1C2833"/>
-                </a:solidFill>
-                <a:latin typeface="Arial" pitchFamily="34" charset="0"/>
-                <a:ea typeface="Arial" pitchFamily="34" charset="-122"/>
-                <a:cs typeface="Arial" pitchFamily="34" charset="-120"/>
-              </a:rPr>
-              <a:t>Gaṇita-kaumudī</a:t>
-            </a:r>
-            <a:pPr algn="l" indent="0" marL="0">
-              <a:lnSpc>
-                <a:spcPts val="1620"/>
-              </a:lnSpc>
-              <a:spcAft>
-                <a:spcPts val="300"/>
-              </a:spcAft>
-              <a:buNone/>
-            </a:pPr>
-            <a:r>
-              <a:rPr lang="en-US" sz="1200" dirty="0">
-                <a:solidFill>
-                  <a:srgbClr val="1C2833"/>
-                </a:solidFill>
-                <a:latin typeface="Arial" pitchFamily="34" charset="0"/>
-                <a:ea typeface="Arial" pitchFamily="34" charset="-122"/>
-                <a:cs typeface="Arial" pitchFamily="34" charset="-120"/>
-              </a:rPr>
-              <a:t>, 1356 CE), gives the magic-constant rule explicitly: the common sum is one </a:t>
-            </a:r>
-            <a:pPr algn="l" indent="0" marL="0">
-              <a:lnSpc>
-                <a:spcPts val="1620"/>
-              </a:lnSpc>
-              <a:spcAft>
-                <a:spcPts val="300"/>
-              </a:spcAft>
-              <a:buNone/>
-            </a:pPr>
-            <a:r>
-              <a:rPr lang="en-US" sz="1200" i="1" dirty="0">
-                <a:solidFill>
-                  <a:srgbClr val="1C2833"/>
-                </a:solidFill>
-                <a:latin typeface="Arial" pitchFamily="34" charset="0"/>
-                <a:ea typeface="Arial" pitchFamily="34" charset="-122"/>
-                <a:cs typeface="Arial" pitchFamily="34" charset="-120"/>
-              </a:rPr>
-              <a:t>n</a:t>
-            </a:r>
-            <a:pPr algn="l" indent="0" marL="0">
-              <a:lnSpc>
-                <a:spcPts val="1620"/>
-              </a:lnSpc>
-              <a:spcAft>
-                <a:spcPts val="300"/>
-              </a:spcAft>
-              <a:buNone/>
-            </a:pPr>
-            <a:r>
-              <a:rPr lang="en-US" sz="1200" dirty="0">
-                <a:solidFill>
-                  <a:srgbClr val="1C2833"/>
-                </a:solidFill>
-                <a:latin typeface="Arial" pitchFamily="34" charset="0"/>
-                <a:ea typeface="Arial" pitchFamily="34" charset="-122"/>
-                <a:cs typeface="Arial" pitchFamily="34" charset="-120"/>
-              </a:rPr>
-              <a:t>-th of the sum of the numbers in the square. We've just re-derived his rule. </a:t>
-            </a:r>
-            <a:pPr algn="l" indent="0" marL="0">
-              <a:lnSpc>
-                <a:spcPts val="1620"/>
-              </a:lnSpc>
-              <a:spcAft>
-                <a:spcPts val="300"/>
-              </a:spcAft>
-              <a:buNone/>
-            </a:pPr>
-            <a:r>
-              <a:rPr lang="en-US" sz="1200" i="1" dirty="0">
-                <a:solidFill>
-                  <a:srgbClr val="1C2833"/>
-                </a:solidFill>
-                <a:latin typeface="Arial" pitchFamily="34" charset="0"/>
-                <a:ea typeface="Arial" pitchFamily="34" charset="-122"/>
-                <a:cs typeface="Arial" pitchFamily="34" charset="-120"/>
-              </a:rPr>
-              <a:t>(See </a:t>
-            </a:r>
-            <a:pPr algn="l" indent="0" marL="0">
-              <a:lnSpc>
-                <a:spcPts val="1620"/>
-              </a:lnSpc>
-              <a:spcAft>
-                <a:spcPts val="300"/>
-              </a:spcAft>
-              <a:buNone/>
-            </a:pPr>
-            <a:r>
-              <a:rPr lang="en-US" sz="1200" i="1" dirty="0">
-                <a:solidFill>
-                  <a:srgbClr val="1C2833"/>
-                </a:solidFill>
-                <a:latin typeface="Arial" pitchFamily="34" charset="0"/>
-                <a:ea typeface="Arial" pitchFamily="34" charset="-122"/>
-                <a:cs typeface="Arial" pitchFamily="34" charset="-120"/>
-              </a:rPr>
-              <a:t>sources.md</a:t>
-            </a:r>
-            <a:pPr algn="l" indent="0" marL="0">
-              <a:lnSpc>
-                <a:spcPts val="1620"/>
-              </a:lnSpc>
-              <a:spcAft>
-                <a:spcPts val="300"/>
-              </a:spcAft>
-              <a:buNone/>
-            </a:pPr>
-            <a:r>
-              <a:rPr lang="en-US" sz="1200" i="1" dirty="0">
-                <a:solidFill>
-                  <a:srgbClr val="1C2833"/>
-                </a:solidFill>
-                <a:latin typeface="Arial" pitchFamily="34" charset="0"/>
-                <a:ea typeface="Arial" pitchFamily="34" charset="-122"/>
-                <a:cs typeface="Arial" pitchFamily="34" charset="-120"/>
-              </a:rPr>
-              <a:t>.)</a:t>
-            </a:r>
-            <a:endParaRPr lang="en-US" sz="1200" dirty="0"/>
-          </a:p>
-        </p:txBody>
-      </p:sp>
-      <p:sp>
-        <p:nvSpPr>
-          <p:cNvPr id="14" name="Text 12"/>
-          <p:cNvSpPr/>
-          <p:nvPr/>
-        </p:nvSpPr>
-        <p:spPr>
-          <a:xfrm>
-            <a:off x="406301" y="6143476"/>
+            <a:off x="406301" y="4434929"/>
             <a:ext cx="8498026" cy="213271"/>
           </a:xfrm>
           <a:prstGeom prst="rect">
@@ -7208,7 +8489,7 @@
                 <a:ea typeface="Georgia" pitchFamily="34" charset="-122"/>
                 <a:cs typeface="Georgia" pitchFamily="34" charset="-120"/>
               </a:rPr>
-              <a:t>Activity (15 min) — Formative quiz Part A</a:t>
+              <a:t>Core (20 min)</a:t>
             </a:r>
             <a:endParaRPr lang="en-US" sz="1800" dirty="0"/>
           </a:p>
@@ -7222,8 +8503,8 @@
         </p:nvSpPr>
         <p:spPr>
           <a:xfrm>
-            <a:off x="406301" y="870942"/>
-            <a:ext cx="8498026" cy="436066"/>
+            <a:off x="634901" y="883593"/>
+            <a:ext cx="8102798" cy="281880"/>
           </a:xfrm>
           <a:prstGeom prst="rect">
             <a:avLst/>
@@ -7235,6 +8516,173 @@
           <a:bodyPr wrap="square" lIns="0" tIns="0" rIns="0" bIns="0" rtlCol="0" anchor="t"/>
           <a:lstStyle/>
           <a:p>
+            <a:pPr algn="l" marL="342900" indent="-342900">
+              <a:lnSpc>
+                <a:spcPts val="1620"/>
+              </a:lnSpc>
+              <a:spcAft>
+                <a:spcPts val="300"/>
+              </a:spcAft>
+              <a:buSzPct val="100000"/>
+              <a:buChar char="•"/>
+            </a:pPr>
+            <a:r>
+              <a:rPr lang="en-US" sz="1200" b="1" dirty="0">
+                <a:solidFill>
+                  <a:srgbClr val="1C2833"/>
+                </a:solidFill>
+                <a:latin typeface="Arial" pitchFamily="34" charset="0"/>
+                <a:ea typeface="Arial" pitchFamily="34" charset="-122"/>
+                <a:cs typeface="Arial" pitchFamily="34" charset="-120"/>
+              </a:rPr>
+              <a:t>The sum argument.</a:t>
+            </a:r>
+            <a:pPr algn="l" indent="0" marL="0">
+              <a:lnSpc>
+                <a:spcPts val="1620"/>
+              </a:lnSpc>
+              <a:spcAft>
+                <a:spcPts val="300"/>
+              </a:spcAft>
+              <a:buNone/>
+            </a:pPr>
+            <a:r>
+              <a:rPr lang="en-US" sz="1200" dirty="0">
+                <a:solidFill>
+                  <a:srgbClr val="1C2833"/>
+                </a:solidFill>
+                <a:latin typeface="Arial" pitchFamily="34" charset="0"/>
+                <a:ea typeface="Arial" pitchFamily="34" charset="-122"/>
+                <a:cs typeface="Arial" pitchFamily="34" charset="-120"/>
+              </a:rPr>
+              <a:t> Write on the board:</a:t>
+            </a:r>
+            <a:endParaRPr lang="en-US" sz="1200" dirty="0"/>
+          </a:p>
+        </p:txBody>
+      </p:sp>
+      <p:sp>
+        <p:nvSpPr>
+          <p:cNvPr id="5" name="Text 3"/>
+          <p:cNvSpPr/>
+          <p:nvPr/>
+        </p:nvSpPr>
+        <p:spPr>
+          <a:xfrm>
+            <a:off x="406301" y="1266974"/>
+            <a:ext cx="8331398" cy="611981"/>
+          </a:xfrm>
+          <a:prstGeom prst="rect">
+            <a:avLst/>
+          </a:prstGeom>
+          <a:solidFill>
+            <a:srgbClr val="F4F8F9"/>
+          </a:solidFill>
+          <a:ln/>
+        </p:spPr>
+        <p:txBody>
+          <a:bodyPr wrap="square" rtlCol="0" anchor="ctr"/>
+          <a:lstStyle/>
+          <a:p>
+            <a:pPr indent="0" marL="0">
+              <a:buNone/>
+            </a:pPr>
+            <a:endParaRPr lang="en-US" dirty="0"/>
+          </a:p>
+        </p:txBody>
+      </p:sp>
+      <p:sp>
+        <p:nvSpPr>
+          <p:cNvPr id="6" name="Shape 4"/>
+          <p:cNvSpPr/>
+          <p:nvPr/>
+        </p:nvSpPr>
+        <p:spPr>
+          <a:xfrm>
+            <a:off x="434876" y="1266974"/>
+            <a:ext cx="0" cy="611981"/>
+          </a:xfrm>
+          <a:prstGeom prst="line">
+            <a:avLst/>
+          </a:prstGeom>
+          <a:noFill/>
+          <a:ln w="57150">
+            <a:solidFill>
+              <a:srgbClr val="FE4447"/>
+            </a:solidFill>
+            <a:prstDash val="solid"/>
+          </a:ln>
+        </p:spPr>
+      </p:sp>
+      <p:sp>
+        <p:nvSpPr>
+          <p:cNvPr id="7" name="Text 5"/>
+          <p:cNvSpPr/>
+          <p:nvPr/>
+        </p:nvSpPr>
+        <p:spPr>
+          <a:xfrm>
+            <a:off x="692051" y="1457474"/>
+            <a:ext cx="7973389" cy="230981"/>
+          </a:xfrm>
+          <a:prstGeom prst="rect">
+            <a:avLst/>
+          </a:prstGeom>
+          <a:noFill/>
+          <a:ln/>
+        </p:spPr>
+        <p:txBody>
+          <a:bodyPr wrap="square" lIns="0" tIns="0" rIns="0" bIns="0" rtlCol="0" anchor="t"/>
+          <a:lstStyle/>
+          <a:p>
+            <a:pPr algn="l" indent="0" marL="0">
+              <a:lnSpc>
+                <a:spcPts val="1820"/>
+              </a:lnSpc>
+              <a:spcBef>
+                <a:spcPts val="300"/>
+              </a:spcBef>
+              <a:spcAft>
+                <a:spcPts val="300"/>
+              </a:spcAft>
+              <a:buNone/>
+            </a:pPr>
+            <a:r>
+              <a:rPr lang="en-US" sz="1300" i="1" dirty="0">
+                <a:solidFill>
+                  <a:srgbClr val="1C2833"/>
+                </a:solidFill>
+                <a:latin typeface="Georgia" pitchFamily="34" charset="0"/>
+                <a:ea typeface="Georgia" pitchFamily="34" charset="-122"/>
+                <a:cs typeface="Georgia" pitchFamily="34" charset="-120"/>
+              </a:rPr>
+              <a:t>Add up all the numbers in the square: 1 + 2 + 3 + 4 + 5 + 6 + 7 + 8 + 9 = 45.</a:t>
+            </a:r>
+            <a:endParaRPr lang="en-US" sz="1300" dirty="0"/>
+          </a:p>
+        </p:txBody>
+      </p:sp>
+      <p:sp>
+        <p:nvSpPr>
+          <p:cNvPr id="8" name="Text 6"/>
+          <p:cNvSpPr/>
+          <p:nvPr/>
+        </p:nvSpPr>
+        <p:spPr>
+          <a:xfrm>
+            <a:off x="406301" y="1967805"/>
+            <a:ext cx="8498026" cy="426541"/>
+          </a:xfrm>
+          <a:prstGeom prst="rect">
+            <a:avLst/>
+          </a:prstGeom>
+          <a:noFill/>
+          <a:ln/>
+        </p:spPr>
+        <p:txBody>
+          <a:bodyPr wrap="square" lIns="0" tIns="0" rIns="0" bIns="0" rtlCol="0" anchor="t"/>
+          <a:lstStyle/>
+          <a:p>
             <a:pPr algn="l" indent="0" marL="0">
               <a:lnSpc>
                 <a:spcPts val="1680"/>
@@ -7248,61 +8696,15 @@
               <a:buNone/>
             </a:pPr>
             <a:r>
-              <a:rPr lang="en-US" sz="1200" dirty="0">
-                <a:solidFill>
-                  <a:srgbClr val="1C2833"/>
-                </a:solidFill>
-                <a:latin typeface="Arial" pitchFamily="34" charset="0"/>
-                <a:ea typeface="Arial" pitchFamily="34" charset="-122"/>
-                <a:cs typeface="Arial" pitchFamily="34" charset="-120"/>
-              </a:rPr>
-              <a:t>– Hand out </a:t>
-            </a:r>
-            <a:pPr algn="l" indent="0" marL="0">
-              <a:lnSpc>
-                <a:spcPts val="1680"/>
-              </a:lnSpc>
-              <a:spcBef>
-                <a:spcPts val="300"/>
-              </a:spcBef>
-              <a:spcAft>
-                <a:spcPts val="300"/>
-              </a:spcAft>
-              <a:buNone/>
-            </a:pPr>
-            <a:r>
-              <a:rPr lang="en-US" sz="1200" dirty="0">
-                <a:solidFill>
-                  <a:srgbClr val="1C2833"/>
-                </a:solidFill>
-                <a:latin typeface="Arial" pitchFamily="34" charset="0"/>
-                <a:ea typeface="Arial" pitchFamily="34" charset="-122"/>
-                <a:cs typeface="Arial" pitchFamily="34" charset="-120"/>
-              </a:rPr>
-              <a:t>quizzes/formative.md</a:t>
-            </a:r>
-            <a:pPr algn="l" indent="0" marL="0">
-              <a:lnSpc>
-                <a:spcPts val="1680"/>
-              </a:lnSpc>
-              <a:spcBef>
-                <a:spcPts val="300"/>
-              </a:spcBef>
-              <a:spcAft>
-                <a:spcPts val="300"/>
-              </a:spcAft>
-              <a:buNone/>
-            </a:pPr>
-            <a:r>
-              <a:rPr lang="en-US" sz="1200" dirty="0">
-                <a:solidFill>
-                  <a:srgbClr val="1C2833"/>
-                </a:solidFill>
-                <a:latin typeface="Arial" pitchFamily="34" charset="0"/>
-                <a:ea typeface="Arial" pitchFamily="34" charset="-122"/>
-                <a:cs typeface="Arial" pitchFamily="34" charset="-120"/>
-              </a:rPr>
-              <a:t> Part A. – Students complete individually. 10 minutes; 3 minutes for self-check against the board answer key. – Part A is 6 short questions: 3 on the formula, 3 on verifying given squares.</a:t>
+              <a:rPr lang="en-US" sz="1200" i="1" dirty="0">
+                <a:solidFill>
+                  <a:srgbClr val="1C2833"/>
+                </a:solidFill>
+                <a:latin typeface="Arial" pitchFamily="34" charset="0"/>
+                <a:ea typeface="Arial" pitchFamily="34" charset="-122"/>
+                <a:cs typeface="Arial" pitchFamily="34" charset="-120"/>
+              </a:rPr>
+              <a:t>"This total goes into the square once. Now — the square has 3 rows. Each row has the same sum S. So 3 × S = 45 → S = 15."</a:t>
             </a:r>
             <a:endParaRPr lang="en-US" sz="1200" dirty="0"/>
           </a:p>
@@ -7310,7 +8712,7 @@
       </p:sp>
       <p:sp>
         <p:nvSpPr>
-          <p:cNvPr id="5" name="Text 3"/>
+          <p:cNvPr id="9" name="Text 7"/>
           <p:cNvSpPr/>
           <p:nvPr/>
         </p:nvSpPr>
@@ -7460,7 +8862,7 @@
                 <a:ea typeface="Georgia" pitchFamily="34" charset="-122"/>
                 <a:cs typeface="Georgia" pitchFamily="34" charset="-120"/>
               </a:rPr>
-              <a:t>Wrap-up (5 min)</a:t>
+              <a:t>Core (20 min) (cont.)</a:t>
             </a:r>
             <a:endParaRPr lang="en-US" sz="1800" dirty="0"/>
           </a:p>
@@ -7474,113 +8876,7 @@
         </p:nvSpPr>
         <p:spPr>
           <a:xfrm>
-            <a:off x="634901" y="883593"/>
-            <a:ext cx="8102798" cy="487561"/>
-          </a:xfrm>
-          <a:prstGeom prst="rect">
-            <a:avLst/>
-          </a:prstGeom>
-          <a:noFill/>
-          <a:ln/>
-        </p:spPr>
-        <p:txBody>
-          <a:bodyPr wrap="square" lIns="0" tIns="0" rIns="0" bIns="0" rtlCol="0" anchor="t"/>
-          <a:lstStyle/>
-          <a:p>
-            <a:pPr algn="l" marL="342900" indent="-342900">
-              <a:lnSpc>
-                <a:spcPts val="1620"/>
-              </a:lnSpc>
-              <a:spcAft>
-                <a:spcPts val="300"/>
-              </a:spcAft>
-              <a:buSzPct val="100000"/>
-              <a:buChar char="•"/>
-            </a:pPr>
-            <a:r>
-              <a:rPr lang="en-US" sz="1200" i="1" dirty="0">
-                <a:solidFill>
-                  <a:srgbClr val="1C2833"/>
-                </a:solidFill>
-                <a:latin typeface="Arial" pitchFamily="34" charset="0"/>
-                <a:ea typeface="Arial" pitchFamily="34" charset="-122"/>
-                <a:cs typeface="Arial" pitchFamily="34" charset="-120"/>
-              </a:rPr>
-              <a:t>"Quick check: what would the magic constant be for a 10×10 magic square with the numbers 1 to 100?"</a:t>
-            </a:r>
-            <a:pPr algn="l" indent="0" marL="0">
-              <a:lnSpc>
-                <a:spcPts val="1620"/>
-              </a:lnSpc>
-              <a:spcAft>
-                <a:spcPts val="300"/>
-              </a:spcAft>
-              <a:buNone/>
-            </a:pPr>
-            <a:r>
-              <a:rPr lang="en-US" sz="1200" dirty="0">
-                <a:solidFill>
-                  <a:srgbClr val="1C2833"/>
-                </a:solidFill>
-                <a:latin typeface="Arial" pitchFamily="34" charset="0"/>
-                <a:ea typeface="Arial" pitchFamily="34" charset="-122"/>
-                <a:cs typeface="Arial" pitchFamily="34" charset="-120"/>
-              </a:rPr>
-              <a:t> Class works it out: S = 10 × 101 / 2 = </a:t>
-            </a:r>
-            <a:pPr algn="l" indent="0" marL="0">
-              <a:lnSpc>
-                <a:spcPts val="1620"/>
-              </a:lnSpc>
-              <a:spcAft>
-                <a:spcPts val="300"/>
-              </a:spcAft>
-              <a:buNone/>
-            </a:pPr>
-            <a:r>
-              <a:rPr lang="en-US" sz="1200" b="1" dirty="0">
-                <a:solidFill>
-                  <a:srgbClr val="1C2833"/>
-                </a:solidFill>
-                <a:latin typeface="Arial" pitchFamily="34" charset="0"/>
-                <a:ea typeface="Arial" pitchFamily="34" charset="-122"/>
-                <a:cs typeface="Arial" pitchFamily="34" charset="-120"/>
-              </a:rPr>
-              <a:t>505</a:t>
-            </a:r>
-            <a:pPr algn="l" indent="0" marL="0">
-              <a:lnSpc>
-                <a:spcPts val="1620"/>
-              </a:lnSpc>
-              <a:spcAft>
-                <a:spcPts val="300"/>
-              </a:spcAft>
-              <a:buNone/>
-            </a:pPr>
-            <a:r>
-              <a:rPr lang="en-US" sz="1200" dirty="0">
-                <a:solidFill>
-                  <a:srgbClr val="1C2833"/>
-                </a:solidFill>
-                <a:latin typeface="Arial" pitchFamily="34" charset="0"/>
-                <a:ea typeface="Arial" pitchFamily="34" charset="-122"/>
-                <a:cs typeface="Arial" pitchFamily="34" charset="-120"/>
-              </a:rPr>
-              <a:t>.</a:t>
-            </a:r>
-            <a:endParaRPr lang="en-US" sz="1200" dirty="0"/>
-          </a:p>
-        </p:txBody>
-      </p:sp>
-      <p:sp>
-        <p:nvSpPr>
-          <p:cNvPr id="5" name="Text 3"/>
-          <p:cNvSpPr/>
-          <p:nvPr/>
-        </p:nvSpPr>
-        <p:spPr>
-          <a:xfrm>
-            <a:off x="406301" y="1460004"/>
+            <a:off x="406301" y="870942"/>
             <a:ext cx="8498026" cy="213271"/>
           </a:xfrm>
           <a:prstGeom prst="rect">
@@ -7614,15 +8910,78 @@
                 <a:ea typeface="Arial" pitchFamily="34" charset="-122"/>
                 <a:cs typeface="Arial" pitchFamily="34" charset="-120"/>
               </a:rPr>
-              <a:t>– Preview Day 3: </a:t>
-            </a:r>
-            <a:pPr algn="l" indent="0" marL="0">
-              <a:lnSpc>
-                <a:spcPts val="1680"/>
-              </a:lnSpc>
-              <a:spcBef>
-                <a:spcPts val="300"/>
-              </a:spcBef>
+              <a:t>Repeat the logic with student input. They should arrive at the formula step-by-step.</a:t>
+            </a:r>
+            <a:endParaRPr lang="en-US" sz="1200" dirty="0"/>
+          </a:p>
+        </p:txBody>
+      </p:sp>
+      <p:sp>
+        <p:nvSpPr>
+          <p:cNvPr id="5" name="Text 3"/>
+          <p:cNvSpPr/>
+          <p:nvPr/>
+        </p:nvSpPr>
+        <p:spPr>
+          <a:xfrm>
+            <a:off x="634901" y="1173063"/>
+            <a:ext cx="8102798" cy="281880"/>
+          </a:xfrm>
+          <a:prstGeom prst="rect">
+            <a:avLst/>
+          </a:prstGeom>
+          <a:noFill/>
+          <a:ln/>
+        </p:spPr>
+        <p:txBody>
+          <a:bodyPr wrap="square" lIns="0" tIns="0" rIns="0" bIns="0" rtlCol="0" anchor="t"/>
+          <a:lstStyle/>
+          <a:p>
+            <a:pPr algn="l" marL="342900" indent="-342900">
+              <a:lnSpc>
+                <a:spcPts val="1620"/>
+              </a:lnSpc>
+              <a:spcAft>
+                <a:spcPts val="300"/>
+              </a:spcAft>
+              <a:buSzPct val="100000"/>
+              <a:buChar char="•"/>
+            </a:pPr>
+            <a:r>
+              <a:rPr lang="en-US" sz="1200" b="1" dirty="0">
+                <a:solidFill>
+                  <a:srgbClr val="1C2833"/>
+                </a:solidFill>
+                <a:latin typeface="Arial" pitchFamily="34" charset="0"/>
+                <a:ea typeface="Arial" pitchFamily="34" charset="-122"/>
+                <a:cs typeface="Arial" pitchFamily="34" charset="-120"/>
+              </a:rPr>
+              <a:t>Generalise.</a:t>
+            </a:r>
+            <a:pPr algn="l" indent="0" marL="0">
+              <a:lnSpc>
+                <a:spcPts val="1620"/>
+              </a:lnSpc>
+              <a:spcAft>
+                <a:spcPts val="300"/>
+              </a:spcAft>
+              <a:buNone/>
+            </a:pPr>
+            <a:r>
+              <a:rPr lang="en-US" sz="1200" dirty="0">
+                <a:solidFill>
+                  <a:srgbClr val="1C2833"/>
+                </a:solidFill>
+                <a:latin typeface="Arial" pitchFamily="34" charset="0"/>
+                <a:ea typeface="Arial" pitchFamily="34" charset="-122"/>
+                <a:cs typeface="Arial" pitchFamily="34" charset="-120"/>
+              </a:rPr>
+              <a:t> For an </a:t>
+            </a:r>
+            <a:pPr algn="l" indent="0" marL="0">
+              <a:lnSpc>
+                <a:spcPts val="1620"/>
+              </a:lnSpc>
               <a:spcAft>
                 <a:spcPts val="300"/>
               </a:spcAft>
@@ -7637,7 +8996,67 @@
                 <a:ea typeface="Arial" pitchFamily="34" charset="-122"/>
                 <a:cs typeface="Arial" pitchFamily="34" charset="-120"/>
               </a:rPr>
-              <a:t>"Tomorrow we ask: how many different 3×3 magic squares are there with 1 to 9? Take guesses tonight."</a:t>
+              <a:t>n × n</a:t>
+            </a:r>
+            <a:pPr algn="l" indent="0" marL="0">
+              <a:lnSpc>
+                <a:spcPts val="1620"/>
+              </a:lnSpc>
+              <a:spcAft>
+                <a:spcPts val="300"/>
+              </a:spcAft>
+              <a:buNone/>
+            </a:pPr>
+            <a:r>
+              <a:rPr lang="en-US" sz="1200" dirty="0">
+                <a:solidFill>
+                  <a:srgbClr val="1C2833"/>
+                </a:solidFill>
+                <a:latin typeface="Arial" pitchFamily="34" charset="0"/>
+                <a:ea typeface="Arial" pitchFamily="34" charset="-122"/>
+                <a:cs typeface="Arial" pitchFamily="34" charset="-120"/>
+              </a:rPr>
+              <a:t> square containing the numbers 1, 2, ..., </a:t>
+            </a:r>
+            <a:pPr algn="l" indent="0" marL="0">
+              <a:lnSpc>
+                <a:spcPts val="1620"/>
+              </a:lnSpc>
+              <a:spcAft>
+                <a:spcPts val="300"/>
+              </a:spcAft>
+              <a:buNone/>
+            </a:pPr>
+            <a:r>
+              <a:rPr lang="en-US" sz="1200" i="1" dirty="0">
+                <a:solidFill>
+                  <a:srgbClr val="1C2833"/>
+                </a:solidFill>
+                <a:latin typeface="Arial" pitchFamily="34" charset="0"/>
+                <a:ea typeface="Arial" pitchFamily="34" charset="-122"/>
+                <a:cs typeface="Arial" pitchFamily="34" charset="-120"/>
+              </a:rPr>
+              <a:t>n</a:t>
+            </a:r>
+            <a:pPr algn="l" indent="0" marL="0">
+              <a:lnSpc>
+                <a:spcPts val="1620"/>
+              </a:lnSpc>
+              <a:spcAft>
+                <a:spcPts val="300"/>
+              </a:spcAft>
+              <a:buNone/>
+            </a:pPr>
+            <a:r>
+              <a:rPr lang="en-US" sz="1200" dirty="0">
+                <a:solidFill>
+                  <a:srgbClr val="1C2833"/>
+                </a:solidFill>
+                <a:latin typeface="Arial" pitchFamily="34" charset="0"/>
+                <a:ea typeface="Arial" pitchFamily="34" charset="-122"/>
+                <a:cs typeface="Arial" pitchFamily="34" charset="-120"/>
+              </a:rPr>
+              <a:t>²:</a:t>
             </a:r>
             <a:endParaRPr lang="en-US" sz="1200" dirty="0"/>
           </a:p>
@@ -7795,7 +9214,7 @@
                 <a:ea typeface="Georgia" pitchFamily="34" charset="-122"/>
                 <a:cs typeface="Georgia" pitchFamily="34" charset="-120"/>
               </a:rPr>
-              <a:t>Student-facing content</a:t>
+              <a:t>Core (20 min) (cont.)</a:t>
             </a:r>
             <a:endParaRPr lang="en-US" sz="1800" dirty="0"/>
           </a:p>
@@ -7810,7 +9229,7 @@
         <p:spPr>
           <a:xfrm>
             <a:off x="406301" y="883593"/>
-            <a:ext cx="8331398" cy="2188369"/>
+            <a:ext cx="8331398" cy="1150144"/>
           </a:xfrm>
           <a:prstGeom prst="rect">
             <a:avLst/>
@@ -7840,7 +9259,7 @@
         <p:spPr>
           <a:xfrm>
             <a:off x="434876" y="883593"/>
-            <a:ext cx="0" cy="2188369"/>
+            <a:ext cx="0" cy="1150144"/>
           </a:xfrm>
           <a:prstGeom prst="line">
             <a:avLst/>
@@ -7888,7 +9307,7 @@
               <a:buNone/>
             </a:pPr>
             <a:r>
-              <a:rPr lang="en-US" sz="1300" b="1" i="1" dirty="0">
+              <a:rPr lang="en-US" sz="1300" dirty="0">
                 <a:solidFill>
                   <a:srgbClr val="1C2833"/>
                 </a:solidFill>
@@ -7896,7 +9315,145 @@
                 <a:ea typeface="Georgia" pitchFamily="34" charset="-122"/>
                 <a:cs typeface="Georgia" pitchFamily="34" charset="-120"/>
               </a:rPr>
-              <a:t>The magic constant formula.</a:t>
+              <a:t>Sum of all numbers = 1 + 2 + ... + </a:t>
+            </a:r>
+            <a:pPr algn="l" indent="0" marL="0">
+              <a:lnSpc>
+                <a:spcPts val="1820"/>
+              </a:lnSpc>
+              <a:spcBef>
+                <a:spcPts val="300"/>
+              </a:spcBef>
+              <a:spcAft>
+                <a:spcPts val="300"/>
+              </a:spcAft>
+              <a:buNone/>
+            </a:pPr>
+            <a:r>
+              <a:rPr lang="en-US" sz="1300" i="1" dirty="0">
+                <a:solidFill>
+                  <a:srgbClr val="1C2833"/>
+                </a:solidFill>
+                <a:latin typeface="Georgia" pitchFamily="34" charset="0"/>
+                <a:ea typeface="Georgia" pitchFamily="34" charset="-122"/>
+                <a:cs typeface="Georgia" pitchFamily="34" charset="-120"/>
+              </a:rPr>
+              <a:t>n</a:t>
+            </a:r>
+            <a:pPr algn="l" indent="0" marL="0">
+              <a:lnSpc>
+                <a:spcPts val="1820"/>
+              </a:lnSpc>
+              <a:spcBef>
+                <a:spcPts val="300"/>
+              </a:spcBef>
+              <a:spcAft>
+                <a:spcPts val="300"/>
+              </a:spcAft>
+              <a:buNone/>
+            </a:pPr>
+            <a:r>
+              <a:rPr lang="en-US" sz="1300" dirty="0">
+                <a:solidFill>
+                  <a:srgbClr val="1C2833"/>
+                </a:solidFill>
+                <a:latin typeface="Georgia" pitchFamily="34" charset="0"/>
+                <a:ea typeface="Georgia" pitchFamily="34" charset="-122"/>
+                <a:cs typeface="Georgia" pitchFamily="34" charset="-120"/>
+              </a:rPr>
+              <a:t>² = </a:t>
+            </a:r>
+            <a:pPr algn="l" indent="0" marL="0">
+              <a:lnSpc>
+                <a:spcPts val="1820"/>
+              </a:lnSpc>
+              <a:spcBef>
+                <a:spcPts val="300"/>
+              </a:spcBef>
+              <a:spcAft>
+                <a:spcPts val="300"/>
+              </a:spcAft>
+              <a:buNone/>
+            </a:pPr>
+            <a:r>
+              <a:rPr lang="en-US" sz="1300" i="1" dirty="0">
+                <a:solidFill>
+                  <a:srgbClr val="1C2833"/>
+                </a:solidFill>
+                <a:latin typeface="Georgia" pitchFamily="34" charset="0"/>
+                <a:ea typeface="Georgia" pitchFamily="34" charset="-122"/>
+                <a:cs typeface="Georgia" pitchFamily="34" charset="-120"/>
+              </a:rPr>
+              <a:t>n</a:t>
+            </a:r>
+            <a:pPr algn="l" indent="0" marL="0">
+              <a:lnSpc>
+                <a:spcPts val="1820"/>
+              </a:lnSpc>
+              <a:spcBef>
+                <a:spcPts val="300"/>
+              </a:spcBef>
+              <a:spcAft>
+                <a:spcPts val="300"/>
+              </a:spcAft>
+              <a:buNone/>
+            </a:pPr>
+            <a:r>
+              <a:rPr lang="en-US" sz="1300" dirty="0">
+                <a:solidFill>
+                  <a:srgbClr val="1C2833"/>
+                </a:solidFill>
+                <a:latin typeface="Georgia" pitchFamily="34" charset="0"/>
+                <a:ea typeface="Georgia" pitchFamily="34" charset="-122"/>
+                <a:cs typeface="Georgia" pitchFamily="34" charset="-120"/>
+              </a:rPr>
+              <a:t>²(</a:t>
+            </a:r>
+            <a:pPr algn="l" indent="0" marL="0">
+              <a:lnSpc>
+                <a:spcPts val="1820"/>
+              </a:lnSpc>
+              <a:spcBef>
+                <a:spcPts val="300"/>
+              </a:spcBef>
+              <a:spcAft>
+                <a:spcPts val="300"/>
+              </a:spcAft>
+              <a:buNone/>
+            </a:pPr>
+            <a:r>
+              <a:rPr lang="en-US" sz="1300" i="1" dirty="0">
+                <a:solidFill>
+                  <a:srgbClr val="1C2833"/>
+                </a:solidFill>
+                <a:latin typeface="Georgia" pitchFamily="34" charset="0"/>
+                <a:ea typeface="Georgia" pitchFamily="34" charset="-122"/>
+                <a:cs typeface="Georgia" pitchFamily="34" charset="-120"/>
+              </a:rPr>
+              <a:t>n</a:t>
+            </a:r>
+            <a:pPr algn="l" indent="0" marL="0">
+              <a:lnSpc>
+                <a:spcPts val="1820"/>
+              </a:lnSpc>
+              <a:spcBef>
+                <a:spcPts val="300"/>
+              </a:spcBef>
+              <a:spcAft>
+                <a:spcPts val="300"/>
+              </a:spcAft>
+              <a:buNone/>
+            </a:pPr>
+            <a:r>
+              <a:rPr lang="en-US" sz="1300" dirty="0">
+                <a:solidFill>
+                  <a:srgbClr val="1C2833"/>
+                </a:solidFill>
+                <a:latin typeface="Georgia" pitchFamily="34" charset="0"/>
+                <a:ea typeface="Georgia" pitchFamily="34" charset="-122"/>
+                <a:cs typeface="Georgia" pitchFamily="34" charset="-120"/>
+              </a:rPr>
+              <a:t>² + 1) / 2</a:t>
             </a:r>
             <a:endParaRPr lang="en-US" sz="1300" dirty="0"/>
           </a:p>
@@ -7944,7 +9501,7 @@
                 <a:ea typeface="Georgia" pitchFamily="34" charset="-122"/>
                 <a:cs typeface="Georgia" pitchFamily="34" charset="-120"/>
               </a:rPr>
-              <a:t>For an </a:t>
+              <a:t>The square has </a:t>
             </a:r>
             <a:pPr algn="l" indent="0" marL="0">
               <a:lnSpc>
@@ -7967,7 +9524,7 @@
                 <a:ea typeface="Georgia" pitchFamily="34" charset="-122"/>
                 <a:cs typeface="Georgia" pitchFamily="34" charset="-120"/>
               </a:rPr>
-              <a:t>n × n</a:t>
+              <a:t>n</a:t>
             </a:r>
             <a:pPr algn="l" indent="0" marL="0">
               <a:lnSpc>
@@ -7990,7 +9547,7 @@
                 <a:ea typeface="Georgia" pitchFamily="34" charset="-122"/>
                 <a:cs typeface="Georgia" pitchFamily="34" charset="-120"/>
               </a:rPr>
-              <a:t> magic square containing the numbers 1, 2, ..., </a:t>
+              <a:t> rows, each summing to </a:t>
             </a:r>
             <a:pPr algn="l" indent="0" marL="0">
               <a:lnSpc>
@@ -8013,7 +9570,7 @@
                 <a:ea typeface="Georgia" pitchFamily="34" charset="-122"/>
                 <a:cs typeface="Georgia" pitchFamily="34" charset="-120"/>
               </a:rPr>
-              <a:t>n</a:t>
+              <a:t>S</a:t>
             </a:r>
             <a:pPr algn="l" indent="0" marL="0">
               <a:lnSpc>
@@ -8036,7 +9593,7 @@
                 <a:ea typeface="Georgia" pitchFamily="34" charset="-122"/>
                 <a:cs typeface="Georgia" pitchFamily="34" charset="-120"/>
               </a:rPr>
-              <a:t>²:</a:t>
+              <a:t>. So:</a:t>
             </a:r>
             <a:endParaRPr lang="en-US" sz="1300" dirty="0"/>
           </a:p>
@@ -8076,7 +9633,7 @@
               <a:buNone/>
             </a:pPr>
             <a:r>
-              <a:rPr lang="en-US" sz="1300" dirty="0">
+              <a:rPr lang="en-US" sz="1300" i="1" dirty="0">
                 <a:solidFill>
                   <a:srgbClr val="1C2833"/>
                 </a:solidFill>
@@ -8084,7 +9641,7 @@
                 <a:ea typeface="Georgia" pitchFamily="34" charset="-122"/>
                 <a:cs typeface="Georgia" pitchFamily="34" charset="-120"/>
               </a:rPr>
-              <a:t>&gt; </a:t>
+              <a:t>n</a:t>
             </a:r>
             <a:pPr algn="l" indent="0" marL="0">
               <a:lnSpc>
@@ -8099,7 +9656,7 @@
               <a:buNone/>
             </a:pPr>
             <a:r>
-              <a:rPr lang="en-US" sz="1300" b="1" i="1" dirty="0">
+              <a:rPr lang="en-US" sz="1300" dirty="0">
                 <a:solidFill>
                   <a:srgbClr val="1C2833"/>
                 </a:solidFill>
@@ -8107,6 +9664,167 @@
                 <a:ea typeface="Georgia" pitchFamily="34" charset="-122"/>
                 <a:cs typeface="Georgia" pitchFamily="34" charset="-120"/>
               </a:rPr>
+              <a:t> × </a:t>
+            </a:r>
+            <a:pPr algn="l" indent="0" marL="0">
+              <a:lnSpc>
+                <a:spcPts val="1820"/>
+              </a:lnSpc>
+              <a:spcBef>
+                <a:spcPts val="300"/>
+              </a:spcBef>
+              <a:spcAft>
+                <a:spcPts val="300"/>
+              </a:spcAft>
+              <a:buNone/>
+            </a:pPr>
+            <a:r>
+              <a:rPr lang="en-US" sz="1300" i="1" dirty="0">
+                <a:solidFill>
+                  <a:srgbClr val="1C2833"/>
+                </a:solidFill>
+                <a:latin typeface="Georgia" pitchFamily="34" charset="0"/>
+                <a:ea typeface="Georgia" pitchFamily="34" charset="-122"/>
+                <a:cs typeface="Georgia" pitchFamily="34" charset="-120"/>
+              </a:rPr>
+              <a:t>S</a:t>
+            </a:r>
+            <a:pPr algn="l" indent="0" marL="0">
+              <a:lnSpc>
+                <a:spcPts val="1820"/>
+              </a:lnSpc>
+              <a:spcBef>
+                <a:spcPts val="300"/>
+              </a:spcBef>
+              <a:spcAft>
+                <a:spcPts val="300"/>
+              </a:spcAft>
+              <a:buNone/>
+            </a:pPr>
+            <a:r>
+              <a:rPr lang="en-US" sz="1300" dirty="0">
+                <a:solidFill>
+                  <a:srgbClr val="1C2833"/>
+                </a:solidFill>
+                <a:latin typeface="Georgia" pitchFamily="34" charset="0"/>
+                <a:ea typeface="Georgia" pitchFamily="34" charset="-122"/>
+                <a:cs typeface="Georgia" pitchFamily="34" charset="-120"/>
+              </a:rPr>
+              <a:t> = </a:t>
+            </a:r>
+            <a:pPr algn="l" indent="0" marL="0">
+              <a:lnSpc>
+                <a:spcPts val="1820"/>
+              </a:lnSpc>
+              <a:spcBef>
+                <a:spcPts val="300"/>
+              </a:spcBef>
+              <a:spcAft>
+                <a:spcPts val="300"/>
+              </a:spcAft>
+              <a:buNone/>
+            </a:pPr>
+            <a:r>
+              <a:rPr lang="en-US" sz="1300" i="1" dirty="0">
+                <a:solidFill>
+                  <a:srgbClr val="1C2833"/>
+                </a:solidFill>
+                <a:latin typeface="Georgia" pitchFamily="34" charset="0"/>
+                <a:ea typeface="Georgia" pitchFamily="34" charset="-122"/>
+                <a:cs typeface="Georgia" pitchFamily="34" charset="-120"/>
+              </a:rPr>
+              <a:t>n</a:t>
+            </a:r>
+            <a:pPr algn="l" indent="0" marL="0">
+              <a:lnSpc>
+                <a:spcPts val="1820"/>
+              </a:lnSpc>
+              <a:spcBef>
+                <a:spcPts val="300"/>
+              </a:spcBef>
+              <a:spcAft>
+                <a:spcPts val="300"/>
+              </a:spcAft>
+              <a:buNone/>
+            </a:pPr>
+            <a:r>
+              <a:rPr lang="en-US" sz="1300" dirty="0">
+                <a:solidFill>
+                  <a:srgbClr val="1C2833"/>
+                </a:solidFill>
+                <a:latin typeface="Georgia" pitchFamily="34" charset="0"/>
+                <a:ea typeface="Georgia" pitchFamily="34" charset="-122"/>
+                <a:cs typeface="Georgia" pitchFamily="34" charset="-120"/>
+              </a:rPr>
+              <a:t>²(</a:t>
+            </a:r>
+            <a:pPr algn="l" indent="0" marL="0">
+              <a:lnSpc>
+                <a:spcPts val="1820"/>
+              </a:lnSpc>
+              <a:spcBef>
+                <a:spcPts val="300"/>
+              </a:spcBef>
+              <a:spcAft>
+                <a:spcPts val="300"/>
+              </a:spcAft>
+              <a:buNone/>
+            </a:pPr>
+            <a:r>
+              <a:rPr lang="en-US" sz="1300" i="1" dirty="0">
+                <a:solidFill>
+                  <a:srgbClr val="1C2833"/>
+                </a:solidFill>
+                <a:latin typeface="Georgia" pitchFamily="34" charset="0"/>
+                <a:ea typeface="Georgia" pitchFamily="34" charset="-122"/>
+                <a:cs typeface="Georgia" pitchFamily="34" charset="-120"/>
+              </a:rPr>
+              <a:t>n</a:t>
+            </a:r>
+            <a:pPr algn="l" indent="0" marL="0">
+              <a:lnSpc>
+                <a:spcPts val="1820"/>
+              </a:lnSpc>
+              <a:spcBef>
+                <a:spcPts val="300"/>
+              </a:spcBef>
+              <a:spcAft>
+                <a:spcPts val="300"/>
+              </a:spcAft>
+              <a:buNone/>
+            </a:pPr>
+            <a:r>
+              <a:rPr lang="en-US" sz="1300" dirty="0">
+                <a:solidFill>
+                  <a:srgbClr val="1C2833"/>
+                </a:solidFill>
+                <a:latin typeface="Georgia" pitchFamily="34" charset="0"/>
+                <a:ea typeface="Georgia" pitchFamily="34" charset="-122"/>
+                <a:cs typeface="Georgia" pitchFamily="34" charset="-120"/>
+              </a:rPr>
+              <a:t>² + 1) / 2 → </a:t>
+            </a:r>
+            <a:pPr algn="l" indent="0" marL="0">
+              <a:lnSpc>
+                <a:spcPts val="1820"/>
+              </a:lnSpc>
+              <a:spcBef>
+                <a:spcPts val="300"/>
+              </a:spcBef>
+              <a:spcAft>
+                <a:spcPts val="300"/>
+              </a:spcAft>
+              <a:buNone/>
+            </a:pPr>
+            <a:r>
+              <a:rPr lang="en-US" sz="1300" b="1" i="1" dirty="0">
+                <a:solidFill>
+                  <a:srgbClr val="1C2833"/>
+                </a:solidFill>
+                <a:latin typeface="Georgia" pitchFamily="34" charset="0"/>
+                <a:ea typeface="Georgia" pitchFamily="34" charset="-122"/>
+                <a:cs typeface="Georgia" pitchFamily="34" charset="-120"/>
+              </a:rPr>
               <a:t>S = n(n² + 1) / 2</a:t>
             </a:r>
             <a:endParaRPr lang="en-US" sz="1300" dirty="0"/>
@@ -8121,8 +9839,8 @@
         </p:nvSpPr>
         <p:spPr>
           <a:xfrm>
-            <a:off x="692051" y="1881336"/>
-            <a:ext cx="7973389" cy="461963"/>
+            <a:off x="634901" y="2135237"/>
+            <a:ext cx="8102798" cy="281880"/>
           </a:xfrm>
           <a:prstGeom prst="rect">
             <a:avLst/>
@@ -8134,513 +9852,88 @@
           <a:bodyPr wrap="square" lIns="0" tIns="0" rIns="0" bIns="0" rtlCol="0" anchor="t"/>
           <a:lstStyle/>
           <a:p>
-            <a:pPr algn="l" indent="0" marL="0">
-              <a:lnSpc>
-                <a:spcPts val="1820"/>
-              </a:lnSpc>
-              <a:spcBef>
-                <a:spcPts val="300"/>
-              </a:spcBef>
-              <a:spcAft>
-                <a:spcPts val="300"/>
-              </a:spcAft>
-              <a:buNone/>
-            </a:pPr>
-            <a:r>
-              <a:rPr lang="en-US" sz="1300" b="1" i="1" dirty="0">
-                <a:solidFill>
-                  <a:srgbClr val="1C2833"/>
-                </a:solidFill>
-                <a:latin typeface="Georgia" pitchFamily="34" charset="0"/>
-                <a:ea typeface="Georgia" pitchFamily="34" charset="-122"/>
-                <a:cs typeface="Georgia" pitchFamily="34" charset="-120"/>
-              </a:rPr>
-              <a:t>Why?</a:t>
-            </a:r>
-            <a:pPr algn="l" indent="0" marL="0">
-              <a:lnSpc>
-                <a:spcPts val="1820"/>
-              </a:lnSpc>
-              <a:spcBef>
-                <a:spcPts val="300"/>
-              </a:spcBef>
-              <a:spcAft>
-                <a:spcPts val="300"/>
-              </a:spcAft>
-              <a:buNone/>
-            </a:pPr>
-            <a:r>
-              <a:rPr lang="en-US" sz="1300" dirty="0">
-                <a:solidFill>
-                  <a:srgbClr val="1C2833"/>
-                </a:solidFill>
-                <a:latin typeface="Georgia" pitchFamily="34" charset="0"/>
-                <a:ea typeface="Georgia" pitchFamily="34" charset="-122"/>
-                <a:cs typeface="Georgia" pitchFamily="34" charset="-120"/>
-              </a:rPr>
-              <a:t> The sum of all </a:t>
-            </a:r>
-            <a:pPr algn="l" indent="0" marL="0">
-              <a:lnSpc>
-                <a:spcPts val="1820"/>
-              </a:lnSpc>
-              <a:spcBef>
-                <a:spcPts val="300"/>
-              </a:spcBef>
-              <a:spcAft>
-                <a:spcPts val="300"/>
-              </a:spcAft>
-              <a:buNone/>
-            </a:pPr>
-            <a:r>
-              <a:rPr lang="en-US" sz="1300" i="1" dirty="0">
-                <a:solidFill>
-                  <a:srgbClr val="1C2833"/>
-                </a:solidFill>
-                <a:latin typeface="Georgia" pitchFamily="34" charset="0"/>
-                <a:ea typeface="Georgia" pitchFamily="34" charset="-122"/>
-                <a:cs typeface="Georgia" pitchFamily="34" charset="-120"/>
+            <a:pPr algn="l" marL="342900" indent="-342900">
+              <a:lnSpc>
+                <a:spcPts val="1620"/>
+              </a:lnSpc>
+              <a:spcAft>
+                <a:spcPts val="300"/>
+              </a:spcAft>
+              <a:buSzPct val="100000"/>
+              <a:buChar char="•"/>
+            </a:pPr>
+            <a:r>
+              <a:rPr lang="en-US" sz="1200" b="1" dirty="0">
+                <a:solidFill>
+                  <a:srgbClr val="1C2833"/>
+                </a:solidFill>
+                <a:latin typeface="Arial" pitchFamily="34" charset="0"/>
+                <a:ea typeface="Arial" pitchFamily="34" charset="-122"/>
+                <a:cs typeface="Arial" pitchFamily="34" charset="-120"/>
+              </a:rPr>
+              <a:t>Apply.</a:t>
+            </a:r>
+            <a:pPr algn="l" indent="0" marL="0">
+              <a:lnSpc>
+                <a:spcPts val="1620"/>
+              </a:lnSpc>
+              <a:spcAft>
+                <a:spcPts val="300"/>
+              </a:spcAft>
+              <a:buNone/>
+            </a:pPr>
+            <a:r>
+              <a:rPr lang="en-US" sz="1200" dirty="0">
+                <a:solidFill>
+                  <a:srgbClr val="1C2833"/>
+                </a:solidFill>
+                <a:latin typeface="Arial" pitchFamily="34" charset="0"/>
+                <a:ea typeface="Arial" pitchFamily="34" charset="-122"/>
+                <a:cs typeface="Arial" pitchFamily="34" charset="-120"/>
+              </a:rPr>
+              <a:t> Compute together for several </a:t>
+            </a:r>
+            <a:pPr algn="l" indent="0" marL="0">
+              <a:lnSpc>
+                <a:spcPts val="1620"/>
+              </a:lnSpc>
+              <a:spcAft>
+                <a:spcPts val="300"/>
+              </a:spcAft>
+              <a:buNone/>
+            </a:pPr>
+            <a:r>
+              <a:rPr lang="en-US" sz="1200" i="1" dirty="0">
+                <a:solidFill>
+                  <a:srgbClr val="1C2833"/>
+                </a:solidFill>
+                <a:latin typeface="Arial" pitchFamily="34" charset="0"/>
+                <a:ea typeface="Arial" pitchFamily="34" charset="-122"/>
+                <a:cs typeface="Arial" pitchFamily="34" charset="-120"/>
               </a:rPr>
               <a:t>n</a:t>
             </a:r>
             <a:pPr algn="l" indent="0" marL="0">
               <a:lnSpc>
-                <a:spcPts val="1820"/>
-              </a:lnSpc>
-              <a:spcBef>
-                <a:spcPts val="300"/>
-              </a:spcBef>
-              <a:spcAft>
-                <a:spcPts val="300"/>
-              </a:spcAft>
-              <a:buNone/>
-            </a:pPr>
-            <a:r>
-              <a:rPr lang="en-US" sz="1300" dirty="0">
-                <a:solidFill>
-                  <a:srgbClr val="1C2833"/>
-                </a:solidFill>
-                <a:latin typeface="Georgia" pitchFamily="34" charset="0"/>
-                <a:ea typeface="Georgia" pitchFamily="34" charset="-122"/>
-                <a:cs typeface="Georgia" pitchFamily="34" charset="-120"/>
-              </a:rPr>
-              <a:t>² numbers is </a:t>
-            </a:r>
-            <a:pPr algn="l" indent="0" marL="0">
-              <a:lnSpc>
-                <a:spcPts val="1820"/>
-              </a:lnSpc>
-              <a:spcBef>
-                <a:spcPts val="300"/>
-              </a:spcBef>
-              <a:spcAft>
-                <a:spcPts val="300"/>
-              </a:spcAft>
-              <a:buNone/>
-            </a:pPr>
-            <a:r>
-              <a:rPr lang="en-US" sz="1300" i="1" dirty="0">
-                <a:solidFill>
-                  <a:srgbClr val="1C2833"/>
-                </a:solidFill>
-                <a:latin typeface="Georgia" pitchFamily="34" charset="0"/>
-                <a:ea typeface="Georgia" pitchFamily="34" charset="-122"/>
-                <a:cs typeface="Georgia" pitchFamily="34" charset="-120"/>
-              </a:rPr>
-              <a:t>n</a:t>
-            </a:r>
-            <a:pPr algn="l" indent="0" marL="0">
-              <a:lnSpc>
-                <a:spcPts val="1820"/>
-              </a:lnSpc>
-              <a:spcBef>
-                <a:spcPts val="300"/>
-              </a:spcBef>
-              <a:spcAft>
-                <a:spcPts val="300"/>
-              </a:spcAft>
-              <a:buNone/>
-            </a:pPr>
-            <a:r>
-              <a:rPr lang="en-US" sz="1300" dirty="0">
-                <a:solidFill>
-                  <a:srgbClr val="1C2833"/>
-                </a:solidFill>
-                <a:latin typeface="Georgia" pitchFamily="34" charset="0"/>
-                <a:ea typeface="Georgia" pitchFamily="34" charset="-122"/>
-                <a:cs typeface="Georgia" pitchFamily="34" charset="-120"/>
-              </a:rPr>
-              <a:t>²(</a:t>
-            </a:r>
-            <a:pPr algn="l" indent="0" marL="0">
-              <a:lnSpc>
-                <a:spcPts val="1820"/>
-              </a:lnSpc>
-              <a:spcBef>
-                <a:spcPts val="300"/>
-              </a:spcBef>
-              <a:spcAft>
-                <a:spcPts val="300"/>
-              </a:spcAft>
-              <a:buNone/>
-            </a:pPr>
-            <a:r>
-              <a:rPr lang="en-US" sz="1300" i="1" dirty="0">
-                <a:solidFill>
-                  <a:srgbClr val="1C2833"/>
-                </a:solidFill>
-                <a:latin typeface="Georgia" pitchFamily="34" charset="0"/>
-                <a:ea typeface="Georgia" pitchFamily="34" charset="-122"/>
-                <a:cs typeface="Georgia" pitchFamily="34" charset="-120"/>
-              </a:rPr>
-              <a:t>n</a:t>
-            </a:r>
-            <a:pPr algn="l" indent="0" marL="0">
-              <a:lnSpc>
-                <a:spcPts val="1820"/>
-              </a:lnSpc>
-              <a:spcBef>
-                <a:spcPts val="300"/>
-              </a:spcBef>
-              <a:spcAft>
-                <a:spcPts val="300"/>
-              </a:spcAft>
-              <a:buNone/>
-            </a:pPr>
-            <a:r>
-              <a:rPr lang="en-US" sz="1300" dirty="0">
-                <a:solidFill>
-                  <a:srgbClr val="1C2833"/>
-                </a:solidFill>
-                <a:latin typeface="Georgia" pitchFamily="34" charset="0"/>
-                <a:ea typeface="Georgia" pitchFamily="34" charset="-122"/>
-                <a:cs typeface="Georgia" pitchFamily="34" charset="-120"/>
-              </a:rPr>
-              <a:t>² + 1) / 2 (the standard sum-to-</a:t>
-            </a:r>
-            <a:pPr algn="l" indent="0" marL="0">
-              <a:lnSpc>
-                <a:spcPts val="1820"/>
-              </a:lnSpc>
-              <a:spcBef>
-                <a:spcPts val="300"/>
-              </a:spcBef>
-              <a:spcAft>
-                <a:spcPts val="300"/>
-              </a:spcAft>
-              <a:buNone/>
-            </a:pPr>
-            <a:r>
-              <a:rPr lang="en-US" sz="1300" i="1" dirty="0">
-                <a:solidFill>
-                  <a:srgbClr val="1C2833"/>
-                </a:solidFill>
-                <a:latin typeface="Georgia" pitchFamily="34" charset="0"/>
-                <a:ea typeface="Georgia" pitchFamily="34" charset="-122"/>
-                <a:cs typeface="Georgia" pitchFamily="34" charset="-120"/>
-              </a:rPr>
-              <a:t>n</a:t>
-            </a:r>
-            <a:pPr algn="l" indent="0" marL="0">
-              <a:lnSpc>
-                <a:spcPts val="1820"/>
-              </a:lnSpc>
-              <a:spcBef>
-                <a:spcPts val="300"/>
-              </a:spcBef>
-              <a:spcAft>
-                <a:spcPts val="300"/>
-              </a:spcAft>
-              <a:buNone/>
-            </a:pPr>
-            <a:r>
-              <a:rPr lang="en-US" sz="1300" dirty="0">
-                <a:solidFill>
-                  <a:srgbClr val="1C2833"/>
-                </a:solidFill>
-                <a:latin typeface="Georgia" pitchFamily="34" charset="0"/>
-                <a:ea typeface="Georgia" pitchFamily="34" charset="-122"/>
-                <a:cs typeface="Georgia" pitchFamily="34" charset="-120"/>
-              </a:rPr>
-              <a:t> formula). This total is split equally among the </a:t>
-            </a:r>
-            <a:pPr algn="l" indent="0" marL="0">
-              <a:lnSpc>
-                <a:spcPts val="1820"/>
-              </a:lnSpc>
-              <a:spcBef>
-                <a:spcPts val="300"/>
-              </a:spcBef>
-              <a:spcAft>
-                <a:spcPts val="300"/>
-              </a:spcAft>
-              <a:buNone/>
-            </a:pPr>
-            <a:r>
-              <a:rPr lang="en-US" sz="1300" i="1" dirty="0">
-                <a:solidFill>
-                  <a:srgbClr val="1C2833"/>
-                </a:solidFill>
-                <a:latin typeface="Georgia" pitchFamily="34" charset="0"/>
-                <a:ea typeface="Georgia" pitchFamily="34" charset="-122"/>
-                <a:cs typeface="Georgia" pitchFamily="34" charset="-120"/>
-              </a:rPr>
-              <a:t>n</a:t>
-            </a:r>
-            <a:pPr algn="l" indent="0" marL="0">
-              <a:lnSpc>
-                <a:spcPts val="1820"/>
-              </a:lnSpc>
-              <a:spcBef>
-                <a:spcPts val="300"/>
-              </a:spcBef>
-              <a:spcAft>
-                <a:spcPts val="300"/>
-              </a:spcAft>
-              <a:buNone/>
-            </a:pPr>
-            <a:r>
-              <a:rPr lang="en-US" sz="1300" dirty="0">
-                <a:solidFill>
-                  <a:srgbClr val="1C2833"/>
-                </a:solidFill>
-                <a:latin typeface="Georgia" pitchFamily="34" charset="0"/>
-                <a:ea typeface="Georgia" pitchFamily="34" charset="-122"/>
-                <a:cs typeface="Georgia" pitchFamily="34" charset="-120"/>
-              </a:rPr>
-              <a:t> rows, each of which sums to </a:t>
-            </a:r>
-            <a:pPr algn="l" indent="0" marL="0">
-              <a:lnSpc>
-                <a:spcPts val="1820"/>
-              </a:lnSpc>
-              <a:spcBef>
-                <a:spcPts val="300"/>
-              </a:spcBef>
-              <a:spcAft>
-                <a:spcPts val="300"/>
-              </a:spcAft>
-              <a:buNone/>
-            </a:pPr>
-            <a:r>
-              <a:rPr lang="en-US" sz="1300" i="1" dirty="0">
-                <a:solidFill>
-                  <a:srgbClr val="1C2833"/>
-                </a:solidFill>
-                <a:latin typeface="Georgia" pitchFamily="34" charset="0"/>
-                <a:ea typeface="Georgia" pitchFamily="34" charset="-122"/>
-                <a:cs typeface="Georgia" pitchFamily="34" charset="-120"/>
-              </a:rPr>
-              <a:t>S</a:t>
-            </a:r>
-            <a:pPr algn="l" indent="0" marL="0">
-              <a:lnSpc>
-                <a:spcPts val="1820"/>
-              </a:lnSpc>
-              <a:spcBef>
-                <a:spcPts val="300"/>
-              </a:spcBef>
-              <a:spcAft>
-                <a:spcPts val="300"/>
-              </a:spcAft>
-              <a:buNone/>
-            </a:pPr>
-            <a:r>
-              <a:rPr lang="en-US" sz="1300" dirty="0">
-                <a:solidFill>
-                  <a:srgbClr val="1C2833"/>
-                </a:solidFill>
-                <a:latin typeface="Georgia" pitchFamily="34" charset="0"/>
-                <a:ea typeface="Georgia" pitchFamily="34" charset="-122"/>
-                <a:cs typeface="Georgia" pitchFamily="34" charset="-120"/>
-              </a:rPr>
-              <a:t>. So </a:t>
-            </a:r>
-            <a:pPr algn="l" indent="0" marL="0">
-              <a:lnSpc>
-                <a:spcPts val="1820"/>
-              </a:lnSpc>
-              <a:spcBef>
-                <a:spcPts val="300"/>
-              </a:spcBef>
-              <a:spcAft>
-                <a:spcPts val="300"/>
-              </a:spcAft>
-              <a:buNone/>
-            </a:pPr>
-            <a:r>
-              <a:rPr lang="en-US" sz="1300" i="1" dirty="0">
-                <a:solidFill>
-                  <a:srgbClr val="1C2833"/>
-                </a:solidFill>
-                <a:latin typeface="Georgia" pitchFamily="34" charset="0"/>
-                <a:ea typeface="Georgia" pitchFamily="34" charset="-122"/>
-                <a:cs typeface="Georgia" pitchFamily="34" charset="-120"/>
-              </a:rPr>
-              <a:t>n × S</a:t>
-            </a:r>
-            <a:pPr algn="l" indent="0" marL="0">
-              <a:lnSpc>
-                <a:spcPts val="1820"/>
-              </a:lnSpc>
-              <a:spcBef>
-                <a:spcPts val="300"/>
-              </a:spcBef>
-              <a:spcAft>
-                <a:spcPts val="300"/>
-              </a:spcAft>
-              <a:buNone/>
-            </a:pPr>
-            <a:r>
-              <a:rPr lang="en-US" sz="1300" dirty="0">
-                <a:solidFill>
-                  <a:srgbClr val="1C2833"/>
-                </a:solidFill>
-                <a:latin typeface="Georgia" pitchFamily="34" charset="0"/>
-                <a:ea typeface="Georgia" pitchFamily="34" charset="-122"/>
-                <a:cs typeface="Georgia" pitchFamily="34" charset="-120"/>
-              </a:rPr>
-              <a:t> = </a:t>
-            </a:r>
-            <a:pPr algn="l" indent="0" marL="0">
-              <a:lnSpc>
-                <a:spcPts val="1820"/>
-              </a:lnSpc>
-              <a:spcBef>
-                <a:spcPts val="300"/>
-              </a:spcBef>
-              <a:spcAft>
-                <a:spcPts val="300"/>
-              </a:spcAft>
-              <a:buNone/>
-            </a:pPr>
-            <a:r>
-              <a:rPr lang="en-US" sz="1300" i="1" dirty="0">
-                <a:solidFill>
-                  <a:srgbClr val="1C2833"/>
-                </a:solidFill>
-                <a:latin typeface="Georgia" pitchFamily="34" charset="0"/>
-                <a:ea typeface="Georgia" pitchFamily="34" charset="-122"/>
-                <a:cs typeface="Georgia" pitchFamily="34" charset="-120"/>
-              </a:rPr>
-              <a:t>n</a:t>
-            </a:r>
-            <a:pPr algn="l" indent="0" marL="0">
-              <a:lnSpc>
-                <a:spcPts val="1820"/>
-              </a:lnSpc>
-              <a:spcBef>
-                <a:spcPts val="300"/>
-              </a:spcBef>
-              <a:spcAft>
-                <a:spcPts val="300"/>
-              </a:spcAft>
-              <a:buNone/>
-            </a:pPr>
-            <a:r>
-              <a:rPr lang="en-US" sz="1300" dirty="0">
-                <a:solidFill>
-                  <a:srgbClr val="1C2833"/>
-                </a:solidFill>
-                <a:latin typeface="Georgia" pitchFamily="34" charset="0"/>
-                <a:ea typeface="Georgia" pitchFamily="34" charset="-122"/>
-                <a:cs typeface="Georgia" pitchFamily="34" charset="-120"/>
-              </a:rPr>
-              <a:t>²(</a:t>
-            </a:r>
-            <a:pPr algn="l" indent="0" marL="0">
-              <a:lnSpc>
-                <a:spcPts val="1820"/>
-              </a:lnSpc>
-              <a:spcBef>
-                <a:spcPts val="300"/>
-              </a:spcBef>
-              <a:spcAft>
-                <a:spcPts val="300"/>
-              </a:spcAft>
-              <a:buNone/>
-            </a:pPr>
-            <a:r>
-              <a:rPr lang="en-US" sz="1300" i="1" dirty="0">
-                <a:solidFill>
-                  <a:srgbClr val="1C2833"/>
-                </a:solidFill>
-                <a:latin typeface="Georgia" pitchFamily="34" charset="0"/>
-                <a:ea typeface="Georgia" pitchFamily="34" charset="-122"/>
-                <a:cs typeface="Georgia" pitchFamily="34" charset="-120"/>
-              </a:rPr>
-              <a:t>n</a:t>
-            </a:r>
-            <a:pPr algn="l" indent="0" marL="0">
-              <a:lnSpc>
-                <a:spcPts val="1820"/>
-              </a:lnSpc>
-              <a:spcBef>
-                <a:spcPts val="300"/>
-              </a:spcBef>
-              <a:spcAft>
-                <a:spcPts val="300"/>
-              </a:spcAft>
-              <a:buNone/>
-            </a:pPr>
-            <a:r>
-              <a:rPr lang="en-US" sz="1300" dirty="0">
-                <a:solidFill>
-                  <a:srgbClr val="1C2833"/>
-                </a:solidFill>
-                <a:latin typeface="Georgia" pitchFamily="34" charset="0"/>
-                <a:ea typeface="Georgia" pitchFamily="34" charset="-122"/>
-                <a:cs typeface="Georgia" pitchFamily="34" charset="-120"/>
-              </a:rPr>
-              <a:t>² + 1) / 2 → divide both sides by </a:t>
-            </a:r>
-            <a:pPr algn="l" indent="0" marL="0">
-              <a:lnSpc>
-                <a:spcPts val="1820"/>
-              </a:lnSpc>
-              <a:spcBef>
-                <a:spcPts val="300"/>
-              </a:spcBef>
-              <a:spcAft>
-                <a:spcPts val="300"/>
-              </a:spcAft>
-              <a:buNone/>
-            </a:pPr>
-            <a:r>
-              <a:rPr lang="en-US" sz="1300" i="1" dirty="0">
-                <a:solidFill>
-                  <a:srgbClr val="1C2833"/>
-                </a:solidFill>
-                <a:latin typeface="Georgia" pitchFamily="34" charset="0"/>
-                <a:ea typeface="Georgia" pitchFamily="34" charset="-122"/>
-                <a:cs typeface="Georgia" pitchFamily="34" charset="-120"/>
-              </a:rPr>
-              <a:t>n</a:t>
-            </a:r>
-            <a:pPr algn="l" indent="0" marL="0">
-              <a:lnSpc>
-                <a:spcPts val="1820"/>
-              </a:lnSpc>
-              <a:spcBef>
-                <a:spcPts val="300"/>
-              </a:spcBef>
-              <a:spcAft>
-                <a:spcPts val="300"/>
-              </a:spcAft>
-              <a:buNone/>
-            </a:pPr>
-            <a:r>
-              <a:rPr lang="en-US" sz="1300" dirty="0">
-                <a:solidFill>
-                  <a:srgbClr val="1C2833"/>
-                </a:solidFill>
-                <a:latin typeface="Georgia" pitchFamily="34" charset="0"/>
-                <a:ea typeface="Georgia" pitchFamily="34" charset="-122"/>
-                <a:cs typeface="Georgia" pitchFamily="34" charset="-120"/>
-              </a:rPr>
-              <a:t>.</a:t>
-            </a:r>
-            <a:endParaRPr lang="en-US" sz="1300" dirty="0"/>
+                <a:spcPts val="1620"/>
+              </a:lnSpc>
+              <a:spcAft>
+                <a:spcPts val="300"/>
+              </a:spcAft>
+              <a:buNone/>
+            </a:pPr>
+            <a:r>
+              <a:rPr lang="en-US" sz="1200" dirty="0">
+                <a:solidFill>
+                  <a:srgbClr val="1C2833"/>
+                </a:solidFill>
+                <a:latin typeface="Arial" pitchFamily="34" charset="0"/>
+                <a:ea typeface="Arial" pitchFamily="34" charset="-122"/>
+                <a:cs typeface="Arial" pitchFamily="34" charset="-120"/>
+              </a:rPr>
+              <a:t>:</a:t>
+            </a:r>
+            <a:endParaRPr lang="en-US" sz="1200" dirty="0"/>
           </a:p>
         </p:txBody>
       </p:sp>
@@ -8652,8 +9945,8 @@
         </p:nvSpPr>
         <p:spPr>
           <a:xfrm>
-            <a:off x="692051" y="2381399"/>
-            <a:ext cx="7973389" cy="230981"/>
+            <a:off x="406301" y="2505968"/>
+            <a:ext cx="8498026" cy="213271"/>
           </a:xfrm>
           <a:prstGeom prst="rect">
             <a:avLst/>
@@ -8667,174 +9960,264 @@
           <a:p>
             <a:pPr algn="l" indent="0" marL="0">
               <a:lnSpc>
-                <a:spcPts val="1820"/>
-              </a:lnSpc>
-              <a:spcBef>
-                <a:spcPts val="300"/>
-              </a:spcBef>
-              <a:spcAft>
-                <a:spcPts val="300"/>
-              </a:spcAft>
-              <a:buNone/>
-            </a:pPr>
-            <a:r>
-              <a:rPr lang="en-US" sz="1300" dirty="0">
-                <a:solidFill>
-                  <a:srgbClr val="1C2833"/>
-                </a:solidFill>
-                <a:latin typeface="Georgia" pitchFamily="34" charset="0"/>
-                <a:ea typeface="Georgia" pitchFamily="34" charset="-122"/>
-                <a:cs typeface="Georgia" pitchFamily="34" charset="-120"/>
-              </a:rPr>
-              <a:t>| </a:t>
-            </a:r>
-            <a:pPr algn="l" indent="0" marL="0">
-              <a:lnSpc>
-                <a:spcPts val="1820"/>
-              </a:lnSpc>
-              <a:spcBef>
-                <a:spcPts val="300"/>
-              </a:spcBef>
-              <a:spcAft>
-                <a:spcPts val="300"/>
-              </a:spcAft>
-              <a:buNone/>
-            </a:pPr>
-            <a:r>
-              <a:rPr lang="en-US" sz="1300" i="1" dirty="0">
-                <a:solidFill>
-                  <a:srgbClr val="1C2833"/>
-                </a:solidFill>
-                <a:latin typeface="Georgia" pitchFamily="34" charset="0"/>
-                <a:ea typeface="Georgia" pitchFamily="34" charset="-122"/>
-                <a:cs typeface="Georgia" pitchFamily="34" charset="-120"/>
+                <a:spcPts val="1680"/>
+              </a:lnSpc>
+              <a:spcBef>
+                <a:spcPts val="300"/>
+              </a:spcBef>
+              <a:spcAft>
+                <a:spcPts val="300"/>
+              </a:spcAft>
+              <a:buNone/>
+            </a:pPr>
+            <a:r>
+              <a:rPr lang="en-US" sz="1200" i="1" dirty="0">
+                <a:solidFill>
+                  <a:srgbClr val="1C2833"/>
+                </a:solidFill>
+                <a:latin typeface="Arial" pitchFamily="34" charset="0"/>
+                <a:ea typeface="Arial" pitchFamily="34" charset="-122"/>
+                <a:cs typeface="Arial" pitchFamily="34" charset="-120"/>
+              </a:rPr>
+              <a:t>Each row:</a:t>
+            </a:r>
+            <a:pPr algn="l" indent="0" marL="0">
+              <a:lnSpc>
+                <a:spcPts val="1680"/>
+              </a:lnSpc>
+              <a:spcBef>
+                <a:spcPts val="300"/>
+              </a:spcBef>
+              <a:spcAft>
+                <a:spcPts val="300"/>
+              </a:spcAft>
+              <a:buNone/>
+            </a:pPr>
+            <a:r>
+              <a:rPr lang="en-US" sz="1200" dirty="0">
+                <a:solidFill>
+                  <a:srgbClr val="1C2833"/>
+                </a:solidFill>
+                <a:latin typeface="Arial" pitchFamily="34" charset="0"/>
+                <a:ea typeface="Arial" pitchFamily="34" charset="-122"/>
+                <a:cs typeface="Arial" pitchFamily="34" charset="-120"/>
               </a:rPr>
               <a:t>n</a:t>
             </a:r>
             <a:pPr algn="l" indent="0" marL="0">
               <a:lnSpc>
-                <a:spcPts val="1820"/>
-              </a:lnSpc>
-              <a:spcBef>
-                <a:spcPts val="300"/>
-              </a:spcBef>
-              <a:spcAft>
-                <a:spcPts val="300"/>
-              </a:spcAft>
-              <a:buNone/>
-            </a:pPr>
-            <a:r>
-              <a:rPr lang="en-US" sz="1300" dirty="0">
-                <a:solidFill>
-                  <a:srgbClr val="1C2833"/>
-                </a:solidFill>
-                <a:latin typeface="Georgia" pitchFamily="34" charset="0"/>
-                <a:ea typeface="Georgia" pitchFamily="34" charset="-122"/>
-                <a:cs typeface="Georgia" pitchFamily="34" charset="-120"/>
-              </a:rPr>
-              <a:t> | Constant | |-----|----------| | 3 | 15 | | 4 | 34 | | 5 | 65 | | 6 | 111 | | 7 | 175 |</a:t>
-            </a:r>
-            <a:endParaRPr lang="en-US" sz="1300" dirty="0"/>
+                <a:spcPts val="1680"/>
+              </a:lnSpc>
+              <a:spcBef>
+                <a:spcPts val="300"/>
+              </a:spcBef>
+              <a:spcAft>
+                <a:spcPts val="300"/>
+              </a:spcAft>
+              <a:buNone/>
+            </a:pPr>
+            <a:r>
+              <a:rPr lang="en-US" sz="1200" i="1" dirty="0">
+                <a:solidFill>
+                  <a:srgbClr val="1C2833"/>
+                </a:solidFill>
+                <a:latin typeface="Arial" pitchFamily="34" charset="0"/>
+                <a:ea typeface="Arial" pitchFamily="34" charset="-122"/>
+                <a:cs typeface="Arial" pitchFamily="34" charset="-120"/>
+              </a:rPr>
+              <a:t> ·</a:t>
+            </a:r>
+            <a:pPr algn="l" indent="0" marL="0">
+              <a:lnSpc>
+                <a:spcPts val="1680"/>
+              </a:lnSpc>
+              <a:spcBef>
+                <a:spcPts val="300"/>
+              </a:spcBef>
+              <a:spcAft>
+                <a:spcPts val="300"/>
+              </a:spcAft>
+              <a:buNone/>
+            </a:pPr>
+            <a:r>
+              <a:rPr lang="en-US" sz="1200" dirty="0">
+                <a:solidFill>
+                  <a:srgbClr val="1C2833"/>
+                </a:solidFill>
+                <a:latin typeface="Arial" pitchFamily="34" charset="0"/>
+                <a:ea typeface="Arial" pitchFamily="34" charset="-122"/>
+                <a:cs typeface="Arial" pitchFamily="34" charset="-120"/>
+              </a:rPr>
+              <a:t>n</a:t>
+            </a:r>
+            <a:pPr algn="l" indent="0" marL="0">
+              <a:lnSpc>
+                <a:spcPts val="1680"/>
+              </a:lnSpc>
+              <a:spcBef>
+                <a:spcPts val="300"/>
+              </a:spcBef>
+              <a:spcAft>
+                <a:spcPts val="300"/>
+              </a:spcAft>
+              <a:buNone/>
+            </a:pPr>
+            <a:r>
+              <a:rPr lang="en-US" sz="1200" i="1" dirty="0">
+                <a:solidFill>
+                  <a:srgbClr val="1C2833"/>
+                </a:solidFill>
+                <a:latin typeface="Arial" pitchFamily="34" charset="0"/>
+                <a:ea typeface="Arial" pitchFamily="34" charset="-122"/>
+                <a:cs typeface="Arial" pitchFamily="34" charset="-120"/>
+              </a:rPr>
+              <a:t>² ·</a:t>
+            </a:r>
+            <a:pPr algn="l" indent="0" marL="0">
+              <a:lnSpc>
+                <a:spcPts val="1680"/>
+              </a:lnSpc>
+              <a:spcBef>
+                <a:spcPts val="300"/>
+              </a:spcBef>
+              <a:spcAft>
+                <a:spcPts val="300"/>
+              </a:spcAft>
+              <a:buNone/>
+            </a:pPr>
+            <a:r>
+              <a:rPr lang="en-US" sz="1200" dirty="0">
+                <a:solidFill>
+                  <a:srgbClr val="1C2833"/>
+                </a:solidFill>
+                <a:latin typeface="Arial" pitchFamily="34" charset="0"/>
+                <a:ea typeface="Arial" pitchFamily="34" charset="-122"/>
+                <a:cs typeface="Arial" pitchFamily="34" charset="-120"/>
+              </a:rPr>
+              <a:t>n</a:t>
+            </a:r>
+            <a:pPr algn="l" indent="0" marL="0">
+              <a:lnSpc>
+                <a:spcPts val="1680"/>
+              </a:lnSpc>
+              <a:spcBef>
+                <a:spcPts val="300"/>
+              </a:spcBef>
+              <a:spcAft>
+                <a:spcPts val="300"/>
+              </a:spcAft>
+              <a:buNone/>
+            </a:pPr>
+            <a:r>
+              <a:rPr lang="en-US" sz="1200" i="1" dirty="0">
+                <a:solidFill>
+                  <a:srgbClr val="1C2833"/>
+                </a:solidFill>
+                <a:latin typeface="Arial" pitchFamily="34" charset="0"/>
+                <a:ea typeface="Arial" pitchFamily="34" charset="-122"/>
+                <a:cs typeface="Arial" pitchFamily="34" charset="-120"/>
+              </a:rPr>
+              <a:t>²+1 ·</a:t>
+            </a:r>
+            <a:pPr algn="l" indent="0" marL="0">
+              <a:lnSpc>
+                <a:spcPts val="1680"/>
+              </a:lnSpc>
+              <a:spcBef>
+                <a:spcPts val="300"/>
+              </a:spcBef>
+              <a:spcAft>
+                <a:spcPts val="300"/>
+              </a:spcAft>
+              <a:buNone/>
+            </a:pPr>
+            <a:r>
+              <a:rPr lang="en-US" sz="1200" dirty="0">
+                <a:solidFill>
+                  <a:srgbClr val="1C2833"/>
+                </a:solidFill>
+                <a:latin typeface="Arial" pitchFamily="34" charset="0"/>
+                <a:ea typeface="Arial" pitchFamily="34" charset="-122"/>
+                <a:cs typeface="Arial" pitchFamily="34" charset="-120"/>
+              </a:rPr>
+              <a:t>n</a:t>
+            </a:r>
+            <a:pPr algn="l" indent="0" marL="0">
+              <a:lnSpc>
+                <a:spcPts val="1680"/>
+              </a:lnSpc>
+              <a:spcBef>
+                <a:spcPts val="300"/>
+              </a:spcBef>
+              <a:spcAft>
+                <a:spcPts val="300"/>
+              </a:spcAft>
+              <a:buNone/>
+            </a:pPr>
+            <a:r>
+              <a:rPr lang="en-US" sz="1200" i="1" dirty="0">
+                <a:solidFill>
+                  <a:srgbClr val="1C2833"/>
+                </a:solidFill>
+                <a:latin typeface="Arial" pitchFamily="34" charset="0"/>
+                <a:ea typeface="Arial" pitchFamily="34" charset="-122"/>
+                <a:cs typeface="Arial" pitchFamily="34" charset="-120"/>
+              </a:rPr>
+              <a:t>(</a:t>
+            </a:r>
+            <a:pPr algn="l" indent="0" marL="0">
+              <a:lnSpc>
+                <a:spcPts val="1680"/>
+              </a:lnSpc>
+              <a:spcBef>
+                <a:spcPts val="300"/>
+              </a:spcBef>
+              <a:spcAft>
+                <a:spcPts val="300"/>
+              </a:spcAft>
+              <a:buNone/>
+            </a:pPr>
+            <a:r>
+              <a:rPr lang="en-US" sz="1200" dirty="0">
+                <a:solidFill>
+                  <a:srgbClr val="1C2833"/>
+                </a:solidFill>
+                <a:latin typeface="Arial" pitchFamily="34" charset="0"/>
+                <a:ea typeface="Arial" pitchFamily="34" charset="-122"/>
+                <a:cs typeface="Arial" pitchFamily="34" charset="-120"/>
+              </a:rPr>
+              <a:t>n</a:t>
+            </a:r>
+            <a:pPr algn="l" indent="0" marL="0">
+              <a:lnSpc>
+                <a:spcPts val="1680"/>
+              </a:lnSpc>
+              <a:spcBef>
+                <a:spcPts val="300"/>
+              </a:spcBef>
+              <a:spcAft>
+                <a:spcPts val="300"/>
+              </a:spcAft>
+              <a:buNone/>
+            </a:pPr>
+            <a:r>
+              <a:rPr lang="en-US" sz="1200" i="1" dirty="0">
+                <a:solidFill>
+                  <a:srgbClr val="1C2833"/>
+                </a:solidFill>
+                <a:latin typeface="Arial" pitchFamily="34" charset="0"/>
+                <a:ea typeface="Arial" pitchFamily="34" charset="-122"/>
+                <a:cs typeface="Arial" pitchFamily="34" charset="-120"/>
+              </a:rPr>
+              <a:t>²+1)/2.</a:t>
+            </a:r>
+            <a:endParaRPr lang="en-US" sz="1200" dirty="0"/>
           </a:p>
         </p:txBody>
       </p:sp>
       <p:sp>
         <p:nvSpPr>
           <p:cNvPr id="11" name="Text 9"/>
-          <p:cNvSpPr/>
-          <p:nvPr/>
-        </p:nvSpPr>
-        <p:spPr>
-          <a:xfrm>
-            <a:off x="692051" y="2650480"/>
-            <a:ext cx="7973389" cy="230981"/>
-          </a:xfrm>
-          <a:prstGeom prst="rect">
-            <a:avLst/>
-          </a:prstGeom>
-          <a:noFill/>
-          <a:ln/>
-        </p:spPr>
-        <p:txBody>
-          <a:bodyPr wrap="square" lIns="0" tIns="0" rIns="0" bIns="0" rtlCol="0" anchor="t"/>
-          <a:lstStyle/>
-          <a:p>
-            <a:pPr algn="l" indent="0" marL="0">
-              <a:lnSpc>
-                <a:spcPts val="1820"/>
-              </a:lnSpc>
-              <a:spcBef>
-                <a:spcPts val="300"/>
-              </a:spcBef>
-              <a:spcAft>
-                <a:spcPts val="300"/>
-              </a:spcAft>
-              <a:buNone/>
-            </a:pPr>
-            <a:r>
-              <a:rPr lang="en-US" sz="1300" dirty="0">
-                <a:solidFill>
-                  <a:srgbClr val="1C2833"/>
-                </a:solidFill>
-                <a:latin typeface="Georgia" pitchFamily="34" charset="0"/>
-                <a:ea typeface="Georgia" pitchFamily="34" charset="-122"/>
-                <a:cs typeface="Georgia" pitchFamily="34" charset="-120"/>
-              </a:rPr>
-              <a:t>Nārāyaṇa Paṇḍita stated this rule in </a:t>
-            </a:r>
-            <a:pPr algn="l" indent="0" marL="0">
-              <a:lnSpc>
-                <a:spcPts val="1820"/>
-              </a:lnSpc>
-              <a:spcBef>
-                <a:spcPts val="300"/>
-              </a:spcBef>
-              <a:spcAft>
-                <a:spcPts val="300"/>
-              </a:spcAft>
-              <a:buNone/>
-            </a:pPr>
-            <a:r>
-              <a:rPr lang="en-US" sz="1300" i="1" dirty="0">
-                <a:solidFill>
-                  <a:srgbClr val="1C2833"/>
-                </a:solidFill>
-                <a:latin typeface="Georgia" pitchFamily="34" charset="0"/>
-                <a:ea typeface="Georgia" pitchFamily="34" charset="-122"/>
-                <a:cs typeface="Georgia" pitchFamily="34" charset="-120"/>
-              </a:rPr>
-              <a:t>Bhadragaṇita</a:t>
-            </a:r>
-            <a:pPr algn="l" indent="0" marL="0">
-              <a:lnSpc>
-                <a:spcPts val="1820"/>
-              </a:lnSpc>
-              <a:spcBef>
-                <a:spcPts val="300"/>
-              </a:spcBef>
-              <a:spcAft>
-                <a:spcPts val="300"/>
-              </a:spcAft>
-              <a:buNone/>
-            </a:pPr>
-            <a:r>
-              <a:rPr lang="en-US" sz="1300" dirty="0">
-                <a:solidFill>
-                  <a:srgbClr val="1C2833"/>
-                </a:solidFill>
-                <a:latin typeface="Georgia" pitchFamily="34" charset="0"/>
-                <a:ea typeface="Georgia" pitchFamily="34" charset="-122"/>
-                <a:cs typeface="Georgia" pitchFamily="34" charset="-120"/>
-              </a:rPr>
-              <a:t> (1356 CE).</a:t>
-            </a:r>
-            <a:endParaRPr lang="en-US" sz="1300" dirty="0"/>
-          </a:p>
-        </p:txBody>
-      </p:sp>
-      <p:sp>
-        <p:nvSpPr>
-          <p:cNvPr id="12" name="Text 10"/>
           <p:cNvSpPr/>
           <p:nvPr/>
         </p:nvSpPr>
